--- a/quality-arima-sun/downloads/质量管理汇报_孙德鑫.pptx
+++ b/quality-arima-sun/downloads/质量管理汇报_孙德鑫.pptx
@@ -4,18 +4,23 @@
   <p:sldMasterIdLst>
     <p:sldMasterId id="2147483648" r:id="rId1"/>
   </p:sldMasterIdLst>
+  <p:notesMasterIdLst>
+    <p:notesMasterId r:id="rId13"/>
+  </p:notesMasterIdLst>
   <p:sldIdLst>
-    <p:sldId id="256" r:id="rId7"/>
-    <p:sldId id="257" r:id="rId8"/>
-    <p:sldId id="258" r:id="rId9"/>
-    <p:sldId id="259" r:id="rId10"/>
-    <p:sldId id="260" r:id="rId11"/>
-    <p:sldId id="261" r:id="rId12"/>
-    <p:sldId id="262" r:id="rId13"/>
-    <p:sldId id="263" r:id="rId14"/>
-    <p:sldId id="264" r:id="rId15"/>
+    <p:sldId id="256" r:id="rId2"/>
+    <p:sldId id="257" r:id="rId3"/>
+    <p:sldId id="258" r:id="rId4"/>
+    <p:sldId id="265" r:id="rId5"/>
+    <p:sldId id="259" r:id="rId6"/>
+    <p:sldId id="260" r:id="rId7"/>
+    <p:sldId id="261" r:id="rId8"/>
+    <p:sldId id="262" r:id="rId9"/>
+    <p:sldId id="263" r:id="rId10"/>
+    <p:sldId id="266" r:id="rId11"/>
+    <p:sldId id="264" r:id="rId12"/>
   </p:sldIdLst>
-  <p:sldSz cx="12192000" cy="6858000" type="screen4x3"/>
+  <p:sldSz cx="12192000" cy="6858000"/>
   <p:notesSz cx="6858000" cy="9144000"/>
   <p:defaultTextStyle>
     <a:defPPr>
@@ -112,7 +117,148 @@
       </a:defRPr>
     </a:lvl9pPr>
   </p:defaultTextStyle>
+  <p:extLst>
+    <p:ext uri="{EFAFB233-063F-42B5-8137-9DF3F51BA10A}">
+      <p15:sldGuideLst xmlns:p15="http://schemas.microsoft.com/office/powerpoint/2012/main">
+        <p15:guide id="1" orient="horz" pos="2160">
+          <p15:clr>
+            <a:srgbClr val="A4A3A4"/>
+          </p15:clr>
+        </p15:guide>
+        <p15:guide id="2" pos="2880">
+          <p15:clr>
+            <a:srgbClr val="A4A3A4"/>
+          </p15:clr>
+        </p15:guide>
+      </p15:sldGuideLst>
+    </p:ext>
+  </p:extLst>
 </p:presentation>
+</file>
+
+<file path=ppt/notesMasters/notesMaster1.xml><?xml version="1.0" encoding="utf-8"?>
+<p:notesMaster xmlns:a="http://schemas.openxmlformats.org/drawingml/2006/main" xmlns:r="http://schemas.openxmlformats.org/officeDocument/2006/relationships" xmlns:p="http://schemas.openxmlformats.org/presentationml/2006/main">
+  <p:cSld>
+    <p:bg>
+      <p:bgRef idx="1001">
+        <a:schemeClr val="bg1"/>
+      </p:bgRef>
+    </p:bg>
+    <p:spTree>
+      <p:nvGrpSpPr>
+        <p:cNvPr id="1" name=""/>
+        <p:cNvGrpSpPr/>
+        <p:nvPr/>
+      </p:nvGrpSpPr>
+      <p:grpSpPr>
+        <a:xfrm>
+          <a:off x="0" y="0"/>
+          <a:ext cx="0" cy="0"/>
+          <a:chOff x="0" y="0"/>
+          <a:chExt cx="0" cy="0"/>
+        </a:xfrm>
+      </p:grpSpPr>
+    </p:spTree>
+    <p:extLst>
+      <p:ext uri="{BB962C8B-B14F-4D97-AF65-F5344CB8AC3E}">
+        <p14:creationId xmlns:p14="http://schemas.microsoft.com/office/powerpoint/2010/main" val="1212155914"/>
+      </p:ext>
+    </p:extLst>
+  </p:cSld>
+  <p:clrMap bg1="lt1" tx1="dk1" bg2="lt2" tx2="dk2" accent1="accent1" accent2="accent2" accent3="accent3" accent4="accent4" accent5="accent5" accent6="accent6" hlink="hlink" folHlink="folHlink"/>
+  <p:notesStyle>
+    <a:lvl1pPr marL="0" algn="l" defTabSz="914400" rtl="0" eaLnBrk="1" latinLnBrk="0" hangingPunct="1">
+      <a:defRPr sz="1200" kern="1200">
+        <a:solidFill>
+          <a:schemeClr val="tx1"/>
+        </a:solidFill>
+        <a:latin typeface="+mn-lt"/>
+        <a:ea typeface="+mn-ea"/>
+        <a:cs typeface="+mn-cs"/>
+      </a:defRPr>
+    </a:lvl1pPr>
+    <a:lvl2pPr marL="457200" algn="l" defTabSz="914400" rtl="0" eaLnBrk="1" latinLnBrk="0" hangingPunct="1">
+      <a:defRPr sz="1200" kern="1200">
+        <a:solidFill>
+          <a:schemeClr val="tx1"/>
+        </a:solidFill>
+        <a:latin typeface="+mn-lt"/>
+        <a:ea typeface="+mn-ea"/>
+        <a:cs typeface="+mn-cs"/>
+      </a:defRPr>
+    </a:lvl2pPr>
+    <a:lvl3pPr marL="914400" algn="l" defTabSz="914400" rtl="0" eaLnBrk="1" latinLnBrk="0" hangingPunct="1">
+      <a:defRPr sz="1200" kern="1200">
+        <a:solidFill>
+          <a:schemeClr val="tx1"/>
+        </a:solidFill>
+        <a:latin typeface="+mn-lt"/>
+        <a:ea typeface="+mn-ea"/>
+        <a:cs typeface="+mn-cs"/>
+      </a:defRPr>
+    </a:lvl3pPr>
+    <a:lvl4pPr marL="1371600" algn="l" defTabSz="914400" rtl="0" eaLnBrk="1" latinLnBrk="0" hangingPunct="1">
+      <a:defRPr sz="1200" kern="1200">
+        <a:solidFill>
+          <a:schemeClr val="tx1"/>
+        </a:solidFill>
+        <a:latin typeface="+mn-lt"/>
+        <a:ea typeface="+mn-ea"/>
+        <a:cs typeface="+mn-cs"/>
+      </a:defRPr>
+    </a:lvl4pPr>
+    <a:lvl5pPr marL="1828800" algn="l" defTabSz="914400" rtl="0" eaLnBrk="1" latinLnBrk="0" hangingPunct="1">
+      <a:defRPr sz="1200" kern="1200">
+        <a:solidFill>
+          <a:schemeClr val="tx1"/>
+        </a:solidFill>
+        <a:latin typeface="+mn-lt"/>
+        <a:ea typeface="+mn-ea"/>
+        <a:cs typeface="+mn-cs"/>
+      </a:defRPr>
+    </a:lvl5pPr>
+    <a:lvl6pPr marL="2286000" algn="l" defTabSz="914400" rtl="0" eaLnBrk="1" latinLnBrk="0" hangingPunct="1">
+      <a:defRPr sz="1200" kern="1200">
+        <a:solidFill>
+          <a:schemeClr val="tx1"/>
+        </a:solidFill>
+        <a:latin typeface="+mn-lt"/>
+        <a:ea typeface="+mn-ea"/>
+        <a:cs typeface="+mn-cs"/>
+      </a:defRPr>
+    </a:lvl6pPr>
+    <a:lvl7pPr marL="2743200" algn="l" defTabSz="914400" rtl="0" eaLnBrk="1" latinLnBrk="0" hangingPunct="1">
+      <a:defRPr sz="1200" kern="1200">
+        <a:solidFill>
+          <a:schemeClr val="tx1"/>
+        </a:solidFill>
+        <a:latin typeface="+mn-lt"/>
+        <a:ea typeface="+mn-ea"/>
+        <a:cs typeface="+mn-cs"/>
+      </a:defRPr>
+    </a:lvl7pPr>
+    <a:lvl8pPr marL="3200400" algn="l" defTabSz="914400" rtl="0" eaLnBrk="1" latinLnBrk="0" hangingPunct="1">
+      <a:defRPr sz="1200" kern="1200">
+        <a:solidFill>
+          <a:schemeClr val="tx1"/>
+        </a:solidFill>
+        <a:latin typeface="+mn-lt"/>
+        <a:ea typeface="+mn-ea"/>
+        <a:cs typeface="+mn-cs"/>
+      </a:defRPr>
+    </a:lvl8pPr>
+    <a:lvl9pPr marL="3657600" algn="l" defTabSz="914400" rtl="0" eaLnBrk="1" latinLnBrk="0" hangingPunct="1">
+      <a:defRPr sz="1200" kern="1200">
+        <a:solidFill>
+          <a:schemeClr val="tx1"/>
+        </a:solidFill>
+        <a:latin typeface="+mn-lt"/>
+        <a:ea typeface="+mn-ea"/>
+        <a:cs typeface="+mn-cs"/>
+      </a:defRPr>
+    </a:lvl9pPr>
+  </p:notesStyle>
+</p:notesMaster>
 </file>
 
 <file path=ppt/notesSlides/notesSlide1.xml><?xml version="1.0" encoding="utf-8"?>
@@ -162,6 +308,147 @@
             <a:r>
               <a:rPr lang="zh-CN" dirty="0"/>
               <a:t>大家好，我是孙德鑫。今天汇报的问题是：生产检测不合格率能否提前预测？我使用公开的半导体制造检测数据，建立ARIMA模型，预测下一组20条检测记录的不合格率，再与两种简单平均方法比较。重点是说明方法用来解决什么问题，以及它在真实数据中有什么效果。</a:t>
+            </a:r>
+          </a:p>
+        </p:txBody>
+      </p:sp>
+    </p:spTree>
+  </p:cSld>
+  <p:clrMapOvr>
+    <a:masterClrMapping/>
+  </p:clrMapOvr>
+</p:notes>
+</file>
+
+<file path=ppt/notesSlides/notesSlide10.xml><?xml version="1.0" encoding="utf-8"?>
+<p:notes xmlns:a="http://schemas.openxmlformats.org/drawingml/2006/main" xmlns:r="http://schemas.openxmlformats.org/officeDocument/2006/relationships" xmlns:p="http://schemas.openxmlformats.org/presentationml/2006/main">
+  <p:cSld>
+    <p:spTree>
+      <p:nvGrpSpPr>
+        <p:cNvPr id="1" name=""/>
+        <p:cNvGrpSpPr/>
+        <p:nvPr/>
+      </p:nvGrpSpPr>
+      <p:grpSpPr>
+        <a:xfrm>
+          <a:off x="0" y="0"/>
+          <a:ext cx="0" cy="0"/>
+          <a:chOff x="0" y="0"/>
+          <a:chExt cx="0" cy="0"/>
+        </a:xfrm>
+      </p:grpSpPr>
+      <p:sp>
+        <p:nvSpPr>
+          <p:cNvPr id="2" name="Slide Image Placeholder 1"/>
+          <p:cNvSpPr>
+            <a:spLocks noGrp="1" noRot="1" noChangeAspect="1"/>
+          </p:cNvSpPr>
+          <p:nvPr>
+            <p:ph type="sldImg"/>
+          </p:nvPr>
+        </p:nvSpPr>
+        <p:spPr/>
+      </p:sp>
+      <p:sp>
+        <p:nvSpPr>
+          <p:cNvPr id="3" name="Notes Placeholder 2"/>
+          <p:cNvSpPr>
+            <a:spLocks noGrp="1"/>
+          </p:cNvSpPr>
+          <p:nvPr>
+            <p:ph type="body" idx="1"/>
+          </p:nvPr>
+        </p:nvSpPr>
+        <p:spPr/>
+        <p:txBody>
+          <a:bodyPr/>
+          <a:lstStyle/>
+          <a:p>
+            <a:r>
+              <a:t>这段视频概括原始记录、构造不合格率、预测与实际检验。播放完说明六项材料已经按目录整理。软件安装文件为Python官方Windows64位安装程序，配有离线统计库及安装说明。网页顶部的提交材料入口可查看原始记录、导入流程和结果预览。视频是原创数据动画，使用合成旁白。</a:t>
+            </a:r>
+          </a:p>
+        </p:txBody>
+      </p:sp>
+      <p:sp>
+        <p:nvSpPr>
+          <p:cNvPr id="4" name="Slide Number Placeholder 3"/>
+          <p:cNvSpPr>
+            <a:spLocks noGrp="1"/>
+          </p:cNvSpPr>
+          <p:nvPr>
+            <p:ph type="sldNum" idx="5"/>
+          </p:nvPr>
+        </p:nvSpPr>
+        <p:spPr/>
+        <p:txBody>
+          <a:bodyPr/>
+          <a:lstStyle/>
+          <a:p>
+            <a:endParaRPr/>
+          </a:p>
+        </p:txBody>
+      </p:sp>
+    </p:spTree>
+    <p:extLst>
+      <p:ext uri="{BB962C8B-B14F-4D97-AF65-F5344CB8AC3E}">
+        <p14:creationId xmlns:p14="http://schemas.microsoft.com/office/powerpoint/2010/main" val="1929457337"/>
+      </p:ext>
+    </p:extLst>
+  </p:cSld>
+  <p:clrMapOvr>
+    <a:masterClrMapping/>
+  </p:clrMapOvr>
+</p:notes>
+</file>
+
+<file path=ppt/notesSlides/notesSlide11.xml><?xml version="1.0" encoding="utf-8"?>
+<p:notes xmlns:a="http://schemas.openxmlformats.org/drawingml/2006/main" xmlns:r="http://schemas.openxmlformats.org/officeDocument/2006/relationships" xmlns:p="http://schemas.openxmlformats.org/presentationml/2006/main">
+  <p:cSld>
+    <p:spTree>
+      <p:nvGrpSpPr>
+        <p:cNvPr id="1" name=""/>
+        <p:cNvGrpSpPr/>
+        <p:nvPr/>
+      </p:nvGrpSpPr>
+      <p:grpSpPr>
+        <a:xfrm>
+          <a:off x="0" y="0"/>
+          <a:ext cx="0" cy="0"/>
+          <a:chOff x="0" y="0"/>
+          <a:chExt cx="0" cy="0"/>
+        </a:xfrm>
+      </p:grpSpPr>
+      <p:sp>
+        <p:nvSpPr>
+          <p:cNvPr id="2" name="Slide Image Placeholder 1"/>
+          <p:cNvSpPr>
+            <a:spLocks noGrp="1" noRot="1" noChangeAspect="1"/>
+          </p:cNvSpPr>
+          <p:nvPr>
+            <p:ph type="sldImg"/>
+          </p:nvPr>
+        </p:nvSpPr>
+        <p:spPr/>
+      </p:sp>
+      <p:sp>
+        <p:nvSpPr>
+          <p:cNvPr id="3" name="Notes Placeholder 2"/>
+          <p:cNvSpPr>
+            <a:spLocks noGrp="1"/>
+          </p:cNvSpPr>
+          <p:nvPr>
+            <p:ph type="body" idx="1"/>
+          </p:nvPr>
+        </p:nvSpPr>
+        <p:spPr/>
+        <p:txBody>
+          <a:bodyPr/>
+          <a:lstStyle/>
+          <a:p>
+            <a:r>
+              <a:rPr lang="zh-CN" dirty="0"/>
+              <a:t>回到老师的问题：我用ARIMA做了什么？我用它预测下一组检测样本的不合格率，并通过真实后续记录，与简单平均法比较它的实际价值。本次结果提示三个管理上的做法：保留简单方法作为对照；把预测与实际检测结合，关注明显偏离；进一步加入设备和工艺信息，检验是否能改善突发波动预测。我的汇报到这里，谢谢大家。</a:t>
             </a:r>
           </a:p>
         </p:txBody>
@@ -337,6 +624,88 @@
           <a:lstStyle/>
           <a:p>
             <a:r>
+              <a:t>展示原始文件前三行，解释标签和日期。接着说明run_analysis.py直接读取原始标签，按时间排序，每20条分组，最后7条只进入总体描述。导入目录另有整理后的检测记录和78组统计CSV供查看。输出包括16组滚动预测、训练模型比较、图表和analysis.json。数据来源：https://archive.ics.uci.edu/dataset/179/secom。</a:t>
+            </a:r>
+          </a:p>
+        </p:txBody>
+      </p:sp>
+      <p:sp>
+        <p:nvSpPr>
+          <p:cNvPr id="4" name="Slide Number Placeholder 3"/>
+          <p:cNvSpPr>
+            <a:spLocks noGrp="1"/>
+          </p:cNvSpPr>
+          <p:nvPr>
+            <p:ph type="sldNum" idx="5"/>
+          </p:nvPr>
+        </p:nvSpPr>
+        <p:spPr/>
+        <p:txBody>
+          <a:bodyPr/>
+          <a:lstStyle/>
+          <a:p>
+            <a:endParaRPr/>
+          </a:p>
+        </p:txBody>
+      </p:sp>
+    </p:spTree>
+    <p:extLst>
+      <p:ext uri="{BB962C8B-B14F-4D97-AF65-F5344CB8AC3E}">
+        <p14:creationId xmlns:p14="http://schemas.microsoft.com/office/powerpoint/2010/main" val="972687290"/>
+      </p:ext>
+    </p:extLst>
+  </p:cSld>
+  <p:clrMapOvr>
+    <a:masterClrMapping/>
+  </p:clrMapOvr>
+</p:notes>
+</file>
+
+<file path=ppt/notesSlides/notesSlide5.xml><?xml version="1.0" encoding="utf-8"?>
+<p:notes xmlns:a="http://schemas.openxmlformats.org/drawingml/2006/main" xmlns:r="http://schemas.openxmlformats.org/officeDocument/2006/relationships" xmlns:p="http://schemas.openxmlformats.org/presentationml/2006/main">
+  <p:cSld>
+    <p:spTree>
+      <p:nvGrpSpPr>
+        <p:cNvPr id="1" name=""/>
+        <p:cNvGrpSpPr/>
+        <p:nvPr/>
+      </p:nvGrpSpPr>
+      <p:grpSpPr>
+        <a:xfrm>
+          <a:off x="0" y="0"/>
+          <a:ext cx="0" cy="0"/>
+          <a:chOff x="0" y="0"/>
+          <a:chExt cx="0" cy="0"/>
+        </a:xfrm>
+      </p:grpSpPr>
+      <p:sp>
+        <p:nvSpPr>
+          <p:cNvPr id="2" name="Slide Image Placeholder 1"/>
+          <p:cNvSpPr>
+            <a:spLocks noGrp="1" noRot="1" noChangeAspect="1"/>
+          </p:cNvSpPr>
+          <p:nvPr>
+            <p:ph type="sldImg"/>
+          </p:nvPr>
+        </p:nvSpPr>
+        <p:spPr/>
+      </p:sp>
+      <p:sp>
+        <p:nvSpPr>
+          <p:cNvPr id="3" name="Notes Placeholder 2"/>
+          <p:cNvSpPr>
+            <a:spLocks noGrp="1"/>
+          </p:cNvSpPr>
+          <p:nvPr>
+            <p:ph type="body" idx="1"/>
+          </p:nvPr>
+        </p:nvSpPr>
+        <p:spPr/>
+        <p:txBody>
+          <a:bodyPr/>
+          <a:lstStyle/>
+          <a:p>
+            <a:r>
               <a:rPr lang="zh-CN" dirty="0"/>
               <a:t>这里用20个芯片状对象表示20条真实检测记录。以第1组为例，揭示检测结果后，里面有4条失败，所以这一组的不合格率是4除以20，等于20%。三维场景的作用是把一条条记录怎样变成一个质量指标讲清楚。芯片外形和位置只是教学示意。全部记录组成78个完整分析组，剩余7条只计入总体描述。这里的组是分析时划分的，不是数据提供的生产批次。</a:t>
             </a:r>
@@ -351,7 +720,7 @@
 </p:notes>
 </file>
 
-<file path=ppt/notesSlides/notesSlide5.xml><?xml version="1.0" encoding="utf-8"?>
+<file path=ppt/notesSlides/notesSlide6.xml><?xml version="1.0" encoding="utf-8"?>
 <p:notes xmlns:a="http://schemas.openxmlformats.org/drawingml/2006/main" xmlns:r="http://schemas.openxmlformats.org/officeDocument/2006/relationships" xmlns:p="http://schemas.openxmlformats.org/presentationml/2006/main">
   <p:cSld>
     <p:spTree>
@@ -410,7 +779,7 @@
 </p:notes>
 </file>
 
-<file path=ppt/notesSlides/notesSlide6.xml><?xml version="1.0" encoding="utf-8"?>
+<file path=ppt/notesSlides/notesSlide7.xml><?xml version="1.0" encoding="utf-8"?>
 <p:notes xmlns:a="http://schemas.openxmlformats.org/drawingml/2006/main" xmlns:r="http://schemas.openxmlformats.org/officeDocument/2006/relationships" xmlns:p="http://schemas.openxmlformats.org/presentationml/2006/main">
   <p:cSld>
     <p:spTree>
@@ -469,7 +838,7 @@
 </p:notes>
 </file>
 
-<file path=ppt/notesSlides/notesSlide7.xml><?xml version="1.0" encoding="utf-8"?>
+<file path=ppt/notesSlides/notesSlide8.xml><?xml version="1.0" encoding="utf-8"?>
 <p:notes xmlns:a="http://schemas.openxmlformats.org/drawingml/2006/main" xmlns:r="http://schemas.openxmlformats.org/officeDocument/2006/relationships" xmlns:p="http://schemas.openxmlformats.org/presentationml/2006/main">
   <p:cSld>
     <p:spTree>
@@ -528,7 +897,7 @@
 </p:notes>
 </file>
 
-<file path=ppt/notesSlides/notesSlide8.xml><?xml version="1.0" encoding="utf-8"?>
+<file path=ppt/notesSlides/notesSlide9.xml><?xml version="1.0" encoding="utf-8"?>
 <p:notes xmlns:a="http://schemas.openxmlformats.org/drawingml/2006/main" xmlns:r="http://schemas.openxmlformats.org/officeDocument/2006/relationships" xmlns:p="http://schemas.openxmlformats.org/presentationml/2006/main">
   <p:cSld>
     <p:spTree>
@@ -587,65 +956,6 @@
 </p:notes>
 </file>
 
-<file path=ppt/notesSlides/notesSlide9.xml><?xml version="1.0" encoding="utf-8"?>
-<p:notes xmlns:a="http://schemas.openxmlformats.org/drawingml/2006/main" xmlns:r="http://schemas.openxmlformats.org/officeDocument/2006/relationships" xmlns:p="http://schemas.openxmlformats.org/presentationml/2006/main">
-  <p:cSld>
-    <p:spTree>
-      <p:nvGrpSpPr>
-        <p:cNvPr id="1" name=""/>
-        <p:cNvGrpSpPr/>
-        <p:nvPr/>
-      </p:nvGrpSpPr>
-      <p:grpSpPr>
-        <a:xfrm>
-          <a:off x="0" y="0"/>
-          <a:ext cx="0" cy="0"/>
-          <a:chOff x="0" y="0"/>
-          <a:chExt cx="0" cy="0"/>
-        </a:xfrm>
-      </p:grpSpPr>
-      <p:sp>
-        <p:nvSpPr>
-          <p:cNvPr id="2" name="Slide Image Placeholder 1"/>
-          <p:cNvSpPr>
-            <a:spLocks noGrp="1" noRot="1" noChangeAspect="1"/>
-          </p:cNvSpPr>
-          <p:nvPr>
-            <p:ph type="sldImg"/>
-          </p:nvPr>
-        </p:nvSpPr>
-        <p:spPr/>
-      </p:sp>
-      <p:sp>
-        <p:nvSpPr>
-          <p:cNvPr id="3" name="Notes Placeholder 2"/>
-          <p:cNvSpPr>
-            <a:spLocks noGrp="1"/>
-          </p:cNvSpPr>
-          <p:nvPr>
-            <p:ph type="body" idx="1"/>
-          </p:nvPr>
-        </p:nvSpPr>
-        <p:spPr/>
-        <p:txBody>
-          <a:bodyPr/>
-          <a:lstStyle/>
-          <a:p>
-            <a:r>
-              <a:rPr lang="zh-CN" dirty="0"/>
-              <a:t>回到老师的问题：我用ARIMA做了什么？我用它预测下一组检测样本的不合格率，并通过真实后续记录，与简单平均法比较它的实际价值。本次结果提示三个管理上的做法：保留简单方法作为对照；把预测与实际检测结合，关注明显偏离；进一步加入设备和工艺信息，检验是否能改善突发波动预测。我的汇报到这里，谢谢大家。</a:t>
-            </a:r>
-          </a:p>
-        </p:txBody>
-      </p:sp>
-    </p:spTree>
-  </p:cSld>
-  <p:clrMapOvr>
-    <a:masterClrMapping/>
-  </p:clrMapOvr>
-</p:notes>
-</file>
-
 <file path=ppt/slideLayouts/slideLayout1.xml><?xml version="1.0" encoding="utf-8"?>
 <p:sldLayout xmlns:a="http://schemas.openxmlformats.org/drawingml/2006/main" xmlns:r="http://schemas.openxmlformats.org/officeDocument/2006/relationships" xmlns:p="http://schemas.openxmlformats.org/presentationml/2006/main" type="title" preserve="1">
   <p:cSld name="Title Slide">
@@ -684,10 +994,9 @@
           <a:lstStyle/>
           <a:p>
             <a:r>
-              <a:rPr lang="en-US" smtClean="0"/>
+              <a:rPr lang="en-US"/>
               <a:t>Click to edit Master title style</a:t>
             </a:r>
-            <a:endParaRPr lang="en-US"/>
           </a:p>
         </p:txBody>
       </p:sp>
@@ -803,10 +1112,9 @@
           </a:lstStyle>
           <a:p>
             <a:r>
-              <a:rPr lang="en-US" smtClean="0"/>
+              <a:rPr lang="en-US"/>
               <a:t>Click to edit Master subtitle style</a:t>
             </a:r>
-            <a:endParaRPr lang="en-US"/>
           </a:p>
         </p:txBody>
       </p:sp>
@@ -827,7 +1135,7 @@
           <a:p>
             <a:fld id="{5BCAD085-E8A6-8845-BD4E-CB4CCA059FC4}" type="datetimeFigureOut">
               <a:rPr lang="en-US" smtClean="0"/>
-              <a:t>1/27/13</a:t>
+              <a:t>10/29/2026</a:t>
             </a:fld>
             <a:endParaRPr lang="en-US"/>
           </a:p>
@@ -921,10 +1229,9 @@
           <a:lstStyle/>
           <a:p>
             <a:r>
-              <a:rPr lang="en-US" smtClean="0"/>
+              <a:rPr lang="en-US"/>
               <a:t>Click to edit Master title style</a:t>
             </a:r>
-            <a:endParaRPr lang="en-US"/>
           </a:p>
         </p:txBody>
       </p:sp>
@@ -945,38 +1252,37 @@
           <a:p>
             <a:pPr lvl="0"/>
             <a:r>
-              <a:rPr lang="en-US" smtClean="0"/>
+              <a:rPr lang="en-US"/>
               <a:t>Click to edit Master text styles</a:t>
             </a:r>
           </a:p>
           <a:p>
             <a:pPr lvl="1"/>
             <a:r>
-              <a:rPr lang="en-US" smtClean="0"/>
+              <a:rPr lang="en-US"/>
               <a:t>Second level</a:t>
             </a:r>
           </a:p>
           <a:p>
             <a:pPr lvl="2"/>
             <a:r>
-              <a:rPr lang="en-US" smtClean="0"/>
+              <a:rPr lang="en-US"/>
               <a:t>Third level</a:t>
             </a:r>
           </a:p>
           <a:p>
             <a:pPr lvl="3"/>
             <a:r>
-              <a:rPr lang="en-US" smtClean="0"/>
+              <a:rPr lang="en-US"/>
               <a:t>Fourth level</a:t>
             </a:r>
           </a:p>
           <a:p>
             <a:pPr lvl="4"/>
             <a:r>
-              <a:rPr lang="en-US" smtClean="0"/>
+              <a:rPr lang="en-US"/>
               <a:t>Fifth level</a:t>
             </a:r>
-            <a:endParaRPr lang="en-US"/>
           </a:p>
         </p:txBody>
       </p:sp>
@@ -997,7 +1303,7 @@
           <a:p>
             <a:fld id="{5BCAD085-E8A6-8845-BD4E-CB4CCA059FC4}" type="datetimeFigureOut">
               <a:rPr lang="en-US" smtClean="0"/>
-              <a:t>1/27/13</a:t>
+              <a:t>10/29/2026</a:t>
             </a:fld>
             <a:endParaRPr lang="en-US"/>
           </a:p>
@@ -1096,10 +1402,9 @@
           <a:lstStyle/>
           <a:p>
             <a:r>
-              <a:rPr lang="en-US" smtClean="0"/>
+              <a:rPr lang="en-US"/>
               <a:t>Click to edit Master title style</a:t>
             </a:r>
-            <a:endParaRPr lang="en-US"/>
           </a:p>
         </p:txBody>
       </p:sp>
@@ -1125,38 +1430,37 @@
           <a:p>
             <a:pPr lvl="0"/>
             <a:r>
-              <a:rPr lang="en-US" smtClean="0"/>
+              <a:rPr lang="en-US"/>
               <a:t>Click to edit Master text styles</a:t>
             </a:r>
           </a:p>
           <a:p>
             <a:pPr lvl="1"/>
             <a:r>
-              <a:rPr lang="en-US" smtClean="0"/>
+              <a:rPr lang="en-US"/>
               <a:t>Second level</a:t>
             </a:r>
           </a:p>
           <a:p>
             <a:pPr lvl="2"/>
             <a:r>
-              <a:rPr lang="en-US" smtClean="0"/>
+              <a:rPr lang="en-US"/>
               <a:t>Third level</a:t>
             </a:r>
           </a:p>
           <a:p>
             <a:pPr lvl="3"/>
             <a:r>
-              <a:rPr lang="en-US" smtClean="0"/>
+              <a:rPr lang="en-US"/>
               <a:t>Fourth level</a:t>
             </a:r>
           </a:p>
           <a:p>
             <a:pPr lvl="4"/>
             <a:r>
-              <a:rPr lang="en-US" smtClean="0"/>
+              <a:rPr lang="en-US"/>
               <a:t>Fifth level</a:t>
             </a:r>
-            <a:endParaRPr lang="en-US"/>
           </a:p>
         </p:txBody>
       </p:sp>
@@ -1177,7 +1481,7 @@
           <a:p>
             <a:fld id="{5BCAD085-E8A6-8845-BD4E-CB4CCA059FC4}" type="datetimeFigureOut">
               <a:rPr lang="en-US" smtClean="0"/>
-              <a:t>1/27/13</a:t>
+              <a:t>10/29/2026</a:t>
             </a:fld>
             <a:endParaRPr lang="en-US"/>
           </a:p>
@@ -1271,10 +1575,9 @@
           <a:lstStyle/>
           <a:p>
             <a:r>
-              <a:rPr lang="en-US" smtClean="0"/>
+              <a:rPr lang="en-US"/>
               <a:t>Click to edit Master title style</a:t>
             </a:r>
-            <a:endParaRPr lang="en-US"/>
           </a:p>
         </p:txBody>
       </p:sp>
@@ -1295,38 +1598,37 @@
           <a:p>
             <a:pPr lvl="0"/>
             <a:r>
-              <a:rPr lang="en-US" smtClean="0"/>
+              <a:rPr lang="en-US"/>
               <a:t>Click to edit Master text styles</a:t>
             </a:r>
           </a:p>
           <a:p>
             <a:pPr lvl="1"/>
             <a:r>
-              <a:rPr lang="en-US" smtClean="0"/>
+              <a:rPr lang="en-US"/>
               <a:t>Second level</a:t>
             </a:r>
           </a:p>
           <a:p>
             <a:pPr lvl="2"/>
             <a:r>
-              <a:rPr lang="en-US" smtClean="0"/>
+              <a:rPr lang="en-US"/>
               <a:t>Third level</a:t>
             </a:r>
           </a:p>
           <a:p>
             <a:pPr lvl="3"/>
             <a:r>
-              <a:rPr lang="en-US" smtClean="0"/>
+              <a:rPr lang="en-US"/>
               <a:t>Fourth level</a:t>
             </a:r>
           </a:p>
           <a:p>
             <a:pPr lvl="4"/>
             <a:r>
-              <a:rPr lang="en-US" smtClean="0"/>
+              <a:rPr lang="en-US"/>
               <a:t>Fifth level</a:t>
             </a:r>
-            <a:endParaRPr lang="en-US"/>
           </a:p>
         </p:txBody>
       </p:sp>
@@ -1347,7 +1649,7 @@
           <a:p>
             <a:fld id="{5BCAD085-E8A6-8845-BD4E-CB4CCA059FC4}" type="datetimeFigureOut">
               <a:rPr lang="en-US" smtClean="0"/>
-              <a:t>1/27/13</a:t>
+              <a:t>10/29/2026</a:t>
             </a:fld>
             <a:endParaRPr lang="en-US"/>
           </a:p>
@@ -1450,10 +1752,9 @@
           </a:lstStyle>
           <a:p>
             <a:r>
-              <a:rPr lang="en-US" smtClean="0"/>
+              <a:rPr lang="en-US"/>
               <a:t>Click to edit Master title style</a:t>
             </a:r>
-            <a:endParaRPr lang="en-US"/>
           </a:p>
         </p:txBody>
       </p:sp>
@@ -1570,7 +1871,7 @@
           <a:p>
             <a:pPr lvl="0"/>
             <a:r>
-              <a:rPr lang="en-US" smtClean="0"/>
+              <a:rPr lang="en-US"/>
               <a:t>Click to edit Master text styles</a:t>
             </a:r>
           </a:p>
@@ -1593,7 +1894,7 @@
           <a:p>
             <a:fld id="{5BCAD085-E8A6-8845-BD4E-CB4CCA059FC4}" type="datetimeFigureOut">
               <a:rPr lang="en-US" smtClean="0"/>
-              <a:t>1/27/13</a:t>
+              <a:t>10/29/2026</a:t>
             </a:fld>
             <a:endParaRPr lang="en-US"/>
           </a:p>
@@ -1687,10 +1988,9 @@
           <a:lstStyle/>
           <a:p>
             <a:r>
-              <a:rPr lang="en-US" smtClean="0"/>
+              <a:rPr lang="en-US"/>
               <a:t>Click to edit Master title style</a:t>
             </a:r>
-            <a:endParaRPr lang="en-US"/>
           </a:p>
         </p:txBody>
       </p:sp>
@@ -1744,38 +2044,37 @@
           <a:p>
             <a:pPr lvl="0"/>
             <a:r>
-              <a:rPr lang="en-US" smtClean="0"/>
+              <a:rPr lang="en-US"/>
               <a:t>Click to edit Master text styles</a:t>
             </a:r>
           </a:p>
           <a:p>
             <a:pPr lvl="1"/>
             <a:r>
-              <a:rPr lang="en-US" smtClean="0"/>
+              <a:rPr lang="en-US"/>
               <a:t>Second level</a:t>
             </a:r>
           </a:p>
           <a:p>
             <a:pPr lvl="2"/>
             <a:r>
-              <a:rPr lang="en-US" smtClean="0"/>
+              <a:rPr lang="en-US"/>
               <a:t>Third level</a:t>
             </a:r>
           </a:p>
           <a:p>
             <a:pPr lvl="3"/>
             <a:r>
-              <a:rPr lang="en-US" smtClean="0"/>
+              <a:rPr lang="en-US"/>
               <a:t>Fourth level</a:t>
             </a:r>
           </a:p>
           <a:p>
             <a:pPr lvl="4"/>
             <a:r>
-              <a:rPr lang="en-US" smtClean="0"/>
+              <a:rPr lang="en-US"/>
               <a:t>Fifth level</a:t>
             </a:r>
-            <a:endParaRPr lang="en-US"/>
           </a:p>
         </p:txBody>
       </p:sp>
@@ -1829,38 +2128,37 @@
           <a:p>
             <a:pPr lvl="0"/>
             <a:r>
-              <a:rPr lang="en-US" smtClean="0"/>
+              <a:rPr lang="en-US"/>
               <a:t>Click to edit Master text styles</a:t>
             </a:r>
           </a:p>
           <a:p>
             <a:pPr lvl="1"/>
             <a:r>
-              <a:rPr lang="en-US" smtClean="0"/>
+              <a:rPr lang="en-US"/>
               <a:t>Second level</a:t>
             </a:r>
           </a:p>
           <a:p>
             <a:pPr lvl="2"/>
             <a:r>
-              <a:rPr lang="en-US" smtClean="0"/>
+              <a:rPr lang="en-US"/>
               <a:t>Third level</a:t>
             </a:r>
           </a:p>
           <a:p>
             <a:pPr lvl="3"/>
             <a:r>
-              <a:rPr lang="en-US" smtClean="0"/>
+              <a:rPr lang="en-US"/>
               <a:t>Fourth level</a:t>
             </a:r>
           </a:p>
           <a:p>
             <a:pPr lvl="4"/>
             <a:r>
-              <a:rPr lang="en-US" smtClean="0"/>
+              <a:rPr lang="en-US"/>
               <a:t>Fifth level</a:t>
             </a:r>
-            <a:endParaRPr lang="en-US"/>
           </a:p>
         </p:txBody>
       </p:sp>
@@ -1881,7 +2179,7 @@
           <a:p>
             <a:fld id="{5BCAD085-E8A6-8845-BD4E-CB4CCA059FC4}" type="datetimeFigureOut">
               <a:rPr lang="en-US" smtClean="0"/>
-              <a:t>1/27/13</a:t>
+              <a:t>10/29/2026</a:t>
             </a:fld>
             <a:endParaRPr lang="en-US"/>
           </a:p>
@@ -1979,10 +2277,9 @@
           </a:lstStyle>
           <a:p>
             <a:r>
-              <a:rPr lang="en-US" smtClean="0"/>
+              <a:rPr lang="en-US"/>
               <a:t>Click to edit Master title style</a:t>
             </a:r>
-            <a:endParaRPr lang="en-US"/>
           </a:p>
         </p:txBody>
       </p:sp>
@@ -2045,7 +2342,7 @@
           <a:p>
             <a:pPr lvl="0"/>
             <a:r>
-              <a:rPr lang="en-US" smtClean="0"/>
+              <a:rPr lang="en-US"/>
               <a:t>Click to edit Master text styles</a:t>
             </a:r>
           </a:p>
@@ -2101,38 +2398,37 @@
           <a:p>
             <a:pPr lvl="0"/>
             <a:r>
-              <a:rPr lang="en-US" smtClean="0"/>
+              <a:rPr lang="en-US"/>
               <a:t>Click to edit Master text styles</a:t>
             </a:r>
           </a:p>
           <a:p>
             <a:pPr lvl="1"/>
             <a:r>
-              <a:rPr lang="en-US" smtClean="0"/>
+              <a:rPr lang="en-US"/>
               <a:t>Second level</a:t>
             </a:r>
           </a:p>
           <a:p>
             <a:pPr lvl="2"/>
             <a:r>
-              <a:rPr lang="en-US" smtClean="0"/>
+              <a:rPr lang="en-US"/>
               <a:t>Third level</a:t>
             </a:r>
           </a:p>
           <a:p>
             <a:pPr lvl="3"/>
             <a:r>
-              <a:rPr lang="en-US" smtClean="0"/>
+              <a:rPr lang="en-US"/>
               <a:t>Fourth level</a:t>
             </a:r>
           </a:p>
           <a:p>
             <a:pPr lvl="4"/>
             <a:r>
-              <a:rPr lang="en-US" smtClean="0"/>
+              <a:rPr lang="en-US"/>
               <a:t>Fifth level</a:t>
             </a:r>
-            <a:endParaRPr lang="en-US"/>
           </a:p>
         </p:txBody>
       </p:sp>
@@ -2195,7 +2491,7 @@
           <a:p>
             <a:pPr lvl="0"/>
             <a:r>
-              <a:rPr lang="en-US" smtClean="0"/>
+              <a:rPr lang="en-US"/>
               <a:t>Click to edit Master text styles</a:t>
             </a:r>
           </a:p>
@@ -2251,38 +2547,37 @@
           <a:p>
             <a:pPr lvl="0"/>
             <a:r>
-              <a:rPr lang="en-US" smtClean="0"/>
+              <a:rPr lang="en-US"/>
               <a:t>Click to edit Master text styles</a:t>
             </a:r>
           </a:p>
           <a:p>
             <a:pPr lvl="1"/>
             <a:r>
-              <a:rPr lang="en-US" smtClean="0"/>
+              <a:rPr lang="en-US"/>
               <a:t>Second level</a:t>
             </a:r>
           </a:p>
           <a:p>
             <a:pPr lvl="2"/>
             <a:r>
-              <a:rPr lang="en-US" smtClean="0"/>
+              <a:rPr lang="en-US"/>
               <a:t>Third level</a:t>
             </a:r>
           </a:p>
           <a:p>
             <a:pPr lvl="3"/>
             <a:r>
-              <a:rPr lang="en-US" smtClean="0"/>
+              <a:rPr lang="en-US"/>
               <a:t>Fourth level</a:t>
             </a:r>
           </a:p>
           <a:p>
             <a:pPr lvl="4"/>
             <a:r>
-              <a:rPr lang="en-US" smtClean="0"/>
+              <a:rPr lang="en-US"/>
               <a:t>Fifth level</a:t>
             </a:r>
-            <a:endParaRPr lang="en-US"/>
           </a:p>
         </p:txBody>
       </p:sp>
@@ -2303,7 +2598,7 @@
           <a:p>
             <a:fld id="{5BCAD085-E8A6-8845-BD4E-CB4CCA059FC4}" type="datetimeFigureOut">
               <a:rPr lang="en-US" smtClean="0"/>
-              <a:t>1/27/13</a:t>
+              <a:t>10/29/2026</a:t>
             </a:fld>
             <a:endParaRPr lang="en-US"/>
           </a:p>
@@ -2397,10 +2692,9 @@
           <a:lstStyle/>
           <a:p>
             <a:r>
-              <a:rPr lang="en-US" smtClean="0"/>
+              <a:rPr lang="en-US"/>
               <a:t>Click to edit Master title style</a:t>
             </a:r>
-            <a:endParaRPr lang="en-US"/>
           </a:p>
         </p:txBody>
       </p:sp>
@@ -2421,7 +2715,7 @@
           <a:p>
             <a:fld id="{5BCAD085-E8A6-8845-BD4E-CB4CCA059FC4}" type="datetimeFigureOut">
               <a:rPr lang="en-US" smtClean="0"/>
-              <a:t>1/27/13</a:t>
+              <a:t>10/29/2026</a:t>
             </a:fld>
             <a:endParaRPr lang="en-US"/>
           </a:p>
@@ -2516,7 +2810,7 @@
           <a:p>
             <a:fld id="{5BCAD085-E8A6-8845-BD4E-CB4CCA059FC4}" type="datetimeFigureOut">
               <a:rPr lang="en-US" smtClean="0"/>
-              <a:t>1/27/13</a:t>
+              <a:t>10/29/2026</a:t>
             </a:fld>
             <a:endParaRPr lang="en-US"/>
           </a:p>
@@ -2619,10 +2913,9 @@
           </a:lstStyle>
           <a:p>
             <a:r>
-              <a:rPr lang="en-US" smtClean="0"/>
+              <a:rPr lang="en-US"/>
               <a:t>Click to edit Master title style</a:t>
             </a:r>
-            <a:endParaRPr lang="en-US"/>
           </a:p>
         </p:txBody>
       </p:sp>
@@ -2676,38 +2969,37 @@
           <a:p>
             <a:pPr lvl="0"/>
             <a:r>
-              <a:rPr lang="en-US" smtClean="0"/>
+              <a:rPr lang="en-US"/>
               <a:t>Click to edit Master text styles</a:t>
             </a:r>
           </a:p>
           <a:p>
             <a:pPr lvl="1"/>
             <a:r>
-              <a:rPr lang="en-US" smtClean="0"/>
+              <a:rPr lang="en-US"/>
               <a:t>Second level</a:t>
             </a:r>
           </a:p>
           <a:p>
             <a:pPr lvl="2"/>
             <a:r>
-              <a:rPr lang="en-US" smtClean="0"/>
+              <a:rPr lang="en-US"/>
               <a:t>Third level</a:t>
             </a:r>
           </a:p>
           <a:p>
             <a:pPr lvl="3"/>
             <a:r>
-              <a:rPr lang="en-US" smtClean="0"/>
+              <a:rPr lang="en-US"/>
               <a:t>Fourth level</a:t>
             </a:r>
           </a:p>
           <a:p>
             <a:pPr lvl="4"/>
             <a:r>
-              <a:rPr lang="en-US" smtClean="0"/>
+              <a:rPr lang="en-US"/>
               <a:t>Fifth level</a:t>
             </a:r>
-            <a:endParaRPr lang="en-US"/>
           </a:p>
         </p:txBody>
       </p:sp>
@@ -2770,7 +3062,7 @@
           <a:p>
             <a:pPr lvl="0"/>
             <a:r>
-              <a:rPr lang="en-US" smtClean="0"/>
+              <a:rPr lang="en-US"/>
               <a:t>Click to edit Master text styles</a:t>
             </a:r>
           </a:p>
@@ -2793,7 +3085,7 @@
           <a:p>
             <a:fld id="{5BCAD085-E8A6-8845-BD4E-CB4CCA059FC4}" type="datetimeFigureOut">
               <a:rPr lang="en-US" smtClean="0"/>
-              <a:t>1/27/13</a:t>
+              <a:t>10/29/2026</a:t>
             </a:fld>
             <a:endParaRPr lang="en-US"/>
           </a:p>
@@ -2896,10 +3188,9 @@
           </a:lstStyle>
           <a:p>
             <a:r>
-              <a:rPr lang="en-US" smtClean="0"/>
+              <a:rPr lang="en-US"/>
               <a:t>Click to edit Master title style</a:t>
             </a:r>
-            <a:endParaRPr lang="en-US"/>
           </a:p>
         </p:txBody>
       </p:sp>
@@ -3023,7 +3314,7 @@
           <a:p>
             <a:pPr lvl="0"/>
             <a:r>
-              <a:rPr lang="en-US" smtClean="0"/>
+              <a:rPr lang="en-US"/>
               <a:t>Click to edit Master text styles</a:t>
             </a:r>
           </a:p>
@@ -3046,7 +3337,7 @@
           <a:p>
             <a:fld id="{5BCAD085-E8A6-8845-BD4E-CB4CCA059FC4}" type="datetimeFigureOut">
               <a:rPr lang="en-US" smtClean="0"/>
-              <a:t>1/27/13</a:t>
+              <a:t>10/29/2026</a:t>
             </a:fld>
             <a:endParaRPr lang="en-US"/>
           </a:p>
@@ -3155,10 +3446,9 @@
           <a:lstStyle/>
           <a:p>
             <a:r>
-              <a:rPr lang="en-US" smtClean="0"/>
+              <a:rPr lang="en-US"/>
               <a:t>Click to edit Master title style</a:t>
             </a:r>
-            <a:endParaRPr lang="en-US"/>
           </a:p>
         </p:txBody>
       </p:sp>
@@ -3189,38 +3479,37 @@
           <a:p>
             <a:pPr lvl="0"/>
             <a:r>
-              <a:rPr lang="en-US" smtClean="0"/>
+              <a:rPr lang="en-US"/>
               <a:t>Click to edit Master text styles</a:t>
             </a:r>
           </a:p>
           <a:p>
             <a:pPr lvl="1"/>
             <a:r>
-              <a:rPr lang="en-US" smtClean="0"/>
+              <a:rPr lang="en-US"/>
               <a:t>Second level</a:t>
             </a:r>
           </a:p>
           <a:p>
             <a:pPr lvl="2"/>
             <a:r>
-              <a:rPr lang="en-US" smtClean="0"/>
+              <a:rPr lang="en-US"/>
               <a:t>Third level</a:t>
             </a:r>
           </a:p>
           <a:p>
             <a:pPr lvl="3"/>
             <a:r>
-              <a:rPr lang="en-US" smtClean="0"/>
+              <a:rPr lang="en-US"/>
               <a:t>Fourth level</a:t>
             </a:r>
           </a:p>
           <a:p>
             <a:pPr lvl="4"/>
             <a:r>
-              <a:rPr lang="en-US" smtClean="0"/>
+              <a:rPr lang="en-US"/>
               <a:t>Fifth level</a:t>
             </a:r>
-            <a:endParaRPr lang="en-US"/>
           </a:p>
         </p:txBody>
       </p:sp>
@@ -3259,7 +3548,7 @@
           <a:p>
             <a:fld id="{5BCAD085-E8A6-8845-BD4E-CB4CCA059FC4}" type="datetimeFigureOut">
               <a:rPr lang="en-US" smtClean="0"/>
-              <a:t>1/27/13</a:t>
+              <a:t>10/29/2026</a:t>
             </a:fld>
             <a:endParaRPr lang="en-US"/>
           </a:p>
@@ -3643,8 +3932,8 @@
           <p:nvPr/>
         </p:nvPicPr>
         <p:blipFill>
-          <a:blip r:embed="rId2"/>
-          <a:srcRect l="0" t="27" r="0" b="27"/>
+          <a:blip r:embed="rId3"/>
+          <a:srcRect t="27" b="27"/>
           <a:stretch>
             <a:fillRect/>
           </a:stretch>
@@ -3789,18 +4078,7 @@
                   <a:ea typeface="Microsoft YaHei"/>
                   <a:cs typeface="Arial"/>
                 </a:rPr>
-                <a:t>生产检测不合格率</a:t>
-              </a:r>
-              <a:r>
-                <a:rPr lang="zh-CN" sz="4500" b="1" dirty="0">
-                  <a:solidFill>
-                    <a:srgbClr val="FFFFFF"/>
-                  </a:solidFill>
-                  <a:latin typeface="Arial"/>
-                  <a:ea typeface="Microsoft YaHei"/>
-                  <a:cs typeface="Arial"/>
-                </a:rPr>
-                <a:t>能否提前预测？</a:t>
+                <a:t>生产检测不合格率能否提前预测？</a:t>
               </a:r>
             </a:p>
           </p:txBody>
@@ -4201,9 +4479,18 @@
   <p:clrMapOvr>
     <a:masterClrMapping/>
   </p:clrMapOvr>
-  <p:transition xmlns:p14="http://schemas.microsoft.com/office/powerpoint/2010/main" p14:dur="400">
-    <p:fade/>
-  </p:transition>
+  <mc:AlternateContent xmlns:mc="http://schemas.openxmlformats.org/markup-compatibility/2006">
+    <mc:Choice xmlns:p14="http://schemas.microsoft.com/office/powerpoint/2010/main" Requires="p14">
+      <p:transition p14:dur="400">
+        <p:fade/>
+      </p:transition>
+    </mc:Choice>
+    <mc:Fallback>
+      <p:transition>
+        <p:fade/>
+      </p:transition>
+    </mc:Fallback>
+  </mc:AlternateContent>
   <p:timing>
     <p:tnLst>
       <p:par>
@@ -4381,6 +4668,1958 @@
       <p:bldP spid="6" grpId="0"/>
       <p:bldP spid="9" grpId="0"/>
       <p:bldP spid="16" grpId="0"/>
+    </p:bldLst>
+  </p:timing>
+</p:sld>
+</file>
+
+<file path=ppt/slides/slide10.xml><?xml version="1.0" encoding="utf-8"?>
+<p:sld xmlns:a="http://schemas.openxmlformats.org/drawingml/2006/main" xmlns:r="http://schemas.openxmlformats.org/officeDocument/2006/relationships" xmlns:p="http://schemas.openxmlformats.org/presentationml/2006/main">
+  <p:cSld>
+    <p:spTree>
+      <p:nvGrpSpPr>
+        <p:cNvPr id="1" name=""/>
+        <p:cNvGrpSpPr/>
+        <p:nvPr/>
+      </p:nvGrpSpPr>
+      <p:grpSpPr>
+        <a:xfrm>
+          <a:off x="0" y="0"/>
+          <a:ext cx="0" cy="0"/>
+          <a:chOff x="0" y="0"/>
+          <a:chExt cx="0" cy="0"/>
+        </a:xfrm>
+      </p:grpSpPr>
+      <p:sp>
+        <p:nvSpPr>
+          <p:cNvPr id="7" name="矩形 6">
+            <a:extLst>
+              <a:ext uri="{FF2B5EF4-FFF2-40B4-BE49-F238E27FC236}">
+                <a16:creationId xmlns:a16="http://schemas.microsoft.com/office/drawing/2014/main" id="{27A89092-B6DE-4B59-88ED-671BE281E05F}"/>
+              </a:ext>
+            </a:extLst>
+          </p:cNvPr>
+          <p:cNvSpPr>
+            <a:spLocks noGrp="1"/>
+          </p:cNvSpPr>
+          <p:nvPr/>
+        </p:nvSpPr>
+        <p:spPr>
+          <a:xfrm>
+            <a:off x="571500" y="400050"/>
+            <a:ext cx="10477500" cy="333375"/>
+          </a:xfrm>
+          <a:prstGeom prst="rect">
+            <a:avLst/>
+          </a:prstGeom>
+          <a:noFill/>
+          <a:ln w="0">
+            <a:noFill/>
+          </a:ln>
+        </p:spPr>
+        <p:txBody>
+          <a:bodyPr/>
+          <a:lstStyle>
+            <a:defPPr>
+              <a:defRPr sz="1350" b="0">
+                <a:solidFill>
+                  <a:srgbClr val="168C89"/>
+                </a:solidFill>
+              </a:defRPr>
+            </a:defPPr>
+            <a:lvl1pPr>
+              <a:defRPr sz="1350" b="0">
+                <a:solidFill>
+                  <a:srgbClr val="168C89"/>
+                </a:solidFill>
+              </a:defRPr>
+            </a:lvl1pPr>
+            <a:lvl2pPr>
+              <a:defRPr sz="1350" b="0">
+                <a:solidFill>
+                  <a:srgbClr val="168C89"/>
+                </a:solidFill>
+              </a:defRPr>
+            </a:lvl2pPr>
+            <a:lvl3pPr>
+              <a:defRPr sz="1350" b="0">
+                <a:solidFill>
+                  <a:srgbClr val="168C89"/>
+                </a:solidFill>
+              </a:defRPr>
+            </a:lvl3pPr>
+            <a:lvl4pPr>
+              <a:defRPr sz="1350" b="0">
+                <a:solidFill>
+                  <a:srgbClr val="168C89"/>
+                </a:solidFill>
+              </a:defRPr>
+            </a:lvl4pPr>
+            <a:lvl5pPr>
+              <a:defRPr sz="1350" b="0">
+                <a:solidFill>
+                  <a:srgbClr val="168C89"/>
+                </a:solidFill>
+              </a:defRPr>
+            </a:lvl5pPr>
+            <a:lvl6pPr>
+              <a:defRPr sz="1350" b="0">
+                <a:solidFill>
+                  <a:srgbClr val="168C89"/>
+                </a:solidFill>
+              </a:defRPr>
+            </a:lvl6pPr>
+            <a:lvl7pPr>
+              <a:defRPr sz="1350" b="0">
+                <a:solidFill>
+                  <a:srgbClr val="168C89"/>
+                </a:solidFill>
+              </a:defRPr>
+            </a:lvl7pPr>
+            <a:lvl8pPr>
+              <a:defRPr sz="1350" b="0">
+                <a:solidFill>
+                  <a:srgbClr val="168C89"/>
+                </a:solidFill>
+              </a:defRPr>
+            </a:lvl8pPr>
+            <a:lvl9pPr>
+              <a:defRPr sz="1350" b="0">
+                <a:solidFill>
+                  <a:srgbClr val="168C89"/>
+                </a:solidFill>
+              </a:defRPr>
+            </a:lvl9pPr>
+          </a:lstStyle>
+          <a:p>
+            <a:pPr>
+              <a:defRPr sz="1350" b="0">
+                <a:solidFill>
+                  <a:srgbClr val="168C89"/>
+                </a:solidFill>
+              </a:defRPr>
+            </a:pPr>
+            <a:r>
+              <a:rPr sz="1350" b="0">
+                <a:solidFill>
+                  <a:srgbClr val="168C89"/>
+                </a:solidFill>
+              </a:rPr>
+              <a:t>视频与提交材料</a:t>
+            </a:r>
+          </a:p>
+        </p:txBody>
+      </p:sp>
+      <p:sp>
+        <p:nvSpPr>
+          <p:cNvPr id="2" name="矩形 1">
+            <a:extLst>
+              <a:ext uri="{FF2B5EF4-FFF2-40B4-BE49-F238E27FC236}">
+                <a16:creationId xmlns:a16="http://schemas.microsoft.com/office/drawing/2014/main" id="{E944A3AF-1482-424A-A474-09140681D839}"/>
+              </a:ext>
+            </a:extLst>
+          </p:cNvPr>
+          <p:cNvSpPr>
+            <a:spLocks noGrp="1"/>
+          </p:cNvSpPr>
+          <p:nvPr/>
+        </p:nvSpPr>
+        <p:spPr>
+          <a:xfrm>
+            <a:off x="571500" y="904875"/>
+            <a:ext cx="11049000" cy="666750"/>
+          </a:xfrm>
+          <a:prstGeom prst="rect">
+            <a:avLst/>
+          </a:prstGeom>
+          <a:noFill/>
+          <a:ln w="0">
+            <a:noFill/>
+          </a:ln>
+        </p:spPr>
+        <p:txBody>
+          <a:bodyPr/>
+          <a:lstStyle>
+            <a:defPPr>
+              <a:defRPr sz="3000" b="1">
+                <a:solidFill>
+                  <a:srgbClr val="0B2233"/>
+                </a:solidFill>
+              </a:defRPr>
+            </a:defPPr>
+            <a:lvl1pPr>
+              <a:defRPr sz="3000" b="1">
+                <a:solidFill>
+                  <a:srgbClr val="0B2233"/>
+                </a:solidFill>
+              </a:defRPr>
+            </a:lvl1pPr>
+            <a:lvl2pPr>
+              <a:defRPr sz="3000" b="1">
+                <a:solidFill>
+                  <a:srgbClr val="0B2233"/>
+                </a:solidFill>
+              </a:defRPr>
+            </a:lvl2pPr>
+            <a:lvl3pPr>
+              <a:defRPr sz="3000" b="1">
+                <a:solidFill>
+                  <a:srgbClr val="0B2233"/>
+                </a:solidFill>
+              </a:defRPr>
+            </a:lvl3pPr>
+            <a:lvl4pPr>
+              <a:defRPr sz="3000" b="1">
+                <a:solidFill>
+                  <a:srgbClr val="0B2233"/>
+                </a:solidFill>
+              </a:defRPr>
+            </a:lvl4pPr>
+            <a:lvl5pPr>
+              <a:defRPr sz="3000" b="1">
+                <a:solidFill>
+                  <a:srgbClr val="0B2233"/>
+                </a:solidFill>
+              </a:defRPr>
+            </a:lvl5pPr>
+            <a:lvl6pPr>
+              <a:defRPr sz="3000" b="1">
+                <a:solidFill>
+                  <a:srgbClr val="0B2233"/>
+                </a:solidFill>
+              </a:defRPr>
+            </a:lvl6pPr>
+            <a:lvl7pPr>
+              <a:defRPr sz="3000" b="1">
+                <a:solidFill>
+                  <a:srgbClr val="0B2233"/>
+                </a:solidFill>
+              </a:defRPr>
+            </a:lvl7pPr>
+            <a:lvl8pPr>
+              <a:defRPr sz="3000" b="1">
+                <a:solidFill>
+                  <a:srgbClr val="0B2233"/>
+                </a:solidFill>
+              </a:defRPr>
+            </a:lvl8pPr>
+            <a:lvl9pPr>
+              <a:defRPr sz="3000" b="1">
+                <a:solidFill>
+                  <a:srgbClr val="0B2233"/>
+                </a:solidFill>
+              </a:defRPr>
+            </a:lvl9pPr>
+          </a:lstStyle>
+          <a:p>
+            <a:pPr>
+              <a:defRPr sz="3000" b="1">
+                <a:solidFill>
+                  <a:srgbClr val="0B2233"/>
+                </a:solidFill>
+              </a:defRPr>
+            </a:pPr>
+            <a:r>
+              <a:rPr sz="3000" b="1">
+                <a:solidFill>
+                  <a:srgbClr val="0B2233"/>
+                </a:solidFill>
+              </a:rPr>
+              <a:t>视频回顾与六项材料</a:t>
+            </a:r>
+          </a:p>
+        </p:txBody>
+      </p:sp>
+      <p:sp>
+        <p:nvSpPr>
+          <p:cNvPr id="3" name="矩形 2">
+            <a:extLst>
+              <a:ext uri="{FF2B5EF4-FFF2-40B4-BE49-F238E27FC236}">
+                <a16:creationId xmlns:a16="http://schemas.microsoft.com/office/drawing/2014/main" id="{FB3AB613-93F4-4E21-B25E-77A7C8A4473D}"/>
+              </a:ext>
+            </a:extLst>
+          </p:cNvPr>
+          <p:cNvSpPr>
+            <a:spLocks noGrp="1"/>
+          </p:cNvSpPr>
+          <p:nvPr/>
+        </p:nvSpPr>
+        <p:spPr>
+          <a:xfrm>
+            <a:off x="571500" y="5905500"/>
+            <a:ext cx="6953250" cy="285750"/>
+          </a:xfrm>
+          <a:prstGeom prst="rect">
+            <a:avLst/>
+          </a:prstGeom>
+          <a:noFill/>
+          <a:ln w="0">
+            <a:noFill/>
+          </a:ln>
+        </p:spPr>
+        <p:txBody>
+          <a:bodyPr/>
+          <a:lstStyle>
+            <a:defPPr>
+              <a:defRPr sz="1575" b="0">
+                <a:solidFill>
+                  <a:srgbClr val="5F7380"/>
+                </a:solidFill>
+              </a:defRPr>
+            </a:defPPr>
+            <a:lvl1pPr>
+              <a:defRPr sz="1575" b="0">
+                <a:solidFill>
+                  <a:srgbClr val="5F7380"/>
+                </a:solidFill>
+              </a:defRPr>
+            </a:lvl1pPr>
+            <a:lvl2pPr>
+              <a:defRPr sz="1575" b="0">
+                <a:solidFill>
+                  <a:srgbClr val="5F7380"/>
+                </a:solidFill>
+              </a:defRPr>
+            </a:lvl2pPr>
+            <a:lvl3pPr>
+              <a:defRPr sz="1575" b="0">
+                <a:solidFill>
+                  <a:srgbClr val="5F7380"/>
+                </a:solidFill>
+              </a:defRPr>
+            </a:lvl3pPr>
+            <a:lvl4pPr>
+              <a:defRPr sz="1575" b="0">
+                <a:solidFill>
+                  <a:srgbClr val="5F7380"/>
+                </a:solidFill>
+              </a:defRPr>
+            </a:lvl4pPr>
+            <a:lvl5pPr>
+              <a:defRPr sz="1575" b="0">
+                <a:solidFill>
+                  <a:srgbClr val="5F7380"/>
+                </a:solidFill>
+              </a:defRPr>
+            </a:lvl5pPr>
+            <a:lvl6pPr>
+              <a:defRPr sz="1575" b="0">
+                <a:solidFill>
+                  <a:srgbClr val="5F7380"/>
+                </a:solidFill>
+              </a:defRPr>
+            </a:lvl6pPr>
+            <a:lvl7pPr>
+              <a:defRPr sz="1575" b="0">
+                <a:solidFill>
+                  <a:srgbClr val="5F7380"/>
+                </a:solidFill>
+              </a:defRPr>
+            </a:lvl7pPr>
+            <a:lvl8pPr>
+              <a:defRPr sz="1575" b="0">
+                <a:solidFill>
+                  <a:srgbClr val="5F7380"/>
+                </a:solidFill>
+              </a:defRPr>
+            </a:lvl8pPr>
+            <a:lvl9pPr>
+              <a:defRPr sz="1575" b="0">
+                <a:solidFill>
+                  <a:srgbClr val="5F7380"/>
+                </a:solidFill>
+              </a:defRPr>
+            </a:lvl9pPr>
+          </a:lstStyle>
+          <a:p>
+            <a:pPr>
+              <a:defRPr sz="1575" b="0">
+                <a:solidFill>
+                  <a:srgbClr val="5F7380"/>
+                </a:solidFill>
+              </a:defRPr>
+            </a:pPr>
+            <a:r>
+              <a:rPr sz="1575" b="0">
+                <a:solidFill>
+                  <a:srgbClr val="5F7380"/>
+                </a:solidFill>
+              </a:rPr>
+              <a:t>点击视频画面播放，约56秒，含字幕和合成配音</a:t>
+            </a:r>
+          </a:p>
+        </p:txBody>
+      </p:sp>
+      <p:sp>
+        <p:nvSpPr>
+          <p:cNvPr id="4" name="矩形 3">
+            <a:extLst>
+              <a:ext uri="{FF2B5EF4-FFF2-40B4-BE49-F238E27FC236}">
+                <a16:creationId xmlns:a16="http://schemas.microsoft.com/office/drawing/2014/main" id="{3EBD562D-FCBB-49E5-A337-B300A6FCE096}"/>
+              </a:ext>
+            </a:extLst>
+          </p:cNvPr>
+          <p:cNvSpPr>
+            <a:spLocks noGrp="1"/>
+          </p:cNvSpPr>
+          <p:nvPr/>
+        </p:nvSpPr>
+        <p:spPr>
+          <a:xfrm>
+            <a:off x="8143875" y="1952625"/>
+            <a:ext cx="3476625" cy="428625"/>
+          </a:xfrm>
+          <a:prstGeom prst="rect">
+            <a:avLst/>
+          </a:prstGeom>
+          <a:noFill/>
+          <a:ln w="0">
+            <a:noFill/>
+          </a:ln>
+        </p:spPr>
+        <p:txBody>
+          <a:bodyPr/>
+          <a:lstStyle>
+            <a:defPPr>
+              <a:defRPr sz="1950" b="1">
+                <a:solidFill>
+                  <a:srgbClr val="0B2233"/>
+                </a:solidFill>
+              </a:defRPr>
+            </a:defPPr>
+            <a:lvl1pPr>
+              <a:defRPr sz="1950" b="1">
+                <a:solidFill>
+                  <a:srgbClr val="0B2233"/>
+                </a:solidFill>
+              </a:defRPr>
+            </a:lvl1pPr>
+            <a:lvl2pPr>
+              <a:defRPr sz="1950" b="1">
+                <a:solidFill>
+                  <a:srgbClr val="0B2233"/>
+                </a:solidFill>
+              </a:defRPr>
+            </a:lvl2pPr>
+            <a:lvl3pPr>
+              <a:defRPr sz="1950" b="1">
+                <a:solidFill>
+                  <a:srgbClr val="0B2233"/>
+                </a:solidFill>
+              </a:defRPr>
+            </a:lvl3pPr>
+            <a:lvl4pPr>
+              <a:defRPr sz="1950" b="1">
+                <a:solidFill>
+                  <a:srgbClr val="0B2233"/>
+                </a:solidFill>
+              </a:defRPr>
+            </a:lvl4pPr>
+            <a:lvl5pPr>
+              <a:defRPr sz="1950" b="1">
+                <a:solidFill>
+                  <a:srgbClr val="0B2233"/>
+                </a:solidFill>
+              </a:defRPr>
+            </a:lvl5pPr>
+            <a:lvl6pPr>
+              <a:defRPr sz="1950" b="1">
+                <a:solidFill>
+                  <a:srgbClr val="0B2233"/>
+                </a:solidFill>
+              </a:defRPr>
+            </a:lvl6pPr>
+            <a:lvl7pPr>
+              <a:defRPr sz="1950" b="1">
+                <a:solidFill>
+                  <a:srgbClr val="0B2233"/>
+                </a:solidFill>
+              </a:defRPr>
+            </a:lvl7pPr>
+            <a:lvl8pPr>
+              <a:defRPr sz="1950" b="1">
+                <a:solidFill>
+                  <a:srgbClr val="0B2233"/>
+                </a:solidFill>
+              </a:defRPr>
+            </a:lvl8pPr>
+            <a:lvl9pPr>
+              <a:defRPr sz="1950" b="1">
+                <a:solidFill>
+                  <a:srgbClr val="0B2233"/>
+                </a:solidFill>
+              </a:defRPr>
+            </a:lvl9pPr>
+          </a:lstStyle>
+          <a:p>
+            <a:pPr>
+              <a:defRPr sz="1950" b="1">
+                <a:solidFill>
+                  <a:srgbClr val="0B2233"/>
+                </a:solidFill>
+              </a:defRPr>
+            </a:pPr>
+            <a:r>
+              <a:rPr sz="1950" b="1">
+                <a:solidFill>
+                  <a:srgbClr val="0B2233"/>
+                </a:solidFill>
+              </a:rPr>
+              <a:t>随包提交</a:t>
+            </a:r>
+          </a:p>
+        </p:txBody>
+      </p:sp>
+      <p:sp>
+        <p:nvSpPr>
+          <p:cNvPr id="5" name="矩形 4">
+            <a:extLst>
+              <a:ext uri="{FF2B5EF4-FFF2-40B4-BE49-F238E27FC236}">
+                <a16:creationId xmlns:a16="http://schemas.microsoft.com/office/drawing/2014/main" id="{430373E4-24FC-4203-9D9D-16B901CC75BF}"/>
+              </a:ext>
+            </a:extLst>
+          </p:cNvPr>
+          <p:cNvSpPr>
+            <a:spLocks noGrp="1"/>
+          </p:cNvSpPr>
+          <p:nvPr/>
+        </p:nvSpPr>
+        <p:spPr>
+          <a:xfrm>
+            <a:off x="8143875" y="2571750"/>
+            <a:ext cx="3476625" cy="2667000"/>
+          </a:xfrm>
+          <a:prstGeom prst="rect">
+            <a:avLst/>
+          </a:prstGeom>
+          <a:noFill/>
+          <a:ln w="0">
+            <a:noFill/>
+          </a:ln>
+        </p:spPr>
+        <p:txBody>
+          <a:bodyPr/>
+          <a:lstStyle>
+            <a:defPPr>
+              <a:defRPr sz="1800" b="0">
+                <a:solidFill>
+                  <a:srgbClr val="0B2233"/>
+                </a:solidFill>
+              </a:defRPr>
+            </a:defPPr>
+            <a:lvl1pPr>
+              <a:defRPr sz="1800" b="0">
+                <a:solidFill>
+                  <a:srgbClr val="0B2233"/>
+                </a:solidFill>
+              </a:defRPr>
+            </a:lvl1pPr>
+            <a:lvl2pPr>
+              <a:defRPr sz="1800" b="0">
+                <a:solidFill>
+                  <a:srgbClr val="0B2233"/>
+                </a:solidFill>
+              </a:defRPr>
+            </a:lvl2pPr>
+            <a:lvl3pPr>
+              <a:defRPr sz="1800" b="0">
+                <a:solidFill>
+                  <a:srgbClr val="0B2233"/>
+                </a:solidFill>
+              </a:defRPr>
+            </a:lvl3pPr>
+            <a:lvl4pPr>
+              <a:defRPr sz="1800" b="0">
+                <a:solidFill>
+                  <a:srgbClr val="0B2233"/>
+                </a:solidFill>
+              </a:defRPr>
+            </a:lvl4pPr>
+            <a:lvl5pPr>
+              <a:defRPr sz="1800" b="0">
+                <a:solidFill>
+                  <a:srgbClr val="0B2233"/>
+                </a:solidFill>
+              </a:defRPr>
+            </a:lvl5pPr>
+            <a:lvl6pPr>
+              <a:defRPr sz="1800" b="0">
+                <a:solidFill>
+                  <a:srgbClr val="0B2233"/>
+                </a:solidFill>
+              </a:defRPr>
+            </a:lvl6pPr>
+            <a:lvl7pPr>
+              <a:defRPr sz="1800" b="0">
+                <a:solidFill>
+                  <a:srgbClr val="0B2233"/>
+                </a:solidFill>
+              </a:defRPr>
+            </a:lvl7pPr>
+            <a:lvl8pPr>
+              <a:defRPr sz="1800" b="0">
+                <a:solidFill>
+                  <a:srgbClr val="0B2233"/>
+                </a:solidFill>
+              </a:defRPr>
+            </a:lvl8pPr>
+            <a:lvl9pPr>
+              <a:defRPr sz="1800" b="0">
+                <a:solidFill>
+                  <a:srgbClr val="0B2233"/>
+                </a:solidFill>
+              </a:defRPr>
+            </a:lvl9pPr>
+          </a:lstStyle>
+          <a:p>
+            <a:pPr>
+              <a:defRPr sz="1800" b="0">
+                <a:solidFill>
+                  <a:srgbClr val="0B2233"/>
+                </a:solidFill>
+              </a:defRPr>
+            </a:pPr>
+            <a:r>
+              <a:rPr sz="1800" b="0">
+                <a:solidFill>
+                  <a:srgbClr val="0B2233"/>
+                </a:solidFill>
+              </a:rPr>
+              <a:t>01 原始数据</a:t>
+            </a:r>
+          </a:p>
+          <a:p>
+            <a:pPr>
+              <a:defRPr sz="1800" b="0">
+                <a:solidFill>
+                  <a:srgbClr val="0B2233"/>
+                </a:solidFill>
+              </a:defRPr>
+            </a:pPr>
+            <a:r>
+              <a:rPr sz="1800" b="0">
+                <a:solidFill>
+                  <a:srgbClr val="0B2233"/>
+                </a:solidFill>
+              </a:rPr>
+              <a:t>02 导入文件与程序</a:t>
+            </a:r>
+          </a:p>
+          <a:p>
+            <a:pPr>
+              <a:defRPr sz="1800" b="0">
+                <a:solidFill>
+                  <a:srgbClr val="0B2233"/>
+                </a:solidFill>
+              </a:defRPr>
+            </a:pPr>
+            <a:r>
+              <a:rPr sz="1800" b="0">
+                <a:solidFill>
+                  <a:srgbClr val="0B2233"/>
+                </a:solidFill>
+              </a:rPr>
+              <a:t>03 导出结果与图表</a:t>
+            </a:r>
+          </a:p>
+          <a:p>
+            <a:pPr>
+              <a:defRPr sz="1800" b="0">
+                <a:solidFill>
+                  <a:srgbClr val="0B2233"/>
+                </a:solidFill>
+              </a:defRPr>
+            </a:pPr>
+            <a:r>
+              <a:rPr sz="1800" b="0">
+                <a:solidFill>
+                  <a:srgbClr val="0B2233"/>
+                </a:solidFill>
+              </a:rPr>
+              <a:t>04 本汇报PPT</a:t>
+            </a:r>
+          </a:p>
+          <a:p>
+            <a:pPr>
+              <a:defRPr sz="1800" b="0">
+                <a:solidFill>
+                  <a:srgbClr val="0B2233"/>
+                </a:solidFill>
+              </a:defRPr>
+            </a:pPr>
+            <a:r>
+              <a:rPr sz="1800" b="0">
+                <a:solidFill>
+                  <a:srgbClr val="0B2233"/>
+                </a:solidFill>
+              </a:rPr>
+              <a:t>05 MP4讲解视频</a:t>
+            </a:r>
+          </a:p>
+          <a:p>
+            <a:pPr>
+              <a:defRPr sz="1800" b="0">
+                <a:solidFill>
+                  <a:srgbClr val="0B2233"/>
+                </a:solidFill>
+              </a:defRPr>
+            </a:pPr>
+            <a:r>
+              <a:rPr sz="1800" b="0">
+                <a:solidFill>
+                  <a:srgbClr val="0B2233"/>
+                </a:solidFill>
+              </a:rPr>
+              <a:t>06 安装程序与离线依赖</a:t>
+            </a:r>
+          </a:p>
+        </p:txBody>
+      </p:sp>
+      <p:sp>
+        <p:nvSpPr>
+          <p:cNvPr id="6" name="矩形 5">
+            <a:extLst>
+              <a:ext uri="{FF2B5EF4-FFF2-40B4-BE49-F238E27FC236}">
+                <a16:creationId xmlns:a16="http://schemas.microsoft.com/office/drawing/2014/main" id="{A482F10A-B643-4B75-8BBD-D2CA2FC5E63B}"/>
+              </a:ext>
+            </a:extLst>
+          </p:cNvPr>
+          <p:cNvSpPr>
+            <a:spLocks noGrp="1"/>
+          </p:cNvSpPr>
+          <p:nvPr/>
+        </p:nvSpPr>
+        <p:spPr>
+          <a:xfrm>
+            <a:off x="571500" y="6238875"/>
+            <a:ext cx="10953750" cy="285750"/>
+          </a:xfrm>
+          <a:prstGeom prst="rect">
+            <a:avLst/>
+          </a:prstGeom>
+          <a:noFill/>
+          <a:ln w="0">
+            <a:noFill/>
+          </a:ln>
+        </p:spPr>
+        <p:txBody>
+          <a:bodyPr/>
+          <a:lstStyle>
+            <a:defPPr>
+              <a:defRPr sz="1275" b="0">
+                <a:solidFill>
+                  <a:srgbClr val="5F7380"/>
+                </a:solidFill>
+              </a:defRPr>
+            </a:defPPr>
+            <a:lvl1pPr>
+              <a:defRPr sz="1275" b="0">
+                <a:solidFill>
+                  <a:srgbClr val="5F7380"/>
+                </a:solidFill>
+              </a:defRPr>
+            </a:lvl1pPr>
+            <a:lvl2pPr>
+              <a:defRPr sz="1275" b="0">
+                <a:solidFill>
+                  <a:srgbClr val="5F7380"/>
+                </a:solidFill>
+              </a:defRPr>
+            </a:lvl2pPr>
+            <a:lvl3pPr>
+              <a:defRPr sz="1275" b="0">
+                <a:solidFill>
+                  <a:srgbClr val="5F7380"/>
+                </a:solidFill>
+              </a:defRPr>
+            </a:lvl3pPr>
+            <a:lvl4pPr>
+              <a:defRPr sz="1275" b="0">
+                <a:solidFill>
+                  <a:srgbClr val="5F7380"/>
+                </a:solidFill>
+              </a:defRPr>
+            </a:lvl4pPr>
+            <a:lvl5pPr>
+              <a:defRPr sz="1275" b="0">
+                <a:solidFill>
+                  <a:srgbClr val="5F7380"/>
+                </a:solidFill>
+              </a:defRPr>
+            </a:lvl5pPr>
+            <a:lvl6pPr>
+              <a:defRPr sz="1275" b="0">
+                <a:solidFill>
+                  <a:srgbClr val="5F7380"/>
+                </a:solidFill>
+              </a:defRPr>
+            </a:lvl6pPr>
+            <a:lvl7pPr>
+              <a:defRPr sz="1275" b="0">
+                <a:solidFill>
+                  <a:srgbClr val="5F7380"/>
+                </a:solidFill>
+              </a:defRPr>
+            </a:lvl7pPr>
+            <a:lvl8pPr>
+              <a:defRPr sz="1275" b="0">
+                <a:solidFill>
+                  <a:srgbClr val="5F7380"/>
+                </a:solidFill>
+              </a:defRPr>
+            </a:lvl8pPr>
+            <a:lvl9pPr>
+              <a:defRPr sz="1275" b="0">
+                <a:solidFill>
+                  <a:srgbClr val="5F7380"/>
+                </a:solidFill>
+              </a:defRPr>
+            </a:lvl9pPr>
+          </a:lstStyle>
+          <a:p>
+            <a:pPr>
+              <a:defRPr sz="1275" b="0">
+                <a:solidFill>
+                  <a:srgbClr val="5F7380"/>
+                </a:solidFill>
+              </a:defRPr>
+            </a:pPr>
+            <a:r>
+              <a:rPr sz="1275" b="0">
+                <a:solidFill>
+                  <a:srgbClr val="5F7380"/>
+                </a:solidFill>
+              </a:rPr>
+              <a:t>网页顶部“提交材料”可现场查看数据和结果。安装用于重新计算，观看汇报无需安装Python。</a:t>
+            </a:r>
+          </a:p>
+        </p:txBody>
+      </p:sp>
+      <p:pic>
+        <p:nvPicPr>
+          <p:cNvPr id="8" name="讲解视频_点击播放">
+            <a:hlinkClick action="ppaction://media"/>
+            <a:extLst>
+              <a:ext uri="{FF2B5EF4-FFF2-40B4-BE49-F238E27FC236}">
+                <a16:creationId xmlns:a16="http://schemas.microsoft.com/office/drawing/2014/main" id="{600448D5-F570-CAE2-B83A-AFBE28897EEB}"/>
+              </a:ext>
+            </a:extLst>
+          </p:cNvPr>
+          <p:cNvPicPr>
+            <a:picLocks noChangeAspect="1"/>
+          </p:cNvPicPr>
+          <p:nvPr>
+            <a:videoFile r:link="rId2"/>
+            <p:extLst>
+              <p:ext uri="{DAA4B4D4-6D71-4841-9C94-3DE7FCFB9230}">
+                <p14:media xmlns:p14="http://schemas.microsoft.com/office/powerpoint/2010/main" r:embed="rId1"/>
+              </p:ext>
+            </p:extLst>
+          </p:nvPr>
+        </p:nvPicPr>
+        <p:blipFill>
+          <a:blip r:embed="rId5"/>
+          <a:stretch>
+            <a:fillRect/>
+          </a:stretch>
+        </p:blipFill>
+        <p:spPr>
+          <a:xfrm>
+            <a:off x="571500" y="1905001"/>
+            <a:ext cx="6858000" cy="3857625"/>
+          </a:xfrm>
+          <a:prstGeom prst="rect">
+            <a:avLst/>
+          </a:prstGeom>
+        </p:spPr>
+      </p:pic>
+    </p:spTree>
+    <p:extLst>
+      <p:ext uri="{BB962C8B-B14F-4D97-AF65-F5344CB8AC3E}">
+        <p14:creationId xmlns:p14="http://schemas.microsoft.com/office/powerpoint/2010/main" val="3556788702"/>
+      </p:ext>
+    </p:extLst>
+  </p:cSld>
+  <p:clrMapOvr>
+    <a:masterClrMapping/>
+  </p:clrMapOvr>
+  <p:timing>
+    <p:tnLst>
+      <p:par>
+        <p:cTn id="1" dur="indefinite" restart="never" nodeType="tmRoot">
+          <p:childTnLst>
+            <p:seq concurrent="1" nextAc="seek">
+              <p:cTn id="2" restart="whenNotActive" fill="hold" evtFilter="cancelBubble" nodeType="interactiveSeq">
+                <p:stCondLst>
+                  <p:cond evt="onClick" delay="0">
+                    <p:tgtEl>
+                      <p:spTgt spid="8"/>
+                    </p:tgtEl>
+                  </p:cond>
+                </p:stCondLst>
+                <p:endSync evt="end" delay="0">
+                  <p:rtn val="all"/>
+                </p:endSync>
+                <p:childTnLst>
+                  <p:par>
+                    <p:cTn id="3" fill="hold">
+                      <p:stCondLst>
+                        <p:cond delay="0"/>
+                      </p:stCondLst>
+                      <p:childTnLst>
+                        <p:par>
+                          <p:cTn id="4" fill="hold">
+                            <p:stCondLst>
+                              <p:cond delay="0"/>
+                            </p:stCondLst>
+                            <p:childTnLst>
+                              <p:par>
+                                <p:cTn id="5" presetID="2" presetClass="mediacall" presetSubtype="0" fill="hold" nodeType="clickEffect">
+                                  <p:stCondLst>
+                                    <p:cond delay="0"/>
+                                  </p:stCondLst>
+                                  <p:childTnLst>
+                                    <p:cmd type="call" cmd="togglePause">
+                                      <p:cBhvr>
+                                        <p:cTn id="6" dur="1" fill="hold"/>
+                                        <p:tgtEl>
+                                          <p:spTgt spid="8"/>
+                                        </p:tgtEl>
+                                      </p:cBhvr>
+                                    </p:cmd>
+                                  </p:childTnLst>
+                                </p:cTn>
+                              </p:par>
+                            </p:childTnLst>
+                          </p:cTn>
+                        </p:par>
+                      </p:childTnLst>
+                    </p:cTn>
+                  </p:par>
+                </p:childTnLst>
+              </p:cTn>
+              <p:nextCondLst>
+                <p:cond evt="onClick" delay="0">
+                  <p:tgtEl>
+                    <p:spTgt spid="8"/>
+                  </p:tgtEl>
+                </p:cond>
+              </p:nextCondLst>
+            </p:seq>
+            <p:video>
+              <p:cMediaNode vol="80000">
+                <p:cTn id="7" fill="hold" display="0">
+                  <p:stCondLst>
+                    <p:cond delay="indefinite"/>
+                  </p:stCondLst>
+                </p:cTn>
+                <p:tgtEl>
+                  <p:spTgt spid="8"/>
+                </p:tgtEl>
+              </p:cMediaNode>
+            </p:video>
+          </p:childTnLst>
+        </p:cTn>
+      </p:par>
+    </p:tnLst>
+  </p:timing>
+</p:sld>
+</file>
+
+<file path=ppt/slides/slide11.xml><?xml version="1.0" encoding="utf-8"?>
+<p:sld xmlns:a="http://schemas.openxmlformats.org/drawingml/2006/main" xmlns:r="http://schemas.openxmlformats.org/officeDocument/2006/relationships" xmlns:p="http://schemas.openxmlformats.org/presentationml/2006/main">
+  <p:cSld>
+    <p:spTree>
+      <p:nvGrpSpPr>
+        <p:cNvPr id="1" name=""/>
+        <p:cNvGrpSpPr/>
+        <p:nvPr/>
+      </p:nvGrpSpPr>
+      <p:grpSpPr>
+        <a:xfrm>
+          <a:off x="0" y="0"/>
+          <a:ext cx="0" cy="0"/>
+          <a:chOff x="0" y="0"/>
+          <a:chExt cx="0" cy="0"/>
+        </a:xfrm>
+      </p:grpSpPr>
+      <p:sp>
+        <p:nvSpPr>
+          <p:cNvPr id="2" name="Rectangle 2"/>
+          <p:cNvSpPr/>
+          <p:nvPr/>
+        </p:nvSpPr>
+        <p:spPr>
+          <a:xfrm>
+            <a:off x="0" y="0"/>
+            <a:ext cx="12192000" cy="6858000"/>
+          </a:xfrm>
+          <a:prstGeom prst="rect">
+            <a:avLst/>
+          </a:prstGeom>
+          <a:solidFill>
+            <a:srgbClr val="0B2233"/>
+          </a:solidFill>
+          <a:ln>
+            <a:noFill/>
+          </a:ln>
+        </p:spPr>
+      </p:sp>
+      <p:grpSp>
+        <p:nvGrpSpPr>
+          <p:cNvPr id="5" name="Group 5"/>
+          <p:cNvGrpSpPr/>
+          <p:nvPr/>
+        </p:nvGrpSpPr>
+        <p:grpSpPr>
+          <a:xfrm>
+            <a:off x="533400" y="501968"/>
+            <a:ext cx="6376988" cy="1174432"/>
+            <a:chOff x="533400" y="501968"/>
+            <a:chExt cx="6376988" cy="1174432"/>
+          </a:xfrm>
+        </p:grpSpPr>
+        <p:sp>
+          <p:nvSpPr>
+            <p:cNvPr id="3" name="TextBox 3"/>
+            <p:cNvSpPr txBox="1"/>
+            <p:nvPr/>
+          </p:nvSpPr>
+          <p:spPr>
+            <a:xfrm>
+              <a:off x="554355" y="501968"/>
+              <a:ext cx="754380" cy="274320"/>
+            </a:xfrm>
+            <a:prstGeom prst="rect">
+              <a:avLst/>
+            </a:prstGeom>
+            <a:noFill/>
+            <a:ln>
+              <a:noFill/>
+            </a:ln>
+          </p:spPr>
+          <p:txBody>
+            <a:bodyPr wrap="none" lIns="0" tIns="0" rIns="0" bIns="0" anchor="t" anchorCtr="0">
+              <a:spAutoFit/>
+            </a:bodyPr>
+            <a:lstStyle/>
+            <a:p>
+              <a:pPr algn="l"/>
+              <a:r>
+                <a:rPr lang="zh-CN" sz="1350" dirty="0">
+                  <a:solidFill>
+                    <a:srgbClr val="1B9E9A"/>
+                  </a:solidFill>
+                  <a:latin typeface="Arial"/>
+                  <a:ea typeface="Microsoft YaHei"/>
+                  <a:cs typeface="Arial"/>
+                </a:rPr>
+                <a:t>管理启示</a:t>
+              </a:r>
+            </a:p>
+          </p:txBody>
+        </p:sp>
+        <p:sp>
+          <p:nvSpPr>
+            <p:cNvPr id="4" name="TextBox 4"/>
+            <p:cNvSpPr txBox="1"/>
+            <p:nvPr/>
+          </p:nvSpPr>
+          <p:spPr>
+            <a:xfrm>
+              <a:off x="533400" y="1066800"/>
+              <a:ext cx="6376988" cy="609600"/>
+            </a:xfrm>
+            <a:prstGeom prst="rect">
+              <a:avLst/>
+            </a:prstGeom>
+            <a:noFill/>
+            <a:ln>
+              <a:noFill/>
+            </a:ln>
+          </p:spPr>
+          <p:txBody>
+            <a:bodyPr wrap="none" lIns="0" tIns="0" rIns="0" bIns="0" anchor="t" anchorCtr="0">
+              <a:spAutoFit/>
+            </a:bodyPr>
+            <a:lstStyle/>
+            <a:p>
+              <a:pPr algn="l"/>
+              <a:r>
+                <a:rPr lang="zh-CN" sz="3000" b="1" dirty="0">
+                  <a:solidFill>
+                    <a:srgbClr val="FFFFFF"/>
+                  </a:solidFill>
+                  <a:latin typeface="Arial"/>
+                  <a:ea typeface="Microsoft YaHei"/>
+                  <a:cs typeface="Arial"/>
+                </a:rPr>
+                <a:t>用预测辅助检查，用检验选择方法</a:t>
+              </a:r>
+            </a:p>
+          </p:txBody>
+        </p:sp>
+      </p:grpSp>
+      <p:grpSp>
+        <p:nvGrpSpPr>
+          <p:cNvPr id="11" name="Group 11"/>
+          <p:cNvGrpSpPr/>
+          <p:nvPr/>
+        </p:nvGrpSpPr>
+        <p:grpSpPr>
+          <a:xfrm>
+            <a:off x="581025" y="2381250"/>
+            <a:ext cx="4876800" cy="3000375"/>
+            <a:chOff x="581025" y="2381250"/>
+            <a:chExt cx="4876800" cy="3000375"/>
+          </a:xfrm>
+        </p:grpSpPr>
+        <p:sp>
+          <p:nvSpPr>
+            <p:cNvPr id="6" name="TextBox 6"/>
+            <p:cNvSpPr txBox="1"/>
+            <p:nvPr/>
+          </p:nvSpPr>
+          <p:spPr>
+            <a:xfrm>
+              <a:off x="581025" y="2381250"/>
+              <a:ext cx="3956685" cy="609600"/>
+            </a:xfrm>
+            <a:prstGeom prst="rect">
+              <a:avLst/>
+            </a:prstGeom>
+            <a:noFill/>
+            <a:ln>
+              <a:noFill/>
+            </a:ln>
+          </p:spPr>
+          <p:txBody>
+            <a:bodyPr wrap="none" lIns="0" tIns="0" rIns="0" bIns="0" anchor="t" anchorCtr="0">
+              <a:spAutoFit/>
+            </a:bodyPr>
+            <a:lstStyle/>
+            <a:p>
+              <a:pPr algn="l"/>
+              <a:r>
+                <a:rPr lang="zh-CN" sz="3000" dirty="0">
+                  <a:solidFill>
+                    <a:srgbClr val="FFFFFF"/>
+                  </a:solidFill>
+                  <a:latin typeface="Arial"/>
+                  <a:ea typeface="Microsoft YaHei"/>
+                  <a:cs typeface="Arial"/>
+                </a:rPr>
+                <a:t>我用ARIMA预测下一组</a:t>
+              </a:r>
+            </a:p>
+          </p:txBody>
+        </p:sp>
+        <p:sp>
+          <p:nvSpPr>
+            <p:cNvPr id="7" name="TextBox 7"/>
+            <p:cNvSpPr txBox="1"/>
+            <p:nvPr/>
+          </p:nvSpPr>
+          <p:spPr>
+            <a:xfrm>
+              <a:off x="581025" y="2981325"/>
+              <a:ext cx="4076700" cy="609600"/>
+            </a:xfrm>
+            <a:prstGeom prst="rect">
+              <a:avLst/>
+            </a:prstGeom>
+            <a:noFill/>
+            <a:ln>
+              <a:noFill/>
+            </a:ln>
+          </p:spPr>
+          <p:txBody>
+            <a:bodyPr wrap="none" lIns="0" tIns="0" rIns="0" bIns="0" anchor="t" anchorCtr="0">
+              <a:spAutoFit/>
+            </a:bodyPr>
+            <a:lstStyle/>
+            <a:p>
+              <a:pPr algn="l"/>
+              <a:r>
+                <a:rPr lang="zh-CN" sz="3000" dirty="0">
+                  <a:solidFill>
+                    <a:srgbClr val="FFFFFF"/>
+                  </a:solidFill>
+                  <a:latin typeface="Arial"/>
+                  <a:ea typeface="Microsoft YaHei"/>
+                  <a:cs typeface="Arial"/>
+                </a:rPr>
+                <a:t>检测样本的不合格率，</a:t>
+              </a:r>
+            </a:p>
+          </p:txBody>
+        </p:sp>
+        <p:sp>
+          <p:nvSpPr>
+            <p:cNvPr id="8" name="TextBox 8"/>
+            <p:cNvSpPr txBox="1"/>
+            <p:nvPr/>
+          </p:nvSpPr>
+          <p:spPr>
+            <a:xfrm>
+              <a:off x="581025" y="3581400"/>
+              <a:ext cx="4876800" cy="609600"/>
+            </a:xfrm>
+            <a:prstGeom prst="rect">
+              <a:avLst/>
+            </a:prstGeom>
+            <a:noFill/>
+            <a:ln>
+              <a:noFill/>
+            </a:ln>
+          </p:spPr>
+          <p:txBody>
+            <a:bodyPr wrap="none" lIns="0" tIns="0" rIns="0" bIns="0" anchor="t" anchorCtr="0">
+              <a:spAutoFit/>
+            </a:bodyPr>
+            <a:lstStyle/>
+            <a:p>
+              <a:pPr algn="l"/>
+              <a:r>
+                <a:rPr lang="zh-CN" sz="3000" dirty="0">
+                  <a:solidFill>
+                    <a:srgbClr val="1B9E9A"/>
+                  </a:solidFill>
+                  <a:latin typeface="Arial"/>
+                  <a:ea typeface="Microsoft YaHei"/>
+                  <a:cs typeface="Arial"/>
+                </a:rPr>
+                <a:t>再检验它是否优于平均法。</a:t>
+              </a:r>
+            </a:p>
+          </p:txBody>
+        </p:sp>
+        <p:sp>
+          <p:nvSpPr>
+            <p:cNvPr id="9" name="TextBox 9"/>
+            <p:cNvSpPr txBox="1"/>
+            <p:nvPr/>
+          </p:nvSpPr>
+          <p:spPr>
+            <a:xfrm>
+              <a:off x="596265" y="4615815"/>
+              <a:ext cx="3370136" cy="365760"/>
+            </a:xfrm>
+            <a:prstGeom prst="rect">
+              <a:avLst/>
+            </a:prstGeom>
+            <a:noFill/>
+            <a:ln>
+              <a:noFill/>
+            </a:ln>
+          </p:spPr>
+          <p:txBody>
+            <a:bodyPr wrap="none" lIns="0" tIns="0" rIns="0" bIns="0" anchor="t" anchorCtr="0">
+              <a:spAutoFit/>
+            </a:bodyPr>
+            <a:lstStyle/>
+            <a:p>
+              <a:pPr algn="l"/>
+              <a:r>
+                <a:rPr lang="zh-CN" sz="1800" dirty="0">
+                  <a:solidFill>
+                    <a:srgbClr val="D7E2E7"/>
+                  </a:solidFill>
+                  <a:latin typeface="Arial"/>
+                  <a:ea typeface="Microsoft YaHei"/>
+                  <a:cs typeface="Arial"/>
+                </a:rPr>
+                <a:t>本次平均绝对误差改善约10%，</a:t>
+              </a:r>
+            </a:p>
+          </p:txBody>
+        </p:sp>
+        <p:sp>
+          <p:nvSpPr>
+            <p:cNvPr id="10" name="TextBox 10"/>
+            <p:cNvSpPr txBox="1"/>
+            <p:nvPr/>
+          </p:nvSpPr>
+          <p:spPr>
+            <a:xfrm>
+              <a:off x="596265" y="5015865"/>
+              <a:ext cx="3886200" cy="365760"/>
+            </a:xfrm>
+            <a:prstGeom prst="rect">
+              <a:avLst/>
+            </a:prstGeom>
+            <a:noFill/>
+            <a:ln>
+              <a:noFill/>
+            </a:ln>
+          </p:spPr>
+          <p:txBody>
+            <a:bodyPr wrap="none" lIns="0" tIns="0" rIns="0" bIns="0" anchor="t" anchorCtr="0">
+              <a:spAutoFit/>
+            </a:bodyPr>
+            <a:lstStyle/>
+            <a:p>
+              <a:pPr algn="l"/>
+              <a:r>
+                <a:rPr lang="zh-CN" sz="1800" dirty="0">
+                  <a:solidFill>
+                    <a:srgbClr val="D7E2E7"/>
+                  </a:solidFill>
+                  <a:latin typeface="Arial"/>
+                  <a:ea typeface="Microsoft YaHei"/>
+                  <a:cs typeface="Arial"/>
+                </a:rPr>
+                <a:t>较大的波动仍需要实际检测与核实。</a:t>
+              </a:r>
+            </a:p>
+          </p:txBody>
+        </p:sp>
+      </p:grpSp>
+      <p:grpSp>
+        <p:nvGrpSpPr>
+          <p:cNvPr id="21" name="Group 21"/>
+          <p:cNvGrpSpPr/>
+          <p:nvPr/>
+        </p:nvGrpSpPr>
+        <p:grpSpPr>
+          <a:xfrm>
+            <a:off x="7762875" y="2333625"/>
+            <a:ext cx="3762375" cy="3581400"/>
+            <a:chOff x="7762875" y="2333625"/>
+            <a:chExt cx="3762375" cy="3581400"/>
+          </a:xfrm>
+        </p:grpSpPr>
+        <p:sp>
+          <p:nvSpPr>
+            <p:cNvPr id="12" name="Line 12"/>
+            <p:cNvSpPr/>
+            <p:nvPr/>
+          </p:nvSpPr>
+          <p:spPr>
+            <a:xfrm>
+              <a:off x="7762875" y="2333625"/>
+              <a:ext cx="3762375" cy="9525"/>
+            </a:xfrm>
+            <a:custGeom>
+              <a:avLst/>
+              <a:gdLst/>
+              <a:ahLst/>
+              <a:cxnLst/>
+              <a:rect l="l" t="t" r="r" b="b"/>
+              <a:pathLst>
+                <a:path w="3762375" h="9525">
+                  <a:moveTo>
+                    <a:pt x="0" y="0"/>
+                  </a:moveTo>
+                  <a:lnTo>
+                    <a:pt x="3762375" y="0"/>
+                  </a:lnTo>
+                </a:path>
+              </a:pathLst>
+            </a:custGeom>
+            <a:noFill/>
+            <a:ln w="28575">
+              <a:solidFill>
+                <a:srgbClr val="1B9E9A"/>
+              </a:solidFill>
+            </a:ln>
+          </p:spPr>
+        </p:sp>
+        <p:sp>
+          <p:nvSpPr>
+            <p:cNvPr id="13" name="TextBox 13"/>
+            <p:cNvSpPr txBox="1"/>
+            <p:nvPr/>
+          </p:nvSpPr>
+          <p:spPr>
+            <a:xfrm>
+              <a:off x="7924800" y="2595562"/>
+              <a:ext cx="2757488" cy="457200"/>
+            </a:xfrm>
+            <a:prstGeom prst="rect">
+              <a:avLst/>
+            </a:prstGeom>
+            <a:noFill/>
+            <a:ln>
+              <a:noFill/>
+            </a:ln>
+          </p:spPr>
+          <p:txBody>
+            <a:bodyPr wrap="none" lIns="0" tIns="0" rIns="0" bIns="0" anchor="t" anchorCtr="0">
+              <a:spAutoFit/>
+            </a:bodyPr>
+            <a:lstStyle/>
+            <a:p>
+              <a:pPr algn="l"/>
+              <a:r>
+                <a:rPr lang="zh-CN" sz="2250" dirty="0">
+                  <a:solidFill>
+                    <a:srgbClr val="FFFFFF"/>
+                  </a:solidFill>
+                  <a:latin typeface="Arial"/>
+                  <a:ea typeface="Microsoft YaHei"/>
+                  <a:cs typeface="Arial"/>
+                </a:rPr>
+                <a:t>保留简单方法作对照</a:t>
+              </a:r>
+            </a:p>
+          </p:txBody>
+        </p:sp>
+        <p:sp>
+          <p:nvSpPr>
+            <p:cNvPr id="14" name="TextBox 14"/>
+            <p:cNvSpPr txBox="1"/>
+            <p:nvPr/>
+          </p:nvSpPr>
+          <p:spPr>
+            <a:xfrm>
+              <a:off x="7930515" y="3053715"/>
+              <a:ext cx="2926080" cy="365760"/>
+            </a:xfrm>
+            <a:prstGeom prst="rect">
+              <a:avLst/>
+            </a:prstGeom>
+            <a:noFill/>
+            <a:ln>
+              <a:noFill/>
+            </a:ln>
+          </p:spPr>
+          <p:txBody>
+            <a:bodyPr wrap="none" lIns="0" tIns="0" rIns="0" bIns="0" anchor="t" anchorCtr="0">
+              <a:spAutoFit/>
+            </a:bodyPr>
+            <a:lstStyle/>
+            <a:p>
+              <a:pPr algn="l"/>
+              <a:r>
+                <a:rPr lang="zh-CN" sz="1800" dirty="0">
+                  <a:solidFill>
+                    <a:srgbClr val="D7E2E7"/>
+                  </a:solidFill>
+                  <a:latin typeface="Arial"/>
+                  <a:ea typeface="Microsoft YaHei"/>
+                  <a:cs typeface="Arial"/>
+                </a:rPr>
+                <a:t>通过预测效果判断模型价值</a:t>
+              </a:r>
+            </a:p>
+          </p:txBody>
+        </p:sp>
+        <p:sp>
+          <p:nvSpPr>
+            <p:cNvPr id="15" name="Line 15"/>
+            <p:cNvSpPr/>
+            <p:nvPr/>
+          </p:nvSpPr>
+          <p:spPr>
+            <a:xfrm>
+              <a:off x="7762875" y="3619500"/>
+              <a:ext cx="3762375" cy="9525"/>
+            </a:xfrm>
+            <a:custGeom>
+              <a:avLst/>
+              <a:gdLst/>
+              <a:ahLst/>
+              <a:cxnLst/>
+              <a:rect l="l" t="t" r="r" b="b"/>
+              <a:pathLst>
+                <a:path w="3762375" h="9525">
+                  <a:moveTo>
+                    <a:pt x="0" y="0"/>
+                  </a:moveTo>
+                  <a:lnTo>
+                    <a:pt x="3762375" y="0"/>
+                  </a:lnTo>
+                </a:path>
+              </a:pathLst>
+            </a:custGeom>
+            <a:noFill/>
+            <a:ln w="9525">
+              <a:solidFill>
+                <a:srgbClr val="607484"/>
+              </a:solidFill>
+            </a:ln>
+          </p:spPr>
+        </p:sp>
+        <p:sp>
+          <p:nvSpPr>
+            <p:cNvPr id="16" name="TextBox 16"/>
+            <p:cNvSpPr txBox="1"/>
+            <p:nvPr/>
+          </p:nvSpPr>
+          <p:spPr>
+            <a:xfrm>
+              <a:off x="7924800" y="3843338"/>
+              <a:ext cx="3057525" cy="457200"/>
+            </a:xfrm>
+            <a:prstGeom prst="rect">
+              <a:avLst/>
+            </a:prstGeom>
+            <a:noFill/>
+            <a:ln>
+              <a:noFill/>
+            </a:ln>
+          </p:spPr>
+          <p:txBody>
+            <a:bodyPr wrap="none" lIns="0" tIns="0" rIns="0" bIns="0" anchor="t" anchorCtr="0">
+              <a:spAutoFit/>
+            </a:bodyPr>
+            <a:lstStyle/>
+            <a:p>
+              <a:pPr algn="l"/>
+              <a:r>
+                <a:rPr lang="zh-CN" sz="2250" dirty="0">
+                  <a:solidFill>
+                    <a:srgbClr val="FFFFFF"/>
+                  </a:solidFill>
+                  <a:latin typeface="Arial"/>
+                  <a:ea typeface="Microsoft YaHei"/>
+                  <a:cs typeface="Arial"/>
+                </a:rPr>
+                <a:t>结合实际检测安排检查</a:t>
+              </a:r>
+            </a:p>
+          </p:txBody>
+        </p:sp>
+        <p:sp>
+          <p:nvSpPr>
+            <p:cNvPr id="17" name="TextBox 17"/>
+            <p:cNvSpPr txBox="1"/>
+            <p:nvPr/>
+          </p:nvSpPr>
+          <p:spPr>
+            <a:xfrm>
+              <a:off x="7930515" y="4301490"/>
+              <a:ext cx="2446020" cy="365760"/>
+            </a:xfrm>
+            <a:prstGeom prst="rect">
+              <a:avLst/>
+            </a:prstGeom>
+            <a:noFill/>
+            <a:ln>
+              <a:noFill/>
+            </a:ln>
+          </p:spPr>
+          <p:txBody>
+            <a:bodyPr wrap="none" lIns="0" tIns="0" rIns="0" bIns="0" anchor="t" anchorCtr="0">
+              <a:spAutoFit/>
+            </a:bodyPr>
+            <a:lstStyle/>
+            <a:p>
+              <a:pPr algn="l"/>
+              <a:r>
+                <a:rPr lang="zh-CN" sz="1800" dirty="0">
+                  <a:solidFill>
+                    <a:srgbClr val="D7E2E7"/>
+                  </a:solidFill>
+                  <a:latin typeface="Arial"/>
+                  <a:ea typeface="Microsoft YaHei"/>
+                  <a:cs typeface="Arial"/>
+                </a:rPr>
+                <a:t>关注预测与实测的偏离</a:t>
+              </a:r>
+            </a:p>
+          </p:txBody>
+        </p:sp>
+        <p:sp>
+          <p:nvSpPr>
+            <p:cNvPr id="18" name="Line 18"/>
+            <p:cNvSpPr/>
+            <p:nvPr/>
+          </p:nvSpPr>
+          <p:spPr>
+            <a:xfrm>
+              <a:off x="7762875" y="4867275"/>
+              <a:ext cx="3762375" cy="9525"/>
+            </a:xfrm>
+            <a:custGeom>
+              <a:avLst/>
+              <a:gdLst/>
+              <a:ahLst/>
+              <a:cxnLst/>
+              <a:rect l="l" t="t" r="r" b="b"/>
+              <a:pathLst>
+                <a:path w="3762375" h="9525">
+                  <a:moveTo>
+                    <a:pt x="0" y="0"/>
+                  </a:moveTo>
+                  <a:lnTo>
+                    <a:pt x="3762375" y="0"/>
+                  </a:lnTo>
+                </a:path>
+              </a:pathLst>
+            </a:custGeom>
+            <a:noFill/>
+            <a:ln w="9525">
+              <a:solidFill>
+                <a:srgbClr val="607484"/>
+              </a:solidFill>
+            </a:ln>
+          </p:spPr>
+        </p:sp>
+        <p:sp>
+          <p:nvSpPr>
+            <p:cNvPr id="19" name="TextBox 19"/>
+            <p:cNvSpPr txBox="1"/>
+            <p:nvPr/>
+          </p:nvSpPr>
+          <p:spPr>
+            <a:xfrm>
+              <a:off x="7924800" y="5091112"/>
+              <a:ext cx="2757488" cy="457200"/>
+            </a:xfrm>
+            <a:prstGeom prst="rect">
+              <a:avLst/>
+            </a:prstGeom>
+            <a:noFill/>
+            <a:ln>
+              <a:noFill/>
+            </a:ln>
+          </p:spPr>
+          <p:txBody>
+            <a:bodyPr wrap="none" lIns="0" tIns="0" rIns="0" bIns="0" anchor="t" anchorCtr="0">
+              <a:spAutoFit/>
+            </a:bodyPr>
+            <a:lstStyle/>
+            <a:p>
+              <a:pPr algn="l"/>
+              <a:r>
+                <a:rPr lang="zh-CN" sz="2250" dirty="0">
+                  <a:solidFill>
+                    <a:srgbClr val="FFFFFF"/>
+                  </a:solidFill>
+                  <a:latin typeface="Arial"/>
+                  <a:ea typeface="Microsoft YaHei"/>
+                  <a:cs typeface="Arial"/>
+                </a:rPr>
+                <a:t>进一步加入过程信息</a:t>
+              </a:r>
+            </a:p>
+          </p:txBody>
+        </p:sp>
+        <p:sp>
+          <p:nvSpPr>
+            <p:cNvPr id="20" name="TextBox 20"/>
+            <p:cNvSpPr txBox="1"/>
+            <p:nvPr/>
+          </p:nvSpPr>
+          <p:spPr>
+            <a:xfrm>
+              <a:off x="7930515" y="5549265"/>
+              <a:ext cx="2686050" cy="365760"/>
+            </a:xfrm>
+            <a:prstGeom prst="rect">
+              <a:avLst/>
+            </a:prstGeom>
+            <a:noFill/>
+            <a:ln>
+              <a:noFill/>
+            </a:ln>
+          </p:spPr>
+          <p:txBody>
+            <a:bodyPr wrap="none" lIns="0" tIns="0" rIns="0" bIns="0" anchor="t" anchorCtr="0">
+              <a:spAutoFit/>
+            </a:bodyPr>
+            <a:lstStyle/>
+            <a:p>
+              <a:pPr algn="l"/>
+              <a:r>
+                <a:rPr lang="zh-CN" sz="1800" dirty="0">
+                  <a:solidFill>
+                    <a:srgbClr val="D7E2E7"/>
+                  </a:solidFill>
+                  <a:latin typeface="Arial"/>
+                  <a:ea typeface="Microsoft YaHei"/>
+                  <a:cs typeface="Arial"/>
+                </a:rPr>
+                <a:t>研究设备状态与工艺参数</a:t>
+              </a:r>
+            </a:p>
+          </p:txBody>
+        </p:sp>
+      </p:grpSp>
+      <p:sp>
+        <p:nvSpPr>
+          <p:cNvPr id="22" name="TextBox 22"/>
+          <p:cNvSpPr txBox="1"/>
+          <p:nvPr/>
+        </p:nvSpPr>
+        <p:spPr>
+          <a:xfrm>
+            <a:off x="558165" y="6363652"/>
+            <a:ext cx="3191065" cy="213360"/>
+          </a:xfrm>
+          <a:prstGeom prst="rect">
+            <a:avLst/>
+          </a:prstGeom>
+          <a:noFill/>
+          <a:ln>
+            <a:noFill/>
+          </a:ln>
+        </p:spPr>
+        <p:txBody>
+          <a:bodyPr wrap="none" lIns="0" tIns="0" rIns="0" bIns="0" anchor="t" anchorCtr="0">
+            <a:spAutoFit/>
+          </a:bodyPr>
+          <a:lstStyle/>
+          <a:p>
+            <a:pPr algn="l"/>
+            <a:r>
+              <a:rPr lang="zh-CN" sz="1050" dirty="0">
+                <a:solidFill>
+                  <a:srgbClr val="D7E2E7"/>
+                </a:solidFill>
+                <a:latin typeface="Arial"/>
+                <a:ea typeface="Microsoft YaHei"/>
+                <a:cs typeface="Arial"/>
+              </a:rPr>
+              <a:t>质量管理学课程汇报 · 孙德鑫 ｜ 数据：UCI SECOM</a:t>
+            </a:r>
+          </a:p>
+        </p:txBody>
+      </p:sp>
+      <p:sp>
+        <p:nvSpPr>
+          <p:cNvPr id="23" name="TextBox 23"/>
+          <p:cNvSpPr txBox="1"/>
+          <p:nvPr/>
+        </p:nvSpPr>
+        <p:spPr>
+          <a:xfrm>
+            <a:off x="11226165" y="6363652"/>
+            <a:ext cx="411972" cy="161583"/>
+          </a:xfrm>
+          <a:prstGeom prst="rect">
+            <a:avLst/>
+          </a:prstGeom>
+          <a:noFill/>
+          <a:ln>
+            <a:noFill/>
+          </a:ln>
+        </p:spPr>
+        <p:txBody>
+          <a:bodyPr wrap="none" lIns="0" tIns="0" rIns="0" bIns="0" anchor="t" anchorCtr="0">
+            <a:spAutoFit/>
+          </a:bodyPr>
+          <a:lstStyle/>
+          <a:p>
+            <a:pPr algn="l"/>
+            <a:r>
+              <a:rPr lang="en-US" altLang="zh-CN" sz="1050">
+                <a:solidFill>
+                  <a:srgbClr val="D7E2E7"/>
+                </a:solidFill>
+                <a:latin typeface="Arial"/>
+                <a:ea typeface="Microsoft YaHei"/>
+                <a:cs typeface="Arial"/>
+              </a:rPr>
+              <a:t>11 / 11</a:t>
+            </a:r>
+            <a:endParaRPr lang="zh-CN" sz="1050" dirty="0">
+              <a:solidFill>
+                <a:srgbClr val="D7E2E7"/>
+              </a:solidFill>
+              <a:latin typeface="Arial"/>
+              <a:ea typeface="Microsoft YaHei"/>
+              <a:cs typeface="Arial"/>
+            </a:endParaRPr>
+          </a:p>
+        </p:txBody>
+      </p:sp>
+    </p:spTree>
+  </p:cSld>
+  <p:clrMapOvr>
+    <a:masterClrMapping/>
+  </p:clrMapOvr>
+  <mc:AlternateContent xmlns:mc="http://schemas.openxmlformats.org/markup-compatibility/2006">
+    <mc:Choice xmlns:p14="http://schemas.microsoft.com/office/powerpoint/2010/main" Requires="p14">
+      <p:transition p14:dur="400">
+        <p:fade/>
+      </p:transition>
+    </mc:Choice>
+    <mc:Fallback>
+      <p:transition>
+        <p:fade/>
+      </p:transition>
+    </mc:Fallback>
+  </mc:AlternateContent>
+  <p:timing>
+    <p:tnLst>
+      <p:par>
+        <p:cTn id="1" dur="indefinite" restart="never" nodeType="tmRoot">
+          <p:childTnLst>
+            <p:seq concurrent="1" nextAc="seek">
+              <p:cTn id="2" dur="indefinite" nodeType="mainSeq">
+                <p:childTnLst>
+                  <p:par>
+                    <p:cTn id="3" fill="hold">
+                      <p:stCondLst>
+                        <p:cond delay="indefinite"/>
+                        <p:cond evt="onBegin" delay="0">
+                          <p:tn val="2"/>
+                        </p:cond>
+                      </p:stCondLst>
+                      <p:childTnLst>
+                        <p:par>
+                          <p:cTn id="4" fill="hold">
+                            <p:stCondLst>
+                              <p:cond delay="0"/>
+                            </p:stCondLst>
+                            <p:childTnLst>
+                              <p:par>
+                                <p:cTn id="5" presetID="10" presetClass="entr" presetSubtype="0" fill="hold" nodeType="afterEffect">
+                                  <p:stCondLst>
+                                    <p:cond delay="0"/>
+                                  </p:stCondLst>
+                                  <p:childTnLst>
+                                    <p:set>
+                                      <p:cBhvr>
+                                        <p:cTn id="6" dur="1" fill="hold">
+                                          <p:stCondLst>
+                                            <p:cond delay="0"/>
+                                          </p:stCondLst>
+                                        </p:cTn>
+                                        <p:tgtEl>
+                                          <p:spTgt spid="5"/>
+                                        </p:tgtEl>
+                                        <p:attrNameLst>
+                                          <p:attrName>style.visibility</p:attrName>
+                                        </p:attrNameLst>
+                                      </p:cBhvr>
+                                      <p:to>
+                                        <p:strVal val="visible"/>
+                                      </p:to>
+                                    </p:set>
+                                    <p:animEffect transition="in" filter="fade">
+                                      <p:cBhvr>
+                                        <p:cTn id="7" dur="400"/>
+                                        <p:tgtEl>
+                                          <p:spTgt spid="5"/>
+                                        </p:tgtEl>
+                                      </p:cBhvr>
+                                    </p:animEffect>
+                                  </p:childTnLst>
+                                </p:cTn>
+                              </p:par>
+                            </p:childTnLst>
+                          </p:cTn>
+                        </p:par>
+                        <p:par>
+                          <p:cTn id="8" fill="hold">
+                            <p:stCondLst>
+                              <p:cond delay="900"/>
+                            </p:stCondLst>
+                            <p:childTnLst>
+                              <p:par>
+                                <p:cTn id="9" presetID="10" presetClass="entr" presetSubtype="0" fill="hold" nodeType="afterEffect">
+                                  <p:stCondLst>
+                                    <p:cond delay="0"/>
+                                  </p:stCondLst>
+                                  <p:childTnLst>
+                                    <p:set>
+                                      <p:cBhvr>
+                                        <p:cTn id="10" dur="1" fill="hold">
+                                          <p:stCondLst>
+                                            <p:cond delay="0"/>
+                                          </p:stCondLst>
+                                        </p:cTn>
+                                        <p:tgtEl>
+                                          <p:spTgt spid="11"/>
+                                        </p:tgtEl>
+                                        <p:attrNameLst>
+                                          <p:attrName>style.visibility</p:attrName>
+                                        </p:attrNameLst>
+                                      </p:cBhvr>
+                                      <p:to>
+                                        <p:strVal val="visible"/>
+                                      </p:to>
+                                    </p:set>
+                                    <p:animEffect transition="in" filter="fade">
+                                      <p:cBhvr>
+                                        <p:cTn id="11" dur="400"/>
+                                        <p:tgtEl>
+                                          <p:spTgt spid="11"/>
+                                        </p:tgtEl>
+                                      </p:cBhvr>
+                                    </p:animEffect>
+                                  </p:childTnLst>
+                                </p:cTn>
+                              </p:par>
+                            </p:childTnLst>
+                          </p:cTn>
+                        </p:par>
+                        <p:par>
+                          <p:cTn id="12" fill="hold">
+                            <p:stCondLst>
+                              <p:cond delay="1800"/>
+                            </p:stCondLst>
+                            <p:childTnLst>
+                              <p:par>
+                                <p:cTn id="13" presetID="22" presetClass="entr" presetSubtype="1" fill="hold" nodeType="afterEffect">
+                                  <p:stCondLst>
+                                    <p:cond delay="0"/>
+                                  </p:stCondLst>
+                                  <p:childTnLst>
+                                    <p:set>
+                                      <p:cBhvr>
+                                        <p:cTn id="14" dur="1" fill="hold">
+                                          <p:stCondLst>
+                                            <p:cond delay="0"/>
+                                          </p:stCondLst>
+                                        </p:cTn>
+                                        <p:tgtEl>
+                                          <p:spTgt spid="21"/>
+                                        </p:tgtEl>
+                                        <p:attrNameLst>
+                                          <p:attrName>style.visibility</p:attrName>
+                                        </p:attrNameLst>
+                                      </p:cBhvr>
+                                      <p:to>
+                                        <p:strVal val="visible"/>
+                                      </p:to>
+                                    </p:set>
+                                    <p:animEffect transition="in" filter="wipe(left)">
+                                      <p:cBhvr>
+                                        <p:cTn id="15" dur="400"/>
+                                        <p:tgtEl>
+                                          <p:spTgt spid="21"/>
+                                        </p:tgtEl>
+                                      </p:cBhvr>
+                                    </p:animEffect>
+                                  </p:childTnLst>
+                                </p:cTn>
+                              </p:par>
+                            </p:childTnLst>
+                          </p:cTn>
+                        </p:par>
+                      </p:childTnLst>
+                    </p:cTn>
+                  </p:par>
+                </p:childTnLst>
+              </p:cTn>
+              <p:prevCondLst>
+                <p:cond evt="onPrev" delay="0">
+                  <p:tgtEl>
+                    <p:sldTgt/>
+                  </p:tgtEl>
+                </p:cond>
+              </p:prevCondLst>
+              <p:nextCondLst>
+                <p:cond evt="onNext" delay="0">
+                  <p:tgtEl>
+                    <p:sldTgt/>
+                  </p:tgtEl>
+                </p:cond>
+              </p:nextCondLst>
+            </p:seq>
+          </p:childTnLst>
+        </p:cTn>
+      </p:par>
+    </p:tnLst>
+    <p:bldLst>
+      <p:bldP spid="5" grpId="0"/>
+      <p:bldP spid="11" grpId="0"/>
+      <p:bldP spid="21" grpId="0"/>
     </p:bldLst>
   </p:timing>
 </p:sld>
@@ -4571,18 +6810,7 @@
                   <a:ea typeface="Microsoft YaHei"/>
                   <a:cs typeface="Arial"/>
                 </a:rPr>
-                <a:t>看见已经发生的失败，</a:t>
-              </a:r>
-              <a:r>
-                <a:rPr lang="zh-CN" sz="3000" dirty="0">
-                  <a:solidFill>
-                    <a:srgbClr val="0B2233"/>
-                  </a:solidFill>
-                  <a:latin typeface="Arial"/>
-                  <a:ea typeface="Microsoft YaHei"/>
-                  <a:cs typeface="Arial"/>
-                </a:rPr>
-                <a:t>再尝试预测下一组。</a:t>
+                <a:t>看见已经发生的失败，再尝试预测下一组。</a:t>
               </a:r>
             </a:p>
           </p:txBody>
@@ -4624,29 +6852,7 @@
                   <a:ea typeface="Microsoft YaHei"/>
                   <a:cs typeface="Arial"/>
                 </a:rPr>
-                <a:t>对象：接下来20条检测记录</a:t>
-              </a:r>
-              <a:r>
-                <a:rPr lang="zh-CN" sz="1800" dirty="0">
-                  <a:solidFill>
-                    <a:srgbClr val="607484"/>
-                  </a:solidFill>
-                  <a:latin typeface="Arial"/>
-                  <a:ea typeface="Microsoft YaHei"/>
-                  <a:cs typeface="Arial"/>
-                </a:rPr>
-                <a:t>问题：预测是否优于简单取平均？</a:t>
-              </a:r>
-              <a:r>
-                <a:rPr lang="zh-CN" sz="1800" dirty="0">
-                  <a:solidFill>
-                    <a:srgbClr val="607484"/>
-                  </a:solidFill>
-                  <a:latin typeface="Arial"/>
-                  <a:ea typeface="Microsoft YaHei"/>
-                  <a:cs typeface="Arial"/>
-                </a:rPr>
-                <a:t>用途：为质量检查提供辅助信息</a:t>
+                <a:t>对象：接下来20条检测记录问题：预测是否优于简单取平均？用途：为质量检查提供辅助信息</a:t>
               </a:r>
             </a:p>
           </p:txBody>
@@ -4675,8 +6881,8 @@
             <p:nvPr/>
           </p:nvPicPr>
           <p:blipFill>
-            <a:blip r:embed="rId2"/>
-            <a:srcRect l="19383" t="0" r="0" b="0"/>
+            <a:blip r:embed="rId3"/>
+            <a:srcRect l="19383"/>
             <a:stretch>
               <a:fillRect/>
             </a:stretch>
@@ -4803,7 +7009,7 @@
         <p:spPr>
           <a:xfrm>
             <a:off x="11226165" y="6363652"/>
-            <a:ext cx="495729" cy="213360"/>
+            <a:ext cx="411972" cy="161583"/>
           </a:xfrm>
           <a:prstGeom prst="rect">
             <a:avLst/>
@@ -4821,7 +7027,7 @@
           <a:p>
             <a:pPr algn="l"/>
             <a:r>
-              <a:rPr lang="zh-CN" sz="1050" dirty="0">
+              <a:rPr lang="en-US" altLang="zh-CN" sz="1050">
                 <a:solidFill>
                   <a:srgbClr val="607484"/>
                 </a:solidFill>
@@ -4829,8 +7035,16 @@
                 <a:ea typeface="Microsoft YaHei"/>
                 <a:cs typeface="Arial"/>
               </a:rPr>
-              <a:t>02 / 09</a:t>
+              <a:t>02 / 11</a:t>
             </a:r>
+            <a:endParaRPr lang="zh-CN" sz="1050" dirty="0">
+              <a:solidFill>
+                <a:srgbClr val="607484"/>
+              </a:solidFill>
+              <a:latin typeface="Arial"/>
+              <a:ea typeface="Microsoft YaHei"/>
+              <a:cs typeface="Arial"/>
+            </a:endParaRPr>
           </a:p>
         </p:txBody>
       </p:sp>
@@ -4839,9 +7053,18 @@
   <p:clrMapOvr>
     <a:masterClrMapping/>
   </p:clrMapOvr>
-  <p:transition xmlns:p14="http://schemas.microsoft.com/office/powerpoint/2010/main" p14:dur="400">
-    <p:fade/>
-  </p:transition>
+  <mc:AlternateContent xmlns:mc="http://schemas.openxmlformats.org/markup-compatibility/2006">
+    <mc:Choice xmlns:p14="http://schemas.microsoft.com/office/powerpoint/2010/main" Requires="p14">
+      <p:transition p14:dur="400">
+        <p:fade/>
+      </p:transition>
+    </mc:Choice>
+    <mc:Fallback>
+      <p:transition>
+        <p:fade/>
+      </p:transition>
+    </mc:Fallback>
+  </mc:AlternateContent>
   <p:timing>
     <p:tnLst>
       <p:par>
@@ -5821,7 +8044,7 @@
         <p:spPr>
           <a:xfrm>
             <a:off x="11226165" y="6363652"/>
-            <a:ext cx="495729" cy="213360"/>
+            <a:ext cx="411972" cy="161583"/>
           </a:xfrm>
           <a:prstGeom prst="rect">
             <a:avLst/>
@@ -5839,7 +8062,7 @@
           <a:p>
             <a:pPr algn="l"/>
             <a:r>
-              <a:rPr lang="zh-CN" sz="1050" dirty="0">
+              <a:rPr lang="en-US" altLang="zh-CN" sz="1050">
                 <a:solidFill>
                   <a:srgbClr val="607484"/>
                 </a:solidFill>
@@ -5847,8 +8070,16 @@
                 <a:ea typeface="Microsoft YaHei"/>
                 <a:cs typeface="Arial"/>
               </a:rPr>
-              <a:t>03 / 09</a:t>
+              <a:t>03 / 11</a:t>
             </a:r>
+            <a:endParaRPr lang="zh-CN" sz="1050" dirty="0">
+              <a:solidFill>
+                <a:srgbClr val="607484"/>
+              </a:solidFill>
+              <a:latin typeface="Arial"/>
+              <a:ea typeface="Microsoft YaHei"/>
+              <a:cs typeface="Arial"/>
+            </a:endParaRPr>
           </a:p>
         </p:txBody>
       </p:sp>
@@ -5857,9 +8088,18 @@
   <p:clrMapOvr>
     <a:masterClrMapping/>
   </p:clrMapOvr>
-  <p:transition xmlns:p14="http://schemas.microsoft.com/office/powerpoint/2010/main" p14:dur="400">
-    <p:fade/>
-  </p:transition>
+  <mc:AlternateContent xmlns:mc="http://schemas.openxmlformats.org/markup-compatibility/2006">
+    <mc:Choice xmlns:p14="http://schemas.microsoft.com/office/powerpoint/2010/main" Requires="p14">
+      <p:transition p14:dur="400">
+        <p:fade/>
+      </p:transition>
+    </mc:Choice>
+    <mc:Fallback>
+      <p:transition>
+        <p:fade/>
+      </p:transition>
+    </mc:Fallback>
+  </mc:AlternateContent>
   <p:timing>
     <p:tnLst>
       <p:par>
@@ -6043,6 +8283,1235 @@
 </file>
 
 <file path=ppt/slides/slide4.xml><?xml version="1.0" encoding="utf-8"?>
+<p:sld xmlns:a="http://schemas.openxmlformats.org/drawingml/2006/main" xmlns:r="http://schemas.openxmlformats.org/officeDocument/2006/relationships" xmlns:p="http://schemas.openxmlformats.org/presentationml/2006/main">
+  <p:cSld>
+    <p:spTree>
+      <p:nvGrpSpPr>
+        <p:cNvPr id="1" name=""/>
+        <p:cNvGrpSpPr/>
+        <p:nvPr/>
+      </p:nvGrpSpPr>
+      <p:grpSpPr>
+        <a:xfrm>
+          <a:off x="0" y="0"/>
+          <a:ext cx="0" cy="0"/>
+          <a:chOff x="0" y="0"/>
+          <a:chExt cx="0" cy="0"/>
+        </a:xfrm>
+      </p:grpSpPr>
+      <p:sp>
+        <p:nvSpPr>
+          <p:cNvPr id="10" name="矩形 9">
+            <a:extLst>
+              <a:ext uri="{FF2B5EF4-FFF2-40B4-BE49-F238E27FC236}">
+                <a16:creationId xmlns:a16="http://schemas.microsoft.com/office/drawing/2014/main" id="{15F54E66-EBE6-45A6-AB24-3DA55C74600B}"/>
+              </a:ext>
+            </a:extLst>
+          </p:cNvPr>
+          <p:cNvSpPr>
+            <a:spLocks noGrp="1"/>
+          </p:cNvSpPr>
+          <p:nvPr/>
+        </p:nvSpPr>
+        <p:spPr>
+          <a:xfrm>
+            <a:off x="571500" y="400050"/>
+            <a:ext cx="10477500" cy="333375"/>
+          </a:xfrm>
+          <a:prstGeom prst="rect">
+            <a:avLst/>
+          </a:prstGeom>
+          <a:noFill/>
+          <a:ln w="0">
+            <a:noFill/>
+          </a:ln>
+        </p:spPr>
+        <p:txBody>
+          <a:bodyPr/>
+          <a:lstStyle>
+            <a:defPPr>
+              <a:defRPr sz="1350" b="0">
+                <a:solidFill>
+                  <a:srgbClr val="168C89"/>
+                </a:solidFill>
+              </a:defRPr>
+            </a:defPPr>
+            <a:lvl1pPr>
+              <a:defRPr sz="1350" b="0">
+                <a:solidFill>
+                  <a:srgbClr val="168C89"/>
+                </a:solidFill>
+              </a:defRPr>
+            </a:lvl1pPr>
+            <a:lvl2pPr>
+              <a:defRPr sz="1350" b="0">
+                <a:solidFill>
+                  <a:srgbClr val="168C89"/>
+                </a:solidFill>
+              </a:defRPr>
+            </a:lvl2pPr>
+            <a:lvl3pPr>
+              <a:defRPr sz="1350" b="0">
+                <a:solidFill>
+                  <a:srgbClr val="168C89"/>
+                </a:solidFill>
+              </a:defRPr>
+            </a:lvl3pPr>
+            <a:lvl4pPr>
+              <a:defRPr sz="1350" b="0">
+                <a:solidFill>
+                  <a:srgbClr val="168C89"/>
+                </a:solidFill>
+              </a:defRPr>
+            </a:lvl4pPr>
+            <a:lvl5pPr>
+              <a:defRPr sz="1350" b="0">
+                <a:solidFill>
+                  <a:srgbClr val="168C89"/>
+                </a:solidFill>
+              </a:defRPr>
+            </a:lvl5pPr>
+            <a:lvl6pPr>
+              <a:defRPr sz="1350" b="0">
+                <a:solidFill>
+                  <a:srgbClr val="168C89"/>
+                </a:solidFill>
+              </a:defRPr>
+            </a:lvl6pPr>
+            <a:lvl7pPr>
+              <a:defRPr sz="1350" b="0">
+                <a:solidFill>
+                  <a:srgbClr val="168C89"/>
+                </a:solidFill>
+              </a:defRPr>
+            </a:lvl7pPr>
+            <a:lvl8pPr>
+              <a:defRPr sz="1350" b="0">
+                <a:solidFill>
+                  <a:srgbClr val="168C89"/>
+                </a:solidFill>
+              </a:defRPr>
+            </a:lvl8pPr>
+            <a:lvl9pPr>
+              <a:defRPr sz="1350" b="0">
+                <a:solidFill>
+                  <a:srgbClr val="168C89"/>
+                </a:solidFill>
+              </a:defRPr>
+            </a:lvl9pPr>
+          </a:lstStyle>
+          <a:p>
+            <a:pPr>
+              <a:defRPr sz="1350" b="0">
+                <a:solidFill>
+                  <a:srgbClr val="168C89"/>
+                </a:solidFill>
+              </a:defRPr>
+            </a:pPr>
+            <a:r>
+              <a:rPr sz="1350" b="0">
+                <a:solidFill>
+                  <a:srgbClr val="168C89"/>
+                </a:solidFill>
+              </a:rPr>
+              <a:t>原始数据与文件处理</a:t>
+            </a:r>
+          </a:p>
+        </p:txBody>
+      </p:sp>
+      <p:sp>
+        <p:nvSpPr>
+          <p:cNvPr id="2" name="矩形 1">
+            <a:extLst>
+              <a:ext uri="{FF2B5EF4-FFF2-40B4-BE49-F238E27FC236}">
+                <a16:creationId xmlns:a16="http://schemas.microsoft.com/office/drawing/2014/main" id="{5CC8D188-350B-4A8B-9CC5-D568DDEAB8FF}"/>
+              </a:ext>
+            </a:extLst>
+          </p:cNvPr>
+          <p:cNvSpPr>
+            <a:spLocks noGrp="1"/>
+          </p:cNvSpPr>
+          <p:nvPr/>
+        </p:nvSpPr>
+        <p:spPr>
+          <a:xfrm>
+            <a:off x="571500" y="904875"/>
+            <a:ext cx="11049000" cy="666750"/>
+          </a:xfrm>
+          <a:prstGeom prst="rect">
+            <a:avLst/>
+          </a:prstGeom>
+          <a:noFill/>
+          <a:ln w="0">
+            <a:noFill/>
+          </a:ln>
+        </p:spPr>
+        <p:txBody>
+          <a:bodyPr/>
+          <a:lstStyle>
+            <a:defPPr>
+              <a:defRPr sz="3000" b="1">
+                <a:solidFill>
+                  <a:srgbClr val="0B2233"/>
+                </a:solidFill>
+              </a:defRPr>
+            </a:defPPr>
+            <a:lvl1pPr>
+              <a:defRPr sz="3000" b="1">
+                <a:solidFill>
+                  <a:srgbClr val="0B2233"/>
+                </a:solidFill>
+              </a:defRPr>
+            </a:lvl1pPr>
+            <a:lvl2pPr>
+              <a:defRPr sz="3000" b="1">
+                <a:solidFill>
+                  <a:srgbClr val="0B2233"/>
+                </a:solidFill>
+              </a:defRPr>
+            </a:lvl2pPr>
+            <a:lvl3pPr>
+              <a:defRPr sz="3000" b="1">
+                <a:solidFill>
+                  <a:srgbClr val="0B2233"/>
+                </a:solidFill>
+              </a:defRPr>
+            </a:lvl3pPr>
+            <a:lvl4pPr>
+              <a:defRPr sz="3000" b="1">
+                <a:solidFill>
+                  <a:srgbClr val="0B2233"/>
+                </a:solidFill>
+              </a:defRPr>
+            </a:lvl4pPr>
+            <a:lvl5pPr>
+              <a:defRPr sz="3000" b="1">
+                <a:solidFill>
+                  <a:srgbClr val="0B2233"/>
+                </a:solidFill>
+              </a:defRPr>
+            </a:lvl5pPr>
+            <a:lvl6pPr>
+              <a:defRPr sz="3000" b="1">
+                <a:solidFill>
+                  <a:srgbClr val="0B2233"/>
+                </a:solidFill>
+              </a:defRPr>
+            </a:lvl6pPr>
+            <a:lvl7pPr>
+              <a:defRPr sz="3000" b="1">
+                <a:solidFill>
+                  <a:srgbClr val="0B2233"/>
+                </a:solidFill>
+              </a:defRPr>
+            </a:lvl7pPr>
+            <a:lvl8pPr>
+              <a:defRPr sz="3000" b="1">
+                <a:solidFill>
+                  <a:srgbClr val="0B2233"/>
+                </a:solidFill>
+              </a:defRPr>
+            </a:lvl8pPr>
+            <a:lvl9pPr>
+              <a:defRPr sz="3000" b="1">
+                <a:solidFill>
+                  <a:srgbClr val="0B2233"/>
+                </a:solidFill>
+              </a:defRPr>
+            </a:lvl9pPr>
+          </a:lstStyle>
+          <a:p>
+            <a:pPr>
+              <a:defRPr sz="3000" b="1">
+                <a:solidFill>
+                  <a:srgbClr val="0B2233"/>
+                </a:solidFill>
+              </a:defRPr>
+            </a:pPr>
+            <a:r>
+              <a:rPr sz="3000" b="1">
+                <a:solidFill>
+                  <a:srgbClr val="0B2233"/>
+                </a:solidFill>
+              </a:rPr>
+              <a:t>原始标签如何成为预测结果</a:t>
+            </a:r>
+          </a:p>
+        </p:txBody>
+      </p:sp>
+      <p:sp>
+        <p:nvSpPr>
+          <p:cNvPr id="3" name="矩形 2">
+            <a:extLst>
+              <a:ext uri="{FF2B5EF4-FFF2-40B4-BE49-F238E27FC236}">
+                <a16:creationId xmlns:a16="http://schemas.microsoft.com/office/drawing/2014/main" id="{F8F9B12E-113F-4D7B-A256-0843A21EF5DB}"/>
+              </a:ext>
+            </a:extLst>
+          </p:cNvPr>
+          <p:cNvSpPr>
+            <a:spLocks noGrp="1"/>
+          </p:cNvSpPr>
+          <p:nvPr/>
+        </p:nvSpPr>
+        <p:spPr>
+          <a:xfrm>
+            <a:off x="571500" y="1857375"/>
+            <a:ext cx="5810250" cy="381000"/>
+          </a:xfrm>
+          <a:prstGeom prst="rect">
+            <a:avLst/>
+          </a:prstGeom>
+          <a:noFill/>
+          <a:ln w="0">
+            <a:noFill/>
+          </a:ln>
+        </p:spPr>
+        <p:txBody>
+          <a:bodyPr/>
+          <a:lstStyle>
+            <a:defPPr>
+              <a:defRPr sz="1875" b="1">
+                <a:solidFill>
+                  <a:srgbClr val="0B2233"/>
+                </a:solidFill>
+              </a:defRPr>
+            </a:defPPr>
+            <a:lvl1pPr>
+              <a:defRPr sz="1875" b="1">
+                <a:solidFill>
+                  <a:srgbClr val="0B2233"/>
+                </a:solidFill>
+              </a:defRPr>
+            </a:lvl1pPr>
+            <a:lvl2pPr>
+              <a:defRPr sz="1875" b="1">
+                <a:solidFill>
+                  <a:srgbClr val="0B2233"/>
+                </a:solidFill>
+              </a:defRPr>
+            </a:lvl2pPr>
+            <a:lvl3pPr>
+              <a:defRPr sz="1875" b="1">
+                <a:solidFill>
+                  <a:srgbClr val="0B2233"/>
+                </a:solidFill>
+              </a:defRPr>
+            </a:lvl3pPr>
+            <a:lvl4pPr>
+              <a:defRPr sz="1875" b="1">
+                <a:solidFill>
+                  <a:srgbClr val="0B2233"/>
+                </a:solidFill>
+              </a:defRPr>
+            </a:lvl4pPr>
+            <a:lvl5pPr>
+              <a:defRPr sz="1875" b="1">
+                <a:solidFill>
+                  <a:srgbClr val="0B2233"/>
+                </a:solidFill>
+              </a:defRPr>
+            </a:lvl5pPr>
+            <a:lvl6pPr>
+              <a:defRPr sz="1875" b="1">
+                <a:solidFill>
+                  <a:srgbClr val="0B2233"/>
+                </a:solidFill>
+              </a:defRPr>
+            </a:lvl6pPr>
+            <a:lvl7pPr>
+              <a:defRPr sz="1875" b="1">
+                <a:solidFill>
+                  <a:srgbClr val="0B2233"/>
+                </a:solidFill>
+              </a:defRPr>
+            </a:lvl7pPr>
+            <a:lvl8pPr>
+              <a:defRPr sz="1875" b="1">
+                <a:solidFill>
+                  <a:srgbClr val="0B2233"/>
+                </a:solidFill>
+              </a:defRPr>
+            </a:lvl8pPr>
+            <a:lvl9pPr>
+              <a:defRPr sz="1875" b="1">
+                <a:solidFill>
+                  <a:srgbClr val="0B2233"/>
+                </a:solidFill>
+              </a:defRPr>
+            </a:lvl9pPr>
+          </a:lstStyle>
+          <a:p>
+            <a:pPr>
+              <a:defRPr sz="1875" b="1">
+                <a:solidFill>
+                  <a:srgbClr val="0B2233"/>
+                </a:solidFill>
+              </a:defRPr>
+            </a:pPr>
+            <a:r>
+              <a:rPr sz="1875" b="1">
+                <a:solidFill>
+                  <a:srgbClr val="0B2233"/>
+                </a:solidFill>
+              </a:rPr>
+              <a:t>secom_labels.data 原始前三行</a:t>
+            </a:r>
+          </a:p>
+        </p:txBody>
+      </p:sp>
+      <p:sp>
+        <p:nvSpPr>
+          <p:cNvPr id="4" name="矩形 3">
+            <a:extLst>
+              <a:ext uri="{FF2B5EF4-FFF2-40B4-BE49-F238E27FC236}">
+                <a16:creationId xmlns:a16="http://schemas.microsoft.com/office/drawing/2014/main" id="{F6342535-B606-4B94-81AB-933814441A16}"/>
+              </a:ext>
+            </a:extLst>
+          </p:cNvPr>
+          <p:cNvSpPr>
+            <a:spLocks noGrp="1"/>
+          </p:cNvSpPr>
+          <p:nvPr/>
+        </p:nvSpPr>
+        <p:spPr>
+          <a:xfrm>
+            <a:off x="571500" y="2476500"/>
+            <a:ext cx="5810250" cy="1428750"/>
+          </a:xfrm>
+          <a:prstGeom prst="rect">
+            <a:avLst/>
+          </a:prstGeom>
+          <a:noFill/>
+          <a:ln w="0">
+            <a:noFill/>
+          </a:ln>
+        </p:spPr>
+        <p:txBody>
+          <a:bodyPr/>
+          <a:lstStyle>
+            <a:defPPr>
+              <a:defRPr sz="2025" b="0">
+                <a:solidFill>
+                  <a:srgbClr val="0B2233"/>
+                </a:solidFill>
+              </a:defRPr>
+            </a:defPPr>
+            <a:lvl1pPr>
+              <a:defRPr sz="2025" b="0">
+                <a:solidFill>
+                  <a:srgbClr val="0B2233"/>
+                </a:solidFill>
+              </a:defRPr>
+            </a:lvl1pPr>
+            <a:lvl2pPr>
+              <a:defRPr sz="2025" b="0">
+                <a:solidFill>
+                  <a:srgbClr val="0B2233"/>
+                </a:solidFill>
+              </a:defRPr>
+            </a:lvl2pPr>
+            <a:lvl3pPr>
+              <a:defRPr sz="2025" b="0">
+                <a:solidFill>
+                  <a:srgbClr val="0B2233"/>
+                </a:solidFill>
+              </a:defRPr>
+            </a:lvl3pPr>
+            <a:lvl4pPr>
+              <a:defRPr sz="2025" b="0">
+                <a:solidFill>
+                  <a:srgbClr val="0B2233"/>
+                </a:solidFill>
+              </a:defRPr>
+            </a:lvl4pPr>
+            <a:lvl5pPr>
+              <a:defRPr sz="2025" b="0">
+                <a:solidFill>
+                  <a:srgbClr val="0B2233"/>
+                </a:solidFill>
+              </a:defRPr>
+            </a:lvl5pPr>
+            <a:lvl6pPr>
+              <a:defRPr sz="2025" b="0">
+                <a:solidFill>
+                  <a:srgbClr val="0B2233"/>
+                </a:solidFill>
+              </a:defRPr>
+            </a:lvl6pPr>
+            <a:lvl7pPr>
+              <a:defRPr sz="2025" b="0">
+                <a:solidFill>
+                  <a:srgbClr val="0B2233"/>
+                </a:solidFill>
+              </a:defRPr>
+            </a:lvl7pPr>
+            <a:lvl8pPr>
+              <a:defRPr sz="2025" b="0">
+                <a:solidFill>
+                  <a:srgbClr val="0B2233"/>
+                </a:solidFill>
+              </a:defRPr>
+            </a:lvl8pPr>
+            <a:lvl9pPr>
+              <a:defRPr sz="2025" b="0">
+                <a:solidFill>
+                  <a:srgbClr val="0B2233"/>
+                </a:solidFill>
+              </a:defRPr>
+            </a:lvl9pPr>
+          </a:lstStyle>
+          <a:p>
+            <a:pPr>
+              <a:defRPr sz="2025" b="0">
+                <a:solidFill>
+                  <a:srgbClr val="0B2233"/>
+                </a:solidFill>
+              </a:defRPr>
+            </a:pPr>
+            <a:r>
+              <a:rPr sz="2025" b="0">
+                <a:solidFill>
+                  <a:srgbClr val="0B2233"/>
+                </a:solidFill>
+              </a:rPr>
+              <a:t>-1 "19/07/2008 11:55:00"</a:t>
+            </a:r>
+          </a:p>
+          <a:p>
+            <a:pPr>
+              <a:defRPr sz="2025" b="0">
+                <a:solidFill>
+                  <a:srgbClr val="0B2233"/>
+                </a:solidFill>
+              </a:defRPr>
+            </a:pPr>
+            <a:r>
+              <a:rPr sz="2025" b="0">
+                <a:solidFill>
+                  <a:srgbClr val="0B2233"/>
+                </a:solidFill>
+              </a:rPr>
+              <a:t>-1 "19/07/2008 12:32:00"</a:t>
+            </a:r>
+          </a:p>
+          <a:p>
+            <a:pPr>
+              <a:defRPr sz="2025" b="0">
+                <a:solidFill>
+                  <a:srgbClr val="0B2233"/>
+                </a:solidFill>
+              </a:defRPr>
+            </a:pPr>
+            <a:r>
+              <a:rPr sz="2025" b="0">
+                <a:solidFill>
+                  <a:srgbClr val="0B2233"/>
+                </a:solidFill>
+              </a:rPr>
+              <a:t> 1 "19/07/2008 13:17:00"</a:t>
+            </a:r>
+          </a:p>
+        </p:txBody>
+      </p:sp>
+      <p:sp>
+        <p:nvSpPr>
+          <p:cNvPr id="5" name="矩形 4">
+            <a:extLst>
+              <a:ext uri="{FF2B5EF4-FFF2-40B4-BE49-F238E27FC236}">
+                <a16:creationId xmlns:a16="http://schemas.microsoft.com/office/drawing/2014/main" id="{B398BBB4-232C-4C11-ADFE-9A2C015FEE0A}"/>
+              </a:ext>
+            </a:extLst>
+          </p:cNvPr>
+          <p:cNvSpPr>
+            <a:spLocks noGrp="1"/>
+          </p:cNvSpPr>
+          <p:nvPr/>
+        </p:nvSpPr>
+        <p:spPr>
+          <a:xfrm>
+            <a:off x="571500" y="4095750"/>
+            <a:ext cx="5619750" cy="857250"/>
+          </a:xfrm>
+          <a:prstGeom prst="rect">
+            <a:avLst/>
+          </a:prstGeom>
+          <a:noFill/>
+          <a:ln w="0">
+            <a:noFill/>
+          </a:ln>
+        </p:spPr>
+        <p:txBody>
+          <a:bodyPr/>
+          <a:lstStyle>
+            <a:defPPr>
+              <a:defRPr sz="1875" b="0">
+                <a:solidFill>
+                  <a:srgbClr val="168C89"/>
+                </a:solidFill>
+              </a:defRPr>
+            </a:defPPr>
+            <a:lvl1pPr>
+              <a:defRPr sz="1875" b="0">
+                <a:solidFill>
+                  <a:srgbClr val="168C89"/>
+                </a:solidFill>
+              </a:defRPr>
+            </a:lvl1pPr>
+            <a:lvl2pPr>
+              <a:defRPr sz="1875" b="0">
+                <a:solidFill>
+                  <a:srgbClr val="168C89"/>
+                </a:solidFill>
+              </a:defRPr>
+            </a:lvl2pPr>
+            <a:lvl3pPr>
+              <a:defRPr sz="1875" b="0">
+                <a:solidFill>
+                  <a:srgbClr val="168C89"/>
+                </a:solidFill>
+              </a:defRPr>
+            </a:lvl3pPr>
+            <a:lvl4pPr>
+              <a:defRPr sz="1875" b="0">
+                <a:solidFill>
+                  <a:srgbClr val="168C89"/>
+                </a:solidFill>
+              </a:defRPr>
+            </a:lvl4pPr>
+            <a:lvl5pPr>
+              <a:defRPr sz="1875" b="0">
+                <a:solidFill>
+                  <a:srgbClr val="168C89"/>
+                </a:solidFill>
+              </a:defRPr>
+            </a:lvl5pPr>
+            <a:lvl6pPr>
+              <a:defRPr sz="1875" b="0">
+                <a:solidFill>
+                  <a:srgbClr val="168C89"/>
+                </a:solidFill>
+              </a:defRPr>
+            </a:lvl6pPr>
+            <a:lvl7pPr>
+              <a:defRPr sz="1875" b="0">
+                <a:solidFill>
+                  <a:srgbClr val="168C89"/>
+                </a:solidFill>
+              </a:defRPr>
+            </a:lvl7pPr>
+            <a:lvl8pPr>
+              <a:defRPr sz="1875" b="0">
+                <a:solidFill>
+                  <a:srgbClr val="168C89"/>
+                </a:solidFill>
+              </a:defRPr>
+            </a:lvl8pPr>
+            <a:lvl9pPr>
+              <a:defRPr sz="1875" b="0">
+                <a:solidFill>
+                  <a:srgbClr val="168C89"/>
+                </a:solidFill>
+              </a:defRPr>
+            </a:lvl9pPr>
+          </a:lstStyle>
+          <a:p>
+            <a:pPr>
+              <a:defRPr sz="1875" b="0">
+                <a:solidFill>
+                  <a:srgbClr val="168C89"/>
+                </a:solidFill>
+              </a:defRPr>
+            </a:pPr>
+            <a:r>
+              <a:rPr sz="1875" b="0">
+                <a:solidFill>
+                  <a:srgbClr val="168C89"/>
+                </a:solidFill>
+              </a:rPr>
+              <a:t>−1 表示通过，1 表示失败</a:t>
+            </a:r>
+          </a:p>
+          <a:p>
+            <a:pPr>
+              <a:defRPr sz="1875" b="0">
+                <a:solidFill>
+                  <a:srgbClr val="168C89"/>
+                </a:solidFill>
+              </a:defRPr>
+            </a:pPr>
+            <a:r>
+              <a:rPr sz="1875" b="0">
+                <a:solidFill>
+                  <a:srgbClr val="168C89"/>
+                </a:solidFill>
+              </a:rPr>
+              <a:t>引号内是原始检测日期和时间</a:t>
+            </a:r>
+          </a:p>
+        </p:txBody>
+      </p:sp>
+      <p:sp>
+        <p:nvSpPr>
+          <p:cNvPr id="6" name="矩形 5">
+            <a:extLst>
+              <a:ext uri="{FF2B5EF4-FFF2-40B4-BE49-F238E27FC236}">
+                <a16:creationId xmlns:a16="http://schemas.microsoft.com/office/drawing/2014/main" id="{C8D9FF51-2AAD-491A-8E22-67DB29953DC4}"/>
+              </a:ext>
+            </a:extLst>
+          </p:cNvPr>
+          <p:cNvSpPr>
+            <a:spLocks noGrp="1"/>
+          </p:cNvSpPr>
+          <p:nvPr/>
+        </p:nvSpPr>
+        <p:spPr>
+          <a:xfrm>
+            <a:off x="6858000" y="1857375"/>
+            <a:ext cx="4762500" cy="428625"/>
+          </a:xfrm>
+          <a:prstGeom prst="rect">
+            <a:avLst/>
+          </a:prstGeom>
+          <a:noFill/>
+          <a:ln w="0">
+            <a:noFill/>
+          </a:ln>
+        </p:spPr>
+        <p:txBody>
+          <a:bodyPr/>
+          <a:lstStyle>
+            <a:defPPr>
+              <a:defRPr sz="1875" b="1">
+                <a:solidFill>
+                  <a:srgbClr val="0B2233"/>
+                </a:solidFill>
+              </a:defRPr>
+            </a:defPPr>
+            <a:lvl1pPr>
+              <a:defRPr sz="1875" b="1">
+                <a:solidFill>
+                  <a:srgbClr val="0B2233"/>
+                </a:solidFill>
+              </a:defRPr>
+            </a:lvl1pPr>
+            <a:lvl2pPr>
+              <a:defRPr sz="1875" b="1">
+                <a:solidFill>
+                  <a:srgbClr val="0B2233"/>
+                </a:solidFill>
+              </a:defRPr>
+            </a:lvl2pPr>
+            <a:lvl3pPr>
+              <a:defRPr sz="1875" b="1">
+                <a:solidFill>
+                  <a:srgbClr val="0B2233"/>
+                </a:solidFill>
+              </a:defRPr>
+            </a:lvl3pPr>
+            <a:lvl4pPr>
+              <a:defRPr sz="1875" b="1">
+                <a:solidFill>
+                  <a:srgbClr val="0B2233"/>
+                </a:solidFill>
+              </a:defRPr>
+            </a:lvl4pPr>
+            <a:lvl5pPr>
+              <a:defRPr sz="1875" b="1">
+                <a:solidFill>
+                  <a:srgbClr val="0B2233"/>
+                </a:solidFill>
+              </a:defRPr>
+            </a:lvl5pPr>
+            <a:lvl6pPr>
+              <a:defRPr sz="1875" b="1">
+                <a:solidFill>
+                  <a:srgbClr val="0B2233"/>
+                </a:solidFill>
+              </a:defRPr>
+            </a:lvl6pPr>
+            <a:lvl7pPr>
+              <a:defRPr sz="1875" b="1">
+                <a:solidFill>
+                  <a:srgbClr val="0B2233"/>
+                </a:solidFill>
+              </a:defRPr>
+            </a:lvl7pPr>
+            <a:lvl8pPr>
+              <a:defRPr sz="1875" b="1">
+                <a:solidFill>
+                  <a:srgbClr val="0B2233"/>
+                </a:solidFill>
+              </a:defRPr>
+            </a:lvl8pPr>
+            <a:lvl9pPr>
+              <a:defRPr sz="1875" b="1">
+                <a:solidFill>
+                  <a:srgbClr val="0B2233"/>
+                </a:solidFill>
+              </a:defRPr>
+            </a:lvl9pPr>
+          </a:lstStyle>
+          <a:p>
+            <a:pPr>
+              <a:defRPr sz="1875" b="1">
+                <a:solidFill>
+                  <a:srgbClr val="0B2233"/>
+                </a:solidFill>
+              </a:defRPr>
+            </a:pPr>
+            <a:r>
+              <a:rPr sz="1875" b="1">
+                <a:solidFill>
+                  <a:srgbClr val="0B2233"/>
+                </a:solidFill>
+              </a:rPr>
+              <a:t>导入和导出过程</a:t>
+            </a:r>
+          </a:p>
+        </p:txBody>
+      </p:sp>
+      <p:sp>
+        <p:nvSpPr>
+          <p:cNvPr id="7" name="矩形 6">
+            <a:extLst>
+              <a:ext uri="{FF2B5EF4-FFF2-40B4-BE49-F238E27FC236}">
+                <a16:creationId xmlns:a16="http://schemas.microsoft.com/office/drawing/2014/main" id="{0299DDE9-07C0-4ED1-AADF-CB08CB3937AB}"/>
+              </a:ext>
+            </a:extLst>
+          </p:cNvPr>
+          <p:cNvSpPr>
+            <a:spLocks noGrp="1"/>
+          </p:cNvSpPr>
+          <p:nvPr/>
+        </p:nvSpPr>
+        <p:spPr>
+          <a:xfrm>
+            <a:off x="6858000" y="2476500"/>
+            <a:ext cx="4762500" cy="2190750"/>
+          </a:xfrm>
+          <a:prstGeom prst="rect">
+            <a:avLst/>
+          </a:prstGeom>
+          <a:noFill/>
+          <a:ln w="0">
+            <a:noFill/>
+          </a:ln>
+        </p:spPr>
+        <p:txBody>
+          <a:bodyPr/>
+          <a:lstStyle>
+            <a:defPPr>
+              <a:defRPr sz="1875" b="0">
+                <a:solidFill>
+                  <a:srgbClr val="0B2233"/>
+                </a:solidFill>
+              </a:defRPr>
+            </a:defPPr>
+            <a:lvl1pPr>
+              <a:defRPr sz="1875" b="0">
+                <a:solidFill>
+                  <a:srgbClr val="0B2233"/>
+                </a:solidFill>
+              </a:defRPr>
+            </a:lvl1pPr>
+            <a:lvl2pPr>
+              <a:defRPr sz="1875" b="0">
+                <a:solidFill>
+                  <a:srgbClr val="0B2233"/>
+                </a:solidFill>
+              </a:defRPr>
+            </a:lvl2pPr>
+            <a:lvl3pPr>
+              <a:defRPr sz="1875" b="0">
+                <a:solidFill>
+                  <a:srgbClr val="0B2233"/>
+                </a:solidFill>
+              </a:defRPr>
+            </a:lvl3pPr>
+            <a:lvl4pPr>
+              <a:defRPr sz="1875" b="0">
+                <a:solidFill>
+                  <a:srgbClr val="0B2233"/>
+                </a:solidFill>
+              </a:defRPr>
+            </a:lvl4pPr>
+            <a:lvl5pPr>
+              <a:defRPr sz="1875" b="0">
+                <a:solidFill>
+                  <a:srgbClr val="0B2233"/>
+                </a:solidFill>
+              </a:defRPr>
+            </a:lvl5pPr>
+            <a:lvl6pPr>
+              <a:defRPr sz="1875" b="0">
+                <a:solidFill>
+                  <a:srgbClr val="0B2233"/>
+                </a:solidFill>
+              </a:defRPr>
+            </a:lvl6pPr>
+            <a:lvl7pPr>
+              <a:defRPr sz="1875" b="0">
+                <a:solidFill>
+                  <a:srgbClr val="0B2233"/>
+                </a:solidFill>
+              </a:defRPr>
+            </a:lvl7pPr>
+            <a:lvl8pPr>
+              <a:defRPr sz="1875" b="0">
+                <a:solidFill>
+                  <a:srgbClr val="0B2233"/>
+                </a:solidFill>
+              </a:defRPr>
+            </a:lvl8pPr>
+            <a:lvl9pPr>
+              <a:defRPr sz="1875" b="0">
+                <a:solidFill>
+                  <a:srgbClr val="0B2233"/>
+                </a:solidFill>
+              </a:defRPr>
+            </a:lvl9pPr>
+          </a:lstStyle>
+          <a:p>
+            <a:pPr>
+              <a:defRPr sz="1875" b="0">
+                <a:solidFill>
+                  <a:srgbClr val="0B2233"/>
+                </a:solidFill>
+              </a:defRPr>
+            </a:pPr>
+            <a:r>
+              <a:rPr sz="1875" b="0">
+                <a:solidFill>
+                  <a:srgbClr val="0B2233"/>
+                </a:solidFill>
+              </a:rPr>
+              <a:t>01 读取原始标签文件</a:t>
+            </a:r>
+          </a:p>
+          <a:p>
+            <a:pPr>
+              <a:defRPr sz="1875" b="0">
+                <a:solidFill>
+                  <a:srgbClr val="0B2233"/>
+                </a:solidFill>
+              </a:defRPr>
+            </a:pPr>
+            <a:r>
+              <a:rPr sz="1875" b="0">
+                <a:solidFill>
+                  <a:srgbClr val="0B2233"/>
+                </a:solidFill>
+              </a:rPr>
+              <a:t>02 按时间排序，每20条组成一组</a:t>
+            </a:r>
+          </a:p>
+          <a:p>
+            <a:pPr>
+              <a:defRPr sz="1875" b="0">
+                <a:solidFill>
+                  <a:srgbClr val="0B2233"/>
+                </a:solidFill>
+              </a:defRPr>
+            </a:pPr>
+            <a:r>
+              <a:rPr sz="1875" b="0">
+                <a:solidFill>
+                  <a:srgbClr val="0B2233"/>
+                </a:solidFill>
+              </a:rPr>
+              <a:t>03 用前62组确定ARIMA模型</a:t>
+            </a:r>
+          </a:p>
+          <a:p>
+            <a:pPr>
+              <a:defRPr sz="1875" b="0">
+                <a:solidFill>
+                  <a:srgbClr val="0B2233"/>
+                </a:solidFill>
+              </a:defRPr>
+            </a:pPr>
+            <a:r>
+              <a:rPr sz="1875" b="0">
+                <a:solidFill>
+                  <a:srgbClr val="0B2233"/>
+                </a:solidFill>
+              </a:rPr>
+              <a:t>04 导出后16组预测和误差结果</a:t>
+            </a:r>
+          </a:p>
+        </p:txBody>
+      </p:sp>
+      <p:sp>
+        <p:nvSpPr>
+          <p:cNvPr id="8" name="矩形 7">
+            <a:extLst>
+              <a:ext uri="{FF2B5EF4-FFF2-40B4-BE49-F238E27FC236}">
+                <a16:creationId xmlns:a16="http://schemas.microsoft.com/office/drawing/2014/main" id="{BAD99B54-D314-41C6-A5EA-E47F7E2B1E68}"/>
+              </a:ext>
+            </a:extLst>
+          </p:cNvPr>
+          <p:cNvSpPr>
+            <a:spLocks noGrp="1"/>
+          </p:cNvSpPr>
+          <p:nvPr/>
+        </p:nvSpPr>
+        <p:spPr>
+          <a:xfrm>
+            <a:off x="6858000" y="5000625"/>
+            <a:ext cx="4762500" cy="666750"/>
+          </a:xfrm>
+          <a:prstGeom prst="rect">
+            <a:avLst/>
+          </a:prstGeom>
+          <a:noFill/>
+          <a:ln w="0">
+            <a:noFill/>
+          </a:ln>
+        </p:spPr>
+        <p:txBody>
+          <a:bodyPr/>
+          <a:lstStyle>
+            <a:defPPr>
+              <a:defRPr sz="1575" b="0">
+                <a:solidFill>
+                  <a:srgbClr val="5F7380"/>
+                </a:solidFill>
+              </a:defRPr>
+            </a:defPPr>
+            <a:lvl1pPr>
+              <a:defRPr sz="1575" b="0">
+                <a:solidFill>
+                  <a:srgbClr val="5F7380"/>
+                </a:solidFill>
+              </a:defRPr>
+            </a:lvl1pPr>
+            <a:lvl2pPr>
+              <a:defRPr sz="1575" b="0">
+                <a:solidFill>
+                  <a:srgbClr val="5F7380"/>
+                </a:solidFill>
+              </a:defRPr>
+            </a:lvl2pPr>
+            <a:lvl3pPr>
+              <a:defRPr sz="1575" b="0">
+                <a:solidFill>
+                  <a:srgbClr val="5F7380"/>
+                </a:solidFill>
+              </a:defRPr>
+            </a:lvl3pPr>
+            <a:lvl4pPr>
+              <a:defRPr sz="1575" b="0">
+                <a:solidFill>
+                  <a:srgbClr val="5F7380"/>
+                </a:solidFill>
+              </a:defRPr>
+            </a:lvl4pPr>
+            <a:lvl5pPr>
+              <a:defRPr sz="1575" b="0">
+                <a:solidFill>
+                  <a:srgbClr val="5F7380"/>
+                </a:solidFill>
+              </a:defRPr>
+            </a:lvl5pPr>
+            <a:lvl6pPr>
+              <a:defRPr sz="1575" b="0">
+                <a:solidFill>
+                  <a:srgbClr val="5F7380"/>
+                </a:solidFill>
+              </a:defRPr>
+            </a:lvl6pPr>
+            <a:lvl7pPr>
+              <a:defRPr sz="1575" b="0">
+                <a:solidFill>
+                  <a:srgbClr val="5F7380"/>
+                </a:solidFill>
+              </a:defRPr>
+            </a:lvl7pPr>
+            <a:lvl8pPr>
+              <a:defRPr sz="1575" b="0">
+                <a:solidFill>
+                  <a:srgbClr val="5F7380"/>
+                </a:solidFill>
+              </a:defRPr>
+            </a:lvl8pPr>
+            <a:lvl9pPr>
+              <a:defRPr sz="1575" b="0">
+                <a:solidFill>
+                  <a:srgbClr val="5F7380"/>
+                </a:solidFill>
+              </a:defRPr>
+            </a:lvl9pPr>
+          </a:lstStyle>
+          <a:p>
+            <a:pPr>
+              <a:defRPr sz="1575" b="0">
+                <a:solidFill>
+                  <a:srgbClr val="5F7380"/>
+                </a:solidFill>
+              </a:defRPr>
+            </a:pPr>
+            <a:r>
+              <a:rPr sz="1575" b="0">
+                <a:solidFill>
+                  <a:srgbClr val="5F7380"/>
+                </a:solidFill>
+              </a:rPr>
+              <a:t>使用软件：Python 与 statsmodels</a:t>
+            </a:r>
+          </a:p>
+          <a:p>
+            <a:pPr>
+              <a:defRPr sz="1575" b="0">
+                <a:solidFill>
+                  <a:srgbClr val="5F7380"/>
+                </a:solidFill>
+              </a:defRPr>
+            </a:pPr>
+            <a:r>
+              <a:rPr sz="1575" b="0">
+                <a:solidFill>
+                  <a:srgbClr val="5F7380"/>
+                </a:solidFill>
+              </a:rPr>
+              <a:t>实际入口：run_analysis.py</a:t>
+            </a:r>
+          </a:p>
+        </p:txBody>
+      </p:sp>
+      <p:sp>
+        <p:nvSpPr>
+          <p:cNvPr id="9" name="矩形 8">
+            <a:extLst>
+              <a:ext uri="{FF2B5EF4-FFF2-40B4-BE49-F238E27FC236}">
+                <a16:creationId xmlns:a16="http://schemas.microsoft.com/office/drawing/2014/main" id="{CEAEE116-5AC8-432F-9EB6-C4EEE8C092D6}"/>
+              </a:ext>
+            </a:extLst>
+          </p:cNvPr>
+          <p:cNvSpPr>
+            <a:spLocks noGrp="1"/>
+          </p:cNvSpPr>
+          <p:nvPr/>
+        </p:nvSpPr>
+        <p:spPr>
+          <a:xfrm>
+            <a:off x="571500" y="6000750"/>
+            <a:ext cx="11049000" cy="476250"/>
+          </a:xfrm>
+          <a:prstGeom prst="rect">
+            <a:avLst/>
+          </a:prstGeom>
+          <a:noFill/>
+          <a:ln w="0">
+            <a:noFill/>
+          </a:ln>
+        </p:spPr>
+        <p:txBody>
+          <a:bodyPr/>
+          <a:lstStyle>
+            <a:defPPr>
+              <a:defRPr sz="1275" b="0">
+                <a:solidFill>
+                  <a:srgbClr val="5F7380"/>
+                </a:solidFill>
+              </a:defRPr>
+            </a:defPPr>
+            <a:lvl1pPr>
+              <a:defRPr sz="1275" b="0">
+                <a:solidFill>
+                  <a:srgbClr val="5F7380"/>
+                </a:solidFill>
+              </a:defRPr>
+            </a:lvl1pPr>
+            <a:lvl2pPr>
+              <a:defRPr sz="1275" b="0">
+                <a:solidFill>
+                  <a:srgbClr val="5F7380"/>
+                </a:solidFill>
+              </a:defRPr>
+            </a:lvl2pPr>
+            <a:lvl3pPr>
+              <a:defRPr sz="1275" b="0">
+                <a:solidFill>
+                  <a:srgbClr val="5F7380"/>
+                </a:solidFill>
+              </a:defRPr>
+            </a:lvl3pPr>
+            <a:lvl4pPr>
+              <a:defRPr sz="1275" b="0">
+                <a:solidFill>
+                  <a:srgbClr val="5F7380"/>
+                </a:solidFill>
+              </a:defRPr>
+            </a:lvl4pPr>
+            <a:lvl5pPr>
+              <a:defRPr sz="1275" b="0">
+                <a:solidFill>
+                  <a:srgbClr val="5F7380"/>
+                </a:solidFill>
+              </a:defRPr>
+            </a:lvl5pPr>
+            <a:lvl6pPr>
+              <a:defRPr sz="1275" b="0">
+                <a:solidFill>
+                  <a:srgbClr val="5F7380"/>
+                </a:solidFill>
+              </a:defRPr>
+            </a:lvl6pPr>
+            <a:lvl7pPr>
+              <a:defRPr sz="1275" b="0">
+                <a:solidFill>
+                  <a:srgbClr val="5F7380"/>
+                </a:solidFill>
+              </a:defRPr>
+            </a:lvl7pPr>
+            <a:lvl8pPr>
+              <a:defRPr sz="1275" b="0">
+                <a:solidFill>
+                  <a:srgbClr val="5F7380"/>
+                </a:solidFill>
+              </a:defRPr>
+            </a:lvl8pPr>
+            <a:lvl9pPr>
+              <a:defRPr sz="1275" b="0">
+                <a:solidFill>
+                  <a:srgbClr val="5F7380"/>
+                </a:solidFill>
+              </a:defRPr>
+            </a:lvl9pPr>
+          </a:lstStyle>
+          <a:p>
+            <a:pPr>
+              <a:defRPr sz="1275" b="0">
+                <a:solidFill>
+                  <a:srgbClr val="5F7380"/>
+                </a:solidFill>
+              </a:defRPr>
+            </a:pPr>
+            <a:r>
+              <a:rPr sz="1275" b="0">
+                <a:solidFill>
+                  <a:srgbClr val="5F7380"/>
+                </a:solidFill>
+              </a:rPr>
+              <a:t>来源：UCI SECOM，DOI 10.24432/C54305。原始传感器文件随包提供，本次分析未使用。</a:t>
+            </a:r>
+          </a:p>
+        </p:txBody>
+      </p:sp>
+    </p:spTree>
+    <p:extLst>
+      <p:ext uri="{BB962C8B-B14F-4D97-AF65-F5344CB8AC3E}">
+        <p14:creationId xmlns:p14="http://schemas.microsoft.com/office/powerpoint/2010/main" val="3669472417"/>
+      </p:ext>
+    </p:extLst>
+  </p:cSld>
+  <p:clrMapOvr>
+    <a:masterClrMapping/>
+  </p:clrMapOvr>
+</p:sld>
+</file>
+
+<file path=ppt/slides/slide5.xml><?xml version="1.0" encoding="utf-8"?>
 <p:sld xmlns:a="http://schemas.openxmlformats.org/drawingml/2006/main" xmlns:r="http://schemas.openxmlformats.org/officeDocument/2006/relationships" xmlns:p="http://schemas.openxmlformats.org/presentationml/2006/main">
   <p:cSld>
     <p:spTree>
@@ -7881,9 +11350,18 @@
   <p:clrMapOvr>
     <a:masterClrMapping/>
   </p:clrMapOvr>
-  <p:transition xmlns:p14="http://schemas.microsoft.com/office/powerpoint/2010/main" p14:dur="400">
-    <p:fade/>
-  </p:transition>
+  <mc:AlternateContent xmlns:mc="http://schemas.openxmlformats.org/markup-compatibility/2006">
+    <mc:Choice xmlns:p14="http://schemas.microsoft.com/office/powerpoint/2010/main" Requires="p14">
+      <p:transition p14:dur="400">
+        <p:fade/>
+      </p:transition>
+    </mc:Choice>
+    <mc:Fallback>
+      <p:transition>
+        <p:fade/>
+      </p:transition>
+    </mc:Fallback>
+  </mc:AlternateContent>
   <p:timing>
     <p:tnLst>
       <p:par>
@@ -8111,7 +11589,7 @@
 </p:sld>
 </file>
 
-<file path=ppt/slides/slide5.xml><?xml version="1.0" encoding="utf-8"?>
+<file path=ppt/slides/slide6.xml><?xml version="1.0" encoding="utf-8"?>
 <p:sld xmlns:a="http://schemas.openxmlformats.org/drawingml/2006/main" xmlns:r="http://schemas.openxmlformats.org/officeDocument/2006/relationships" xmlns:p="http://schemas.openxmlformats.org/presentationml/2006/main">
   <p:cSld>
     <p:spTree>
@@ -9443,7 +12921,7 @@
         <p:spPr>
           <a:xfrm>
             <a:off x="11226165" y="6363652"/>
-            <a:ext cx="495729" cy="213360"/>
+            <a:ext cx="411972" cy="161583"/>
           </a:xfrm>
           <a:prstGeom prst="rect">
             <a:avLst/>
@@ -9461,7 +12939,7 @@
           <a:p>
             <a:pPr algn="l"/>
             <a:r>
-              <a:rPr lang="zh-CN" sz="1050" dirty="0">
+              <a:rPr lang="en-US" altLang="zh-CN" sz="1050">
                 <a:solidFill>
                   <a:srgbClr val="607484"/>
                 </a:solidFill>
@@ -9469,8 +12947,16 @@
                 <a:ea typeface="Microsoft YaHei"/>
                 <a:cs typeface="Arial"/>
               </a:rPr>
-              <a:t>05 / 09</a:t>
+              <a:t>06 / 11</a:t>
             </a:r>
+            <a:endParaRPr lang="zh-CN" sz="1050" dirty="0">
+              <a:solidFill>
+                <a:srgbClr val="607484"/>
+              </a:solidFill>
+              <a:latin typeface="Arial"/>
+              <a:ea typeface="Microsoft YaHei"/>
+              <a:cs typeface="Arial"/>
+            </a:endParaRPr>
           </a:p>
         </p:txBody>
       </p:sp>
@@ -9479,9 +12965,18 @@
   <p:clrMapOvr>
     <a:masterClrMapping/>
   </p:clrMapOvr>
-  <p:transition xmlns:p14="http://schemas.microsoft.com/office/powerpoint/2010/main" p14:dur="400">
-    <p:fade/>
-  </p:transition>
+  <mc:AlternateContent xmlns:mc="http://schemas.openxmlformats.org/markup-compatibility/2006">
+    <mc:Choice xmlns:p14="http://schemas.microsoft.com/office/powerpoint/2010/main" Requires="p14">
+      <p:transition p14:dur="400">
+        <p:fade/>
+      </p:transition>
+    </mc:Choice>
+    <mc:Fallback>
+      <p:transition>
+        <p:fade/>
+      </p:transition>
+    </mc:Fallback>
+  </mc:AlternateContent>
   <p:timing>
     <p:tnLst>
       <p:par>
@@ -9709,7 +13204,7 @@
 </p:sld>
 </file>
 
-<file path=ppt/slides/slide6.xml><?xml version="1.0" encoding="utf-8"?>
+<file path=ppt/slides/slide7.xml><?xml version="1.0" encoding="utf-8"?>
 <p:sld xmlns:a="http://schemas.openxmlformats.org/drawingml/2006/main" xmlns:r="http://schemas.openxmlformats.org/officeDocument/2006/relationships" xmlns:p="http://schemas.openxmlformats.org/presentationml/2006/main">
   <p:cSld>
     <p:spTree>
@@ -10676,7 +14171,7 @@
         <p:spPr>
           <a:xfrm>
             <a:off x="11226165" y="6363652"/>
-            <a:ext cx="495729" cy="213360"/>
+            <a:ext cx="411972" cy="161583"/>
           </a:xfrm>
           <a:prstGeom prst="rect">
             <a:avLst/>
@@ -10694,7 +14189,7 @@
           <a:p>
             <a:pPr algn="l"/>
             <a:r>
-              <a:rPr lang="zh-CN" sz="1050" dirty="0">
+              <a:rPr lang="en-US" altLang="zh-CN" sz="1050">
                 <a:solidFill>
                   <a:srgbClr val="607484"/>
                 </a:solidFill>
@@ -10702,8 +14197,16 @@
                 <a:ea typeface="Microsoft YaHei"/>
                 <a:cs typeface="Arial"/>
               </a:rPr>
-              <a:t>06 / 09</a:t>
+              <a:t>07 / 11</a:t>
             </a:r>
+            <a:endParaRPr lang="zh-CN" sz="1050" dirty="0">
+              <a:solidFill>
+                <a:srgbClr val="607484"/>
+              </a:solidFill>
+              <a:latin typeface="Arial"/>
+              <a:ea typeface="Microsoft YaHei"/>
+              <a:cs typeface="Arial"/>
+            </a:endParaRPr>
           </a:p>
         </p:txBody>
       </p:sp>
@@ -10712,9 +14215,18 @@
   <p:clrMapOvr>
     <a:masterClrMapping/>
   </p:clrMapOvr>
-  <p:transition xmlns:p14="http://schemas.microsoft.com/office/powerpoint/2010/main" p14:dur="400">
-    <p:fade/>
-  </p:transition>
+  <mc:AlternateContent xmlns:mc="http://schemas.openxmlformats.org/markup-compatibility/2006">
+    <mc:Choice xmlns:p14="http://schemas.microsoft.com/office/powerpoint/2010/main" Requires="p14">
+      <p:transition p14:dur="400">
+        <p:fade/>
+      </p:transition>
+    </mc:Choice>
+    <mc:Fallback>
+      <p:transition>
+        <p:fade/>
+      </p:transition>
+    </mc:Fallback>
+  </mc:AlternateContent>
   <p:timing>
     <p:tnLst>
       <p:par>
@@ -10987,7 +14499,7 @@
 </p:sld>
 </file>
 
-<file path=ppt/slides/slide7.xml><?xml version="1.0" encoding="utf-8"?>
+<file path=ppt/slides/slide8.xml><?xml version="1.0" encoding="utf-8"?>
 <p:sld xmlns:a="http://schemas.openxmlformats.org/drawingml/2006/main" xmlns:r="http://schemas.openxmlformats.org/officeDocument/2006/relationships" xmlns:p="http://schemas.openxmlformats.org/presentationml/2006/main">
   <p:cSld>
     <p:spTree>
@@ -12395,7 +15907,7 @@
         <p:spPr>
           <a:xfrm>
             <a:off x="11226165" y="6363652"/>
-            <a:ext cx="495729" cy="213360"/>
+            <a:ext cx="411972" cy="161583"/>
           </a:xfrm>
           <a:prstGeom prst="rect">
             <a:avLst/>
@@ -12413,7 +15925,7 @@
           <a:p>
             <a:pPr algn="l"/>
             <a:r>
-              <a:rPr lang="zh-CN" sz="1050" dirty="0">
+              <a:rPr lang="en-US" altLang="zh-CN" sz="1050">
                 <a:solidFill>
                   <a:srgbClr val="607484"/>
                 </a:solidFill>
@@ -12421,8 +15933,16 @@
                 <a:ea typeface="Microsoft YaHei"/>
                 <a:cs typeface="Arial"/>
               </a:rPr>
-              <a:t>07 / 09</a:t>
+              <a:t>08 / 11</a:t>
             </a:r>
+            <a:endParaRPr lang="zh-CN" sz="1050" dirty="0">
+              <a:solidFill>
+                <a:srgbClr val="607484"/>
+              </a:solidFill>
+              <a:latin typeface="Arial"/>
+              <a:ea typeface="Microsoft YaHei"/>
+              <a:cs typeface="Arial"/>
+            </a:endParaRPr>
           </a:p>
         </p:txBody>
       </p:sp>
@@ -12431,9 +15951,18 @@
   <p:clrMapOvr>
     <a:masterClrMapping/>
   </p:clrMapOvr>
-  <p:transition xmlns:p14="http://schemas.microsoft.com/office/powerpoint/2010/main" p14:dur="400">
-    <p:fade/>
-  </p:transition>
+  <mc:AlternateContent xmlns:mc="http://schemas.openxmlformats.org/markup-compatibility/2006">
+    <mc:Choice xmlns:p14="http://schemas.microsoft.com/office/powerpoint/2010/main" Requires="p14">
+      <p:transition p14:dur="400">
+        <p:fade/>
+      </p:transition>
+    </mc:Choice>
+    <mc:Fallback>
+      <p:transition>
+        <p:fade/>
+      </p:transition>
+    </mc:Fallback>
+  </mc:AlternateContent>
   <p:timing>
     <p:tnLst>
       <p:par>
@@ -12706,7 +16235,7 @@
 </p:sld>
 </file>
 
-<file path=ppt/slides/slide8.xml><?xml version="1.0" encoding="utf-8"?>
+<file path=ppt/slides/slide9.xml><?xml version="1.0" encoding="utf-8"?>
 <p:sld xmlns:a="http://schemas.openxmlformats.org/drawingml/2006/main" xmlns:r="http://schemas.openxmlformats.org/officeDocument/2006/relationships" xmlns:p="http://schemas.openxmlformats.org/presentationml/2006/main">
   <p:cSld>
     <p:spTree>
@@ -13887,7 +17416,7 @@
         <p:spPr>
           <a:xfrm>
             <a:off x="11226165" y="6363652"/>
-            <a:ext cx="495729" cy="213360"/>
+            <a:ext cx="411972" cy="161583"/>
           </a:xfrm>
           <a:prstGeom prst="rect">
             <a:avLst/>
@@ -13905,7 +17434,7 @@
           <a:p>
             <a:pPr algn="l"/>
             <a:r>
-              <a:rPr lang="zh-CN" sz="1050" dirty="0">
+              <a:rPr lang="en-US" altLang="zh-CN" sz="1050">
                 <a:solidFill>
                   <a:srgbClr val="607484"/>
                 </a:solidFill>
@@ -13913,8 +17442,16 @@
                 <a:ea typeface="Microsoft YaHei"/>
                 <a:cs typeface="Arial"/>
               </a:rPr>
-              <a:t>08 / 09</a:t>
+              <a:t>09 / 11</a:t>
             </a:r>
+            <a:endParaRPr lang="zh-CN" sz="1050" dirty="0">
+              <a:solidFill>
+                <a:srgbClr val="607484"/>
+              </a:solidFill>
+              <a:latin typeface="Arial"/>
+              <a:ea typeface="Microsoft YaHei"/>
+              <a:cs typeface="Arial"/>
+            </a:endParaRPr>
           </a:p>
         </p:txBody>
       </p:sp>
@@ -13923,9 +17460,18 @@
   <p:clrMapOvr>
     <a:masterClrMapping/>
   </p:clrMapOvr>
-  <p:transition xmlns:p14="http://schemas.microsoft.com/office/powerpoint/2010/main" p14:dur="400">
-    <p:fade/>
-  </p:transition>
+  <mc:AlternateContent xmlns:mc="http://schemas.openxmlformats.org/markup-compatibility/2006">
+    <mc:Choice xmlns:p14="http://schemas.microsoft.com/office/powerpoint/2010/main" Requires="p14">
+      <p:transition p14:dur="400">
+        <p:fade/>
+      </p:transition>
+    </mc:Choice>
+    <mc:Fallback>
+      <p:transition>
+        <p:fade/>
+      </p:transition>
+    </mc:Fallback>
+  </mc:AlternateContent>
   <p:timing>
     <p:tnLst>
       <p:par>
@@ -14148,988 +17694,6 @@
       <p:bldP spid="24" grpId="0"/>
       <p:bldP spid="28" grpId="0"/>
       <p:bldP spid="34" grpId="0"/>
-    </p:bldLst>
-  </p:timing>
-</p:sld>
-</file>
-
-<file path=ppt/slides/slide9.xml><?xml version="1.0" encoding="utf-8"?>
-<p:sld xmlns:a="http://schemas.openxmlformats.org/drawingml/2006/main" xmlns:r="http://schemas.openxmlformats.org/officeDocument/2006/relationships" xmlns:p="http://schemas.openxmlformats.org/presentationml/2006/main">
-  <p:cSld>
-    <p:spTree>
-      <p:nvGrpSpPr>
-        <p:cNvPr id="1" name=""/>
-        <p:cNvGrpSpPr/>
-        <p:nvPr/>
-      </p:nvGrpSpPr>
-      <p:grpSpPr>
-        <a:xfrm>
-          <a:off x="0" y="0"/>
-          <a:ext cx="0" cy="0"/>
-          <a:chOff x="0" y="0"/>
-          <a:chExt cx="0" cy="0"/>
-        </a:xfrm>
-      </p:grpSpPr>
-      <p:sp>
-        <p:nvSpPr>
-          <p:cNvPr id="2" name="Rectangle 2"/>
-          <p:cNvSpPr/>
-          <p:nvPr/>
-        </p:nvSpPr>
-        <p:spPr>
-          <a:xfrm>
-            <a:off x="0" y="0"/>
-            <a:ext cx="12192000" cy="6858000"/>
-          </a:xfrm>
-          <a:prstGeom prst="rect">
-            <a:avLst/>
-          </a:prstGeom>
-          <a:solidFill>
-            <a:srgbClr val="0B2233"/>
-          </a:solidFill>
-          <a:ln>
-            <a:noFill/>
-          </a:ln>
-        </p:spPr>
-      </p:sp>
-      <p:grpSp>
-        <p:nvGrpSpPr>
-          <p:cNvPr id="5" name="Group 5"/>
-          <p:cNvGrpSpPr/>
-          <p:nvPr/>
-        </p:nvGrpSpPr>
-        <p:grpSpPr>
-          <a:xfrm>
-            <a:off x="533400" y="501968"/>
-            <a:ext cx="6376988" cy="1174432"/>
-            <a:chOff x="533400" y="501968"/>
-            <a:chExt cx="6376988" cy="1174432"/>
-          </a:xfrm>
-        </p:grpSpPr>
-        <p:sp>
-          <p:nvSpPr>
-            <p:cNvPr id="3" name="TextBox 3"/>
-            <p:cNvSpPr txBox="1"/>
-            <p:nvPr/>
-          </p:nvSpPr>
-          <p:spPr>
-            <a:xfrm>
-              <a:off x="554355" y="501968"/>
-              <a:ext cx="754380" cy="274320"/>
-            </a:xfrm>
-            <a:prstGeom prst="rect">
-              <a:avLst/>
-            </a:prstGeom>
-            <a:noFill/>
-            <a:ln>
-              <a:noFill/>
-            </a:ln>
-          </p:spPr>
-          <p:txBody>
-            <a:bodyPr wrap="none" lIns="0" tIns="0" rIns="0" bIns="0" anchor="t" anchorCtr="0">
-              <a:spAutoFit/>
-            </a:bodyPr>
-            <a:lstStyle/>
-            <a:p>
-              <a:pPr algn="l"/>
-              <a:r>
-                <a:rPr lang="zh-CN" sz="1350" dirty="0">
-                  <a:solidFill>
-                    <a:srgbClr val="1B9E9A"/>
-                  </a:solidFill>
-                  <a:latin typeface="Arial"/>
-                  <a:ea typeface="Microsoft YaHei"/>
-                  <a:cs typeface="Arial"/>
-                </a:rPr>
-                <a:t>管理启示</a:t>
-              </a:r>
-            </a:p>
-          </p:txBody>
-        </p:sp>
-        <p:sp>
-          <p:nvSpPr>
-            <p:cNvPr id="4" name="TextBox 4"/>
-            <p:cNvSpPr txBox="1"/>
-            <p:nvPr/>
-          </p:nvSpPr>
-          <p:spPr>
-            <a:xfrm>
-              <a:off x="533400" y="1066800"/>
-              <a:ext cx="6376988" cy="609600"/>
-            </a:xfrm>
-            <a:prstGeom prst="rect">
-              <a:avLst/>
-            </a:prstGeom>
-            <a:noFill/>
-            <a:ln>
-              <a:noFill/>
-            </a:ln>
-          </p:spPr>
-          <p:txBody>
-            <a:bodyPr wrap="none" lIns="0" tIns="0" rIns="0" bIns="0" anchor="t" anchorCtr="0">
-              <a:spAutoFit/>
-            </a:bodyPr>
-            <a:lstStyle/>
-            <a:p>
-              <a:pPr algn="l"/>
-              <a:r>
-                <a:rPr lang="zh-CN" sz="3000" b="1" dirty="0">
-                  <a:solidFill>
-                    <a:srgbClr val="FFFFFF"/>
-                  </a:solidFill>
-                  <a:latin typeface="Arial"/>
-                  <a:ea typeface="Microsoft YaHei"/>
-                  <a:cs typeface="Arial"/>
-                </a:rPr>
-                <a:t>用预测辅助检查，用检验选择方法</a:t>
-              </a:r>
-            </a:p>
-          </p:txBody>
-        </p:sp>
-      </p:grpSp>
-      <p:grpSp>
-        <p:nvGrpSpPr>
-          <p:cNvPr id="11" name="Group 11"/>
-          <p:cNvGrpSpPr/>
-          <p:nvPr/>
-        </p:nvGrpSpPr>
-        <p:grpSpPr>
-          <a:xfrm>
-            <a:off x="581025" y="2381250"/>
-            <a:ext cx="4876800" cy="3000375"/>
-            <a:chOff x="581025" y="2381250"/>
-            <a:chExt cx="4876800" cy="3000375"/>
-          </a:xfrm>
-        </p:grpSpPr>
-        <p:sp>
-          <p:nvSpPr>
-            <p:cNvPr id="6" name="TextBox 6"/>
-            <p:cNvSpPr txBox="1"/>
-            <p:nvPr/>
-          </p:nvSpPr>
-          <p:spPr>
-            <a:xfrm>
-              <a:off x="581025" y="2381250"/>
-              <a:ext cx="3956685" cy="609600"/>
-            </a:xfrm>
-            <a:prstGeom prst="rect">
-              <a:avLst/>
-            </a:prstGeom>
-            <a:noFill/>
-            <a:ln>
-              <a:noFill/>
-            </a:ln>
-          </p:spPr>
-          <p:txBody>
-            <a:bodyPr wrap="none" lIns="0" tIns="0" rIns="0" bIns="0" anchor="t" anchorCtr="0">
-              <a:spAutoFit/>
-            </a:bodyPr>
-            <a:lstStyle/>
-            <a:p>
-              <a:pPr algn="l"/>
-              <a:r>
-                <a:rPr lang="zh-CN" sz="3000" dirty="0">
-                  <a:solidFill>
-                    <a:srgbClr val="FFFFFF"/>
-                  </a:solidFill>
-                  <a:latin typeface="Arial"/>
-                  <a:ea typeface="Microsoft YaHei"/>
-                  <a:cs typeface="Arial"/>
-                </a:rPr>
-                <a:t>我用ARIMA预测下一组</a:t>
-              </a:r>
-            </a:p>
-          </p:txBody>
-        </p:sp>
-        <p:sp>
-          <p:nvSpPr>
-            <p:cNvPr id="7" name="TextBox 7"/>
-            <p:cNvSpPr txBox="1"/>
-            <p:nvPr/>
-          </p:nvSpPr>
-          <p:spPr>
-            <a:xfrm>
-              <a:off x="581025" y="2981325"/>
-              <a:ext cx="4076700" cy="609600"/>
-            </a:xfrm>
-            <a:prstGeom prst="rect">
-              <a:avLst/>
-            </a:prstGeom>
-            <a:noFill/>
-            <a:ln>
-              <a:noFill/>
-            </a:ln>
-          </p:spPr>
-          <p:txBody>
-            <a:bodyPr wrap="none" lIns="0" tIns="0" rIns="0" bIns="0" anchor="t" anchorCtr="0">
-              <a:spAutoFit/>
-            </a:bodyPr>
-            <a:lstStyle/>
-            <a:p>
-              <a:pPr algn="l"/>
-              <a:r>
-                <a:rPr lang="zh-CN" sz="3000" dirty="0">
-                  <a:solidFill>
-                    <a:srgbClr val="FFFFFF"/>
-                  </a:solidFill>
-                  <a:latin typeface="Arial"/>
-                  <a:ea typeface="Microsoft YaHei"/>
-                  <a:cs typeface="Arial"/>
-                </a:rPr>
-                <a:t>检测样本的不合格率，</a:t>
-              </a:r>
-            </a:p>
-          </p:txBody>
-        </p:sp>
-        <p:sp>
-          <p:nvSpPr>
-            <p:cNvPr id="8" name="TextBox 8"/>
-            <p:cNvSpPr txBox="1"/>
-            <p:nvPr/>
-          </p:nvSpPr>
-          <p:spPr>
-            <a:xfrm>
-              <a:off x="581025" y="3581400"/>
-              <a:ext cx="4876800" cy="609600"/>
-            </a:xfrm>
-            <a:prstGeom prst="rect">
-              <a:avLst/>
-            </a:prstGeom>
-            <a:noFill/>
-            <a:ln>
-              <a:noFill/>
-            </a:ln>
-          </p:spPr>
-          <p:txBody>
-            <a:bodyPr wrap="none" lIns="0" tIns="0" rIns="0" bIns="0" anchor="t" anchorCtr="0">
-              <a:spAutoFit/>
-            </a:bodyPr>
-            <a:lstStyle/>
-            <a:p>
-              <a:pPr algn="l"/>
-              <a:r>
-                <a:rPr lang="zh-CN" sz="3000" dirty="0">
-                  <a:solidFill>
-                    <a:srgbClr val="1B9E9A"/>
-                  </a:solidFill>
-                  <a:latin typeface="Arial"/>
-                  <a:ea typeface="Microsoft YaHei"/>
-                  <a:cs typeface="Arial"/>
-                </a:rPr>
-                <a:t>再检验它是否优于平均法。</a:t>
-              </a:r>
-            </a:p>
-          </p:txBody>
-        </p:sp>
-        <p:sp>
-          <p:nvSpPr>
-            <p:cNvPr id="9" name="TextBox 9"/>
-            <p:cNvSpPr txBox="1"/>
-            <p:nvPr/>
-          </p:nvSpPr>
-          <p:spPr>
-            <a:xfrm>
-              <a:off x="596265" y="4615815"/>
-              <a:ext cx="3370136" cy="365760"/>
-            </a:xfrm>
-            <a:prstGeom prst="rect">
-              <a:avLst/>
-            </a:prstGeom>
-            <a:noFill/>
-            <a:ln>
-              <a:noFill/>
-            </a:ln>
-          </p:spPr>
-          <p:txBody>
-            <a:bodyPr wrap="none" lIns="0" tIns="0" rIns="0" bIns="0" anchor="t" anchorCtr="0">
-              <a:spAutoFit/>
-            </a:bodyPr>
-            <a:lstStyle/>
-            <a:p>
-              <a:pPr algn="l"/>
-              <a:r>
-                <a:rPr lang="zh-CN" sz="1800" dirty="0">
-                  <a:solidFill>
-                    <a:srgbClr val="D7E2E7"/>
-                  </a:solidFill>
-                  <a:latin typeface="Arial"/>
-                  <a:ea typeface="Microsoft YaHei"/>
-                  <a:cs typeface="Arial"/>
-                </a:rPr>
-                <a:t>本次平均绝对误差改善约10%，</a:t>
-              </a:r>
-            </a:p>
-          </p:txBody>
-        </p:sp>
-        <p:sp>
-          <p:nvSpPr>
-            <p:cNvPr id="10" name="TextBox 10"/>
-            <p:cNvSpPr txBox="1"/>
-            <p:nvPr/>
-          </p:nvSpPr>
-          <p:spPr>
-            <a:xfrm>
-              <a:off x="596265" y="5015865"/>
-              <a:ext cx="3886200" cy="365760"/>
-            </a:xfrm>
-            <a:prstGeom prst="rect">
-              <a:avLst/>
-            </a:prstGeom>
-            <a:noFill/>
-            <a:ln>
-              <a:noFill/>
-            </a:ln>
-          </p:spPr>
-          <p:txBody>
-            <a:bodyPr wrap="none" lIns="0" tIns="0" rIns="0" bIns="0" anchor="t" anchorCtr="0">
-              <a:spAutoFit/>
-            </a:bodyPr>
-            <a:lstStyle/>
-            <a:p>
-              <a:pPr algn="l"/>
-              <a:r>
-                <a:rPr lang="zh-CN" sz="1800" dirty="0">
-                  <a:solidFill>
-                    <a:srgbClr val="D7E2E7"/>
-                  </a:solidFill>
-                  <a:latin typeface="Arial"/>
-                  <a:ea typeface="Microsoft YaHei"/>
-                  <a:cs typeface="Arial"/>
-                </a:rPr>
-                <a:t>较大的波动仍需要实际检测与核实。</a:t>
-              </a:r>
-            </a:p>
-          </p:txBody>
-        </p:sp>
-      </p:grpSp>
-      <p:grpSp>
-        <p:nvGrpSpPr>
-          <p:cNvPr id="21" name="Group 21"/>
-          <p:cNvGrpSpPr/>
-          <p:nvPr/>
-        </p:nvGrpSpPr>
-        <p:grpSpPr>
-          <a:xfrm>
-            <a:off x="7762875" y="2333625"/>
-            <a:ext cx="3762375" cy="3581400"/>
-            <a:chOff x="7762875" y="2333625"/>
-            <a:chExt cx="3762375" cy="3581400"/>
-          </a:xfrm>
-        </p:grpSpPr>
-        <p:sp>
-          <p:nvSpPr>
-            <p:cNvPr id="12" name="Line 12"/>
-            <p:cNvSpPr/>
-            <p:nvPr/>
-          </p:nvSpPr>
-          <p:spPr>
-            <a:xfrm>
-              <a:off x="7762875" y="2333625"/>
-              <a:ext cx="3762375" cy="9525"/>
-            </a:xfrm>
-            <a:custGeom>
-              <a:avLst/>
-              <a:gdLst/>
-              <a:ahLst/>
-              <a:cxnLst/>
-              <a:rect l="l" t="t" r="r" b="b"/>
-              <a:pathLst>
-                <a:path w="3762375" h="9525">
-                  <a:moveTo>
-                    <a:pt x="0" y="0"/>
-                  </a:moveTo>
-                  <a:lnTo>
-                    <a:pt x="3762375" y="0"/>
-                  </a:lnTo>
-                </a:path>
-              </a:pathLst>
-            </a:custGeom>
-            <a:noFill/>
-            <a:ln w="28575">
-              <a:solidFill>
-                <a:srgbClr val="1B9E9A"/>
-              </a:solidFill>
-            </a:ln>
-          </p:spPr>
-        </p:sp>
-        <p:sp>
-          <p:nvSpPr>
-            <p:cNvPr id="13" name="TextBox 13"/>
-            <p:cNvSpPr txBox="1"/>
-            <p:nvPr/>
-          </p:nvSpPr>
-          <p:spPr>
-            <a:xfrm>
-              <a:off x="7924800" y="2595562"/>
-              <a:ext cx="2757488" cy="457200"/>
-            </a:xfrm>
-            <a:prstGeom prst="rect">
-              <a:avLst/>
-            </a:prstGeom>
-            <a:noFill/>
-            <a:ln>
-              <a:noFill/>
-            </a:ln>
-          </p:spPr>
-          <p:txBody>
-            <a:bodyPr wrap="none" lIns="0" tIns="0" rIns="0" bIns="0" anchor="t" anchorCtr="0">
-              <a:spAutoFit/>
-            </a:bodyPr>
-            <a:lstStyle/>
-            <a:p>
-              <a:pPr algn="l"/>
-              <a:r>
-                <a:rPr lang="zh-CN" sz="2250" dirty="0">
-                  <a:solidFill>
-                    <a:srgbClr val="FFFFFF"/>
-                  </a:solidFill>
-                  <a:latin typeface="Arial"/>
-                  <a:ea typeface="Microsoft YaHei"/>
-                  <a:cs typeface="Arial"/>
-                </a:rPr>
-                <a:t>保留简单方法作对照</a:t>
-              </a:r>
-            </a:p>
-          </p:txBody>
-        </p:sp>
-        <p:sp>
-          <p:nvSpPr>
-            <p:cNvPr id="14" name="TextBox 14"/>
-            <p:cNvSpPr txBox="1"/>
-            <p:nvPr/>
-          </p:nvSpPr>
-          <p:spPr>
-            <a:xfrm>
-              <a:off x="7930515" y="3053715"/>
-              <a:ext cx="2926080" cy="365760"/>
-            </a:xfrm>
-            <a:prstGeom prst="rect">
-              <a:avLst/>
-            </a:prstGeom>
-            <a:noFill/>
-            <a:ln>
-              <a:noFill/>
-            </a:ln>
-          </p:spPr>
-          <p:txBody>
-            <a:bodyPr wrap="none" lIns="0" tIns="0" rIns="0" bIns="0" anchor="t" anchorCtr="0">
-              <a:spAutoFit/>
-            </a:bodyPr>
-            <a:lstStyle/>
-            <a:p>
-              <a:pPr algn="l"/>
-              <a:r>
-                <a:rPr lang="zh-CN" sz="1800" dirty="0">
-                  <a:solidFill>
-                    <a:srgbClr val="D7E2E7"/>
-                  </a:solidFill>
-                  <a:latin typeface="Arial"/>
-                  <a:ea typeface="Microsoft YaHei"/>
-                  <a:cs typeface="Arial"/>
-                </a:rPr>
-                <a:t>通过预测效果判断模型价值</a:t>
-              </a:r>
-            </a:p>
-          </p:txBody>
-        </p:sp>
-        <p:sp>
-          <p:nvSpPr>
-            <p:cNvPr id="15" name="Line 15"/>
-            <p:cNvSpPr/>
-            <p:nvPr/>
-          </p:nvSpPr>
-          <p:spPr>
-            <a:xfrm>
-              <a:off x="7762875" y="3619500"/>
-              <a:ext cx="3762375" cy="9525"/>
-            </a:xfrm>
-            <a:custGeom>
-              <a:avLst/>
-              <a:gdLst/>
-              <a:ahLst/>
-              <a:cxnLst/>
-              <a:rect l="l" t="t" r="r" b="b"/>
-              <a:pathLst>
-                <a:path w="3762375" h="9525">
-                  <a:moveTo>
-                    <a:pt x="0" y="0"/>
-                  </a:moveTo>
-                  <a:lnTo>
-                    <a:pt x="3762375" y="0"/>
-                  </a:lnTo>
-                </a:path>
-              </a:pathLst>
-            </a:custGeom>
-            <a:noFill/>
-            <a:ln w="9525">
-              <a:solidFill>
-                <a:srgbClr val="607484"/>
-              </a:solidFill>
-            </a:ln>
-          </p:spPr>
-        </p:sp>
-        <p:sp>
-          <p:nvSpPr>
-            <p:cNvPr id="16" name="TextBox 16"/>
-            <p:cNvSpPr txBox="1"/>
-            <p:nvPr/>
-          </p:nvSpPr>
-          <p:spPr>
-            <a:xfrm>
-              <a:off x="7924800" y="3843338"/>
-              <a:ext cx="3057525" cy="457200"/>
-            </a:xfrm>
-            <a:prstGeom prst="rect">
-              <a:avLst/>
-            </a:prstGeom>
-            <a:noFill/>
-            <a:ln>
-              <a:noFill/>
-            </a:ln>
-          </p:spPr>
-          <p:txBody>
-            <a:bodyPr wrap="none" lIns="0" tIns="0" rIns="0" bIns="0" anchor="t" anchorCtr="0">
-              <a:spAutoFit/>
-            </a:bodyPr>
-            <a:lstStyle/>
-            <a:p>
-              <a:pPr algn="l"/>
-              <a:r>
-                <a:rPr lang="zh-CN" sz="2250" dirty="0">
-                  <a:solidFill>
-                    <a:srgbClr val="FFFFFF"/>
-                  </a:solidFill>
-                  <a:latin typeface="Arial"/>
-                  <a:ea typeface="Microsoft YaHei"/>
-                  <a:cs typeface="Arial"/>
-                </a:rPr>
-                <a:t>结合实际检测安排检查</a:t>
-              </a:r>
-            </a:p>
-          </p:txBody>
-        </p:sp>
-        <p:sp>
-          <p:nvSpPr>
-            <p:cNvPr id="17" name="TextBox 17"/>
-            <p:cNvSpPr txBox="1"/>
-            <p:nvPr/>
-          </p:nvSpPr>
-          <p:spPr>
-            <a:xfrm>
-              <a:off x="7930515" y="4301490"/>
-              <a:ext cx="2446020" cy="365760"/>
-            </a:xfrm>
-            <a:prstGeom prst="rect">
-              <a:avLst/>
-            </a:prstGeom>
-            <a:noFill/>
-            <a:ln>
-              <a:noFill/>
-            </a:ln>
-          </p:spPr>
-          <p:txBody>
-            <a:bodyPr wrap="none" lIns="0" tIns="0" rIns="0" bIns="0" anchor="t" anchorCtr="0">
-              <a:spAutoFit/>
-            </a:bodyPr>
-            <a:lstStyle/>
-            <a:p>
-              <a:pPr algn="l"/>
-              <a:r>
-                <a:rPr lang="zh-CN" sz="1800" dirty="0">
-                  <a:solidFill>
-                    <a:srgbClr val="D7E2E7"/>
-                  </a:solidFill>
-                  <a:latin typeface="Arial"/>
-                  <a:ea typeface="Microsoft YaHei"/>
-                  <a:cs typeface="Arial"/>
-                </a:rPr>
-                <a:t>关注预测与实测的偏离</a:t>
-              </a:r>
-            </a:p>
-          </p:txBody>
-        </p:sp>
-        <p:sp>
-          <p:nvSpPr>
-            <p:cNvPr id="18" name="Line 18"/>
-            <p:cNvSpPr/>
-            <p:nvPr/>
-          </p:nvSpPr>
-          <p:spPr>
-            <a:xfrm>
-              <a:off x="7762875" y="4867275"/>
-              <a:ext cx="3762375" cy="9525"/>
-            </a:xfrm>
-            <a:custGeom>
-              <a:avLst/>
-              <a:gdLst/>
-              <a:ahLst/>
-              <a:cxnLst/>
-              <a:rect l="l" t="t" r="r" b="b"/>
-              <a:pathLst>
-                <a:path w="3762375" h="9525">
-                  <a:moveTo>
-                    <a:pt x="0" y="0"/>
-                  </a:moveTo>
-                  <a:lnTo>
-                    <a:pt x="3762375" y="0"/>
-                  </a:lnTo>
-                </a:path>
-              </a:pathLst>
-            </a:custGeom>
-            <a:noFill/>
-            <a:ln w="9525">
-              <a:solidFill>
-                <a:srgbClr val="607484"/>
-              </a:solidFill>
-            </a:ln>
-          </p:spPr>
-        </p:sp>
-        <p:sp>
-          <p:nvSpPr>
-            <p:cNvPr id="19" name="TextBox 19"/>
-            <p:cNvSpPr txBox="1"/>
-            <p:nvPr/>
-          </p:nvSpPr>
-          <p:spPr>
-            <a:xfrm>
-              <a:off x="7924800" y="5091112"/>
-              <a:ext cx="2757488" cy="457200"/>
-            </a:xfrm>
-            <a:prstGeom prst="rect">
-              <a:avLst/>
-            </a:prstGeom>
-            <a:noFill/>
-            <a:ln>
-              <a:noFill/>
-            </a:ln>
-          </p:spPr>
-          <p:txBody>
-            <a:bodyPr wrap="none" lIns="0" tIns="0" rIns="0" bIns="0" anchor="t" anchorCtr="0">
-              <a:spAutoFit/>
-            </a:bodyPr>
-            <a:lstStyle/>
-            <a:p>
-              <a:pPr algn="l"/>
-              <a:r>
-                <a:rPr lang="zh-CN" sz="2250" dirty="0">
-                  <a:solidFill>
-                    <a:srgbClr val="FFFFFF"/>
-                  </a:solidFill>
-                  <a:latin typeface="Arial"/>
-                  <a:ea typeface="Microsoft YaHei"/>
-                  <a:cs typeface="Arial"/>
-                </a:rPr>
-                <a:t>进一步加入过程信息</a:t>
-              </a:r>
-            </a:p>
-          </p:txBody>
-        </p:sp>
-        <p:sp>
-          <p:nvSpPr>
-            <p:cNvPr id="20" name="TextBox 20"/>
-            <p:cNvSpPr txBox="1"/>
-            <p:nvPr/>
-          </p:nvSpPr>
-          <p:spPr>
-            <a:xfrm>
-              <a:off x="7930515" y="5549265"/>
-              <a:ext cx="2686050" cy="365760"/>
-            </a:xfrm>
-            <a:prstGeom prst="rect">
-              <a:avLst/>
-            </a:prstGeom>
-            <a:noFill/>
-            <a:ln>
-              <a:noFill/>
-            </a:ln>
-          </p:spPr>
-          <p:txBody>
-            <a:bodyPr wrap="none" lIns="0" tIns="0" rIns="0" bIns="0" anchor="t" anchorCtr="0">
-              <a:spAutoFit/>
-            </a:bodyPr>
-            <a:lstStyle/>
-            <a:p>
-              <a:pPr algn="l"/>
-              <a:r>
-                <a:rPr lang="zh-CN" sz="1800" dirty="0">
-                  <a:solidFill>
-                    <a:srgbClr val="D7E2E7"/>
-                  </a:solidFill>
-                  <a:latin typeface="Arial"/>
-                  <a:ea typeface="Microsoft YaHei"/>
-                  <a:cs typeface="Arial"/>
-                </a:rPr>
-                <a:t>研究设备状态与工艺参数</a:t>
-              </a:r>
-            </a:p>
-          </p:txBody>
-        </p:sp>
-      </p:grpSp>
-      <p:sp>
-        <p:nvSpPr>
-          <p:cNvPr id="22" name="TextBox 22"/>
-          <p:cNvSpPr txBox="1"/>
-          <p:nvPr/>
-        </p:nvSpPr>
-        <p:spPr>
-          <a:xfrm>
-            <a:off x="558165" y="6363652"/>
-            <a:ext cx="3191065" cy="213360"/>
-          </a:xfrm>
-          <a:prstGeom prst="rect">
-            <a:avLst/>
-          </a:prstGeom>
-          <a:noFill/>
-          <a:ln>
-            <a:noFill/>
-          </a:ln>
-        </p:spPr>
-        <p:txBody>
-          <a:bodyPr wrap="none" lIns="0" tIns="0" rIns="0" bIns="0" anchor="t" anchorCtr="0">
-            <a:spAutoFit/>
-          </a:bodyPr>
-          <a:lstStyle/>
-          <a:p>
-            <a:pPr algn="l"/>
-            <a:r>
-              <a:rPr lang="zh-CN" sz="1050" dirty="0">
-                <a:solidFill>
-                  <a:srgbClr val="D7E2E7"/>
-                </a:solidFill>
-                <a:latin typeface="Arial"/>
-                <a:ea typeface="Microsoft YaHei"/>
-                <a:cs typeface="Arial"/>
-              </a:rPr>
-              <a:t>质量管理学课程汇报 · 孙德鑫 ｜ 数据：UCI SECOM</a:t>
-            </a:r>
-          </a:p>
-        </p:txBody>
-      </p:sp>
-      <p:sp>
-        <p:nvSpPr>
-          <p:cNvPr id="23" name="TextBox 23"/>
-          <p:cNvSpPr txBox="1"/>
-          <p:nvPr/>
-        </p:nvSpPr>
-        <p:spPr>
-          <a:xfrm>
-            <a:off x="11226165" y="6363652"/>
-            <a:ext cx="495729" cy="213360"/>
-          </a:xfrm>
-          <a:prstGeom prst="rect">
-            <a:avLst/>
-          </a:prstGeom>
-          <a:noFill/>
-          <a:ln>
-            <a:noFill/>
-          </a:ln>
-        </p:spPr>
-        <p:txBody>
-          <a:bodyPr wrap="none" lIns="0" tIns="0" rIns="0" bIns="0" anchor="t" anchorCtr="0">
-            <a:spAutoFit/>
-          </a:bodyPr>
-          <a:lstStyle/>
-          <a:p>
-            <a:pPr algn="l"/>
-            <a:r>
-              <a:rPr lang="zh-CN" sz="1050" dirty="0">
-                <a:solidFill>
-                  <a:srgbClr val="D7E2E7"/>
-                </a:solidFill>
-                <a:latin typeface="Arial"/>
-                <a:ea typeface="Microsoft YaHei"/>
-                <a:cs typeface="Arial"/>
-              </a:rPr>
-              <a:t>09 / 09</a:t>
-            </a:r>
-          </a:p>
-        </p:txBody>
-      </p:sp>
-    </p:spTree>
-  </p:cSld>
-  <p:clrMapOvr>
-    <a:masterClrMapping/>
-  </p:clrMapOvr>
-  <p:transition xmlns:p14="http://schemas.microsoft.com/office/powerpoint/2010/main" p14:dur="400">
-    <p:fade/>
-  </p:transition>
-  <p:timing>
-    <p:tnLst>
-      <p:par>
-        <p:cTn id="1" dur="indefinite" restart="never" nodeType="tmRoot">
-          <p:childTnLst>
-            <p:seq concurrent="1" nextAc="seek">
-              <p:cTn id="2" dur="indefinite" nodeType="mainSeq">
-                <p:childTnLst>
-                  <p:par>
-                    <p:cTn id="3" fill="hold">
-                      <p:stCondLst>
-                        <p:cond delay="indefinite"/>
-                        <p:cond evt="onBegin" delay="0">
-                          <p:tn val="2"/>
-                        </p:cond>
-                      </p:stCondLst>
-                      <p:childTnLst>
-                        <p:par>
-                          <p:cTn id="4" fill="hold">
-                            <p:stCondLst>
-                              <p:cond delay="0"/>
-                            </p:stCondLst>
-                            <p:childTnLst>
-                              <p:par>
-                                <p:cTn id="5" presetID="10" presetClass="entr" presetSubtype="0" fill="hold" nodeType="afterEffect">
-                                  <p:stCondLst>
-                                    <p:cond delay="0"/>
-                                  </p:stCondLst>
-                                  <p:childTnLst>
-                                    <p:set>
-                                      <p:cBhvr>
-                                        <p:cTn id="6" dur="1" fill="hold">
-                                          <p:stCondLst>
-                                            <p:cond delay="0"/>
-                                          </p:stCondLst>
-                                        </p:cTn>
-                                        <p:tgtEl>
-                                          <p:spTgt spid="5"/>
-                                        </p:tgtEl>
-                                        <p:attrNameLst>
-                                          <p:attrName>style.visibility</p:attrName>
-                                        </p:attrNameLst>
-                                      </p:cBhvr>
-                                      <p:to>
-                                        <p:strVal val="visible"/>
-                                      </p:to>
-                                    </p:set>
-                                    <p:animEffect transition="in" filter="fade">
-                                      <p:cBhvr>
-                                        <p:cTn id="7" dur="400"/>
-                                        <p:tgtEl>
-                                          <p:spTgt spid="5"/>
-                                        </p:tgtEl>
-                                      </p:cBhvr>
-                                    </p:animEffect>
-                                  </p:childTnLst>
-                                </p:cTn>
-                              </p:par>
-                            </p:childTnLst>
-                          </p:cTn>
-                        </p:par>
-                        <p:par>
-                          <p:cTn id="8" fill="hold">
-                            <p:stCondLst>
-                              <p:cond delay="900"/>
-                            </p:stCondLst>
-                            <p:childTnLst>
-                              <p:par>
-                                <p:cTn id="9" presetID="10" presetClass="entr" presetSubtype="0" fill="hold" nodeType="afterEffect">
-                                  <p:stCondLst>
-                                    <p:cond delay="0"/>
-                                  </p:stCondLst>
-                                  <p:childTnLst>
-                                    <p:set>
-                                      <p:cBhvr>
-                                        <p:cTn id="10" dur="1" fill="hold">
-                                          <p:stCondLst>
-                                            <p:cond delay="0"/>
-                                          </p:stCondLst>
-                                        </p:cTn>
-                                        <p:tgtEl>
-                                          <p:spTgt spid="11"/>
-                                        </p:tgtEl>
-                                        <p:attrNameLst>
-                                          <p:attrName>style.visibility</p:attrName>
-                                        </p:attrNameLst>
-                                      </p:cBhvr>
-                                      <p:to>
-                                        <p:strVal val="visible"/>
-                                      </p:to>
-                                    </p:set>
-                                    <p:animEffect transition="in" filter="fade">
-                                      <p:cBhvr>
-                                        <p:cTn id="11" dur="400"/>
-                                        <p:tgtEl>
-                                          <p:spTgt spid="11"/>
-                                        </p:tgtEl>
-                                      </p:cBhvr>
-                                    </p:animEffect>
-                                  </p:childTnLst>
-                                </p:cTn>
-                              </p:par>
-                            </p:childTnLst>
-                          </p:cTn>
-                        </p:par>
-                        <p:par>
-                          <p:cTn id="12" fill="hold">
-                            <p:stCondLst>
-                              <p:cond delay="1800"/>
-                            </p:stCondLst>
-                            <p:childTnLst>
-                              <p:par>
-                                <p:cTn id="13" presetID="22" presetClass="entr" presetSubtype="1" fill="hold" nodeType="afterEffect">
-                                  <p:stCondLst>
-                                    <p:cond delay="0"/>
-                                  </p:stCondLst>
-                                  <p:childTnLst>
-                                    <p:set>
-                                      <p:cBhvr>
-                                        <p:cTn id="14" dur="1" fill="hold">
-                                          <p:stCondLst>
-                                            <p:cond delay="0"/>
-                                          </p:stCondLst>
-                                        </p:cTn>
-                                        <p:tgtEl>
-                                          <p:spTgt spid="21"/>
-                                        </p:tgtEl>
-                                        <p:attrNameLst>
-                                          <p:attrName>style.visibility</p:attrName>
-                                        </p:attrNameLst>
-                                      </p:cBhvr>
-                                      <p:to>
-                                        <p:strVal val="visible"/>
-                                      </p:to>
-                                    </p:set>
-                                    <p:animEffect transition="in" filter="wipe(left)">
-                                      <p:cBhvr>
-                                        <p:cTn id="15" dur="400"/>
-                                        <p:tgtEl>
-                                          <p:spTgt spid="21"/>
-                                        </p:tgtEl>
-                                      </p:cBhvr>
-                                    </p:animEffect>
-                                  </p:childTnLst>
-                                </p:cTn>
-                              </p:par>
-                            </p:childTnLst>
-                          </p:cTn>
-                        </p:par>
-                      </p:childTnLst>
-                    </p:cTn>
-                  </p:par>
-                </p:childTnLst>
-              </p:cTn>
-              <p:prevCondLst>
-                <p:cond evt="onPrev" delay="0">
-                  <p:tgtEl>
-                    <p:sldTgt/>
-                  </p:tgtEl>
-                </p:cond>
-              </p:prevCondLst>
-              <p:nextCondLst>
-                <p:cond evt="onNext" delay="0">
-                  <p:tgtEl>
-                    <p:sldTgt/>
-                  </p:tgtEl>
-                </p:cond>
-              </p:nextCondLst>
-            </p:seq>
-          </p:childTnLst>
-        </p:cTn>
-      </p:par>
-    </p:tnLst>
-    <p:bldLst>
-      <p:bldP spid="5" grpId="0"/>
-      <p:bldP spid="11" grpId="0"/>
-      <p:bldP spid="21" grpId="0"/>
     </p:bldLst>
   </p:timing>
 </p:sld>
@@ -15453,4 +18017,299 @@
   </a:objectDefaults>
   <a:extraClrSchemeLst/>
 </a:theme>
+</file>
+
+<file path=ppt/theme/theme2.xml><?xml version="1.0" encoding="utf-8"?>
+<a:theme xmlns:a="http://schemas.openxmlformats.org/drawingml/2006/main" name="Office 主题​​">
+  <a:themeElements>
+    <a:clrScheme name="Office">
+      <a:dk1>
+        <a:sysClr val="windowText" lastClr="000000"/>
+      </a:dk1>
+      <a:lt1>
+        <a:sysClr val="window" lastClr="FFFFFF"/>
+      </a:lt1>
+      <a:dk2>
+        <a:srgbClr val="44546A"/>
+      </a:dk2>
+      <a:lt2>
+        <a:srgbClr val="E7E6E6"/>
+      </a:lt2>
+      <a:accent1>
+        <a:srgbClr val="4472C4"/>
+      </a:accent1>
+      <a:accent2>
+        <a:srgbClr val="ED7D31"/>
+      </a:accent2>
+      <a:accent3>
+        <a:srgbClr val="A5A5A5"/>
+      </a:accent3>
+      <a:accent4>
+        <a:srgbClr val="FFC000"/>
+      </a:accent4>
+      <a:accent5>
+        <a:srgbClr val="5B9BD5"/>
+      </a:accent5>
+      <a:accent6>
+        <a:srgbClr val="70AD47"/>
+      </a:accent6>
+      <a:hlink>
+        <a:srgbClr val="0563C1"/>
+      </a:hlink>
+      <a:folHlink>
+        <a:srgbClr val="954F72"/>
+      </a:folHlink>
+    </a:clrScheme>
+    <a:fontScheme name="Office">
+      <a:majorFont>
+        <a:latin typeface="等线 Light" panose="020F0302020204030204"/>
+        <a:ea typeface=""/>
+        <a:cs typeface=""/>
+        <a:font script="Jpan" typeface="游ゴシック Light"/>
+        <a:font script="Hang" typeface="맑은 고딕"/>
+        <a:font script="Hans" typeface="等线 Light"/>
+        <a:font script="Hant" typeface="新細明體"/>
+        <a:font script="Arab" typeface="Times New Roman"/>
+        <a:font script="Hebr" typeface="Times New Roman"/>
+        <a:font script="Thai" typeface="Angsana New"/>
+        <a:font script="Ethi" typeface="Nyala"/>
+        <a:font script="Beng" typeface="Vrinda"/>
+        <a:font script="Gujr" typeface="Shruti"/>
+        <a:font script="Khmr" typeface="MoolBoran"/>
+        <a:font script="Knda" typeface="Tunga"/>
+        <a:font script="Guru" typeface="Raavi"/>
+        <a:font script="Cans" typeface="Euphemia"/>
+        <a:font script="Cher" typeface="Plantagenet Cherokee"/>
+        <a:font script="Yiii" typeface="Microsoft Yi Baiti"/>
+        <a:font script="Tibt" typeface="Microsoft Himalaya"/>
+        <a:font script="Thaa" typeface="MV Boli"/>
+        <a:font script="Deva" typeface="Mangal"/>
+        <a:font script="Telu" typeface="Gautami"/>
+        <a:font script="Taml" typeface="Latha"/>
+        <a:font script="Syrc" typeface="Estrangelo Edessa"/>
+        <a:font script="Orya" typeface="Kalinga"/>
+        <a:font script="Mlym" typeface="Kartika"/>
+        <a:font script="Laoo" typeface="DokChampa"/>
+        <a:font script="Sinh" typeface="Iskoola Pota"/>
+        <a:font script="Mong" typeface="Mongolian Baiti"/>
+        <a:font script="Viet" typeface="Times New Roman"/>
+        <a:font script="Uigh" typeface="Microsoft Uighur"/>
+        <a:font script="Geor" typeface="Sylfaen"/>
+        <a:font script="Armn" typeface="Arial"/>
+        <a:font script="Bugi" typeface="Leelawadee UI"/>
+        <a:font script="Bopo" typeface="Microsoft JhengHei"/>
+        <a:font script="Java" typeface="Javanese Text"/>
+        <a:font script="Lisu" typeface="Segoe UI"/>
+        <a:font script="Mymr" typeface="Myanmar Text"/>
+        <a:font script="Nkoo" typeface="Ebrima"/>
+        <a:font script="Olck" typeface="Nirmala UI"/>
+        <a:font script="Osma" typeface="Ebrima"/>
+        <a:font script="Phag" typeface="Phagspa"/>
+        <a:font script="Syrn" typeface="Estrangelo Edessa"/>
+        <a:font script="Syrj" typeface="Estrangelo Edessa"/>
+        <a:font script="Syre" typeface="Estrangelo Edessa"/>
+        <a:font script="Sora" typeface="Nirmala UI"/>
+        <a:font script="Tale" typeface="Microsoft Tai Le"/>
+        <a:font script="Talu" typeface="Microsoft New Tai Lue"/>
+        <a:font script="Tfng" typeface="Ebrima"/>
+      </a:majorFont>
+      <a:minorFont>
+        <a:latin typeface="等线" panose="020F0502020204030204"/>
+        <a:ea typeface=""/>
+        <a:cs typeface=""/>
+        <a:font script="Jpan" typeface="游ゴシック"/>
+        <a:font script="Hang" typeface="맑은 고딕"/>
+        <a:font script="Hans" typeface="等线"/>
+        <a:font script="Hant" typeface="新細明體"/>
+        <a:font script="Arab" typeface="Arial"/>
+        <a:font script="Hebr" typeface="Arial"/>
+        <a:font script="Thai" typeface="Cordia New"/>
+        <a:font script="Ethi" typeface="Nyala"/>
+        <a:font script="Beng" typeface="Vrinda"/>
+        <a:font script="Gujr" typeface="Shruti"/>
+        <a:font script="Khmr" typeface="DaunPenh"/>
+        <a:font script="Knda" typeface="Tunga"/>
+        <a:font script="Guru" typeface="Raavi"/>
+        <a:font script="Cans" typeface="Euphemia"/>
+        <a:font script="Cher" typeface="Plantagenet Cherokee"/>
+        <a:font script="Yiii" typeface="Microsoft Yi Baiti"/>
+        <a:font script="Tibt" typeface="Microsoft Himalaya"/>
+        <a:font script="Thaa" typeface="MV Boli"/>
+        <a:font script="Deva" typeface="Mangal"/>
+        <a:font script="Telu" typeface="Gautami"/>
+        <a:font script="Taml" typeface="Latha"/>
+        <a:font script="Syrc" typeface="Estrangelo Edessa"/>
+        <a:font script="Orya" typeface="Kalinga"/>
+        <a:font script="Mlym" typeface="Kartika"/>
+        <a:font script="Laoo" typeface="DokChampa"/>
+        <a:font script="Sinh" typeface="Iskoola Pota"/>
+        <a:font script="Mong" typeface="Mongolian Baiti"/>
+        <a:font script="Viet" typeface="Arial"/>
+        <a:font script="Uigh" typeface="Microsoft Uighur"/>
+        <a:font script="Geor" typeface="Sylfaen"/>
+        <a:font script="Armn" typeface="Arial"/>
+        <a:font script="Bugi" typeface="Leelawadee UI"/>
+        <a:font script="Bopo" typeface="Microsoft JhengHei"/>
+        <a:font script="Java" typeface="Javanese Text"/>
+        <a:font script="Lisu" typeface="Segoe UI"/>
+        <a:font script="Mymr" typeface="Myanmar Text"/>
+        <a:font script="Nkoo" typeface="Ebrima"/>
+        <a:font script="Olck" typeface="Nirmala UI"/>
+        <a:font script="Osma" typeface="Ebrima"/>
+        <a:font script="Phag" typeface="Phagspa"/>
+        <a:font script="Syrn" typeface="Estrangelo Edessa"/>
+        <a:font script="Syrj" typeface="Estrangelo Edessa"/>
+        <a:font script="Syre" typeface="Estrangelo Edessa"/>
+        <a:font script="Sora" typeface="Nirmala UI"/>
+        <a:font script="Tale" typeface="Microsoft Tai Le"/>
+        <a:font script="Talu" typeface="Microsoft New Tai Lue"/>
+        <a:font script="Tfng" typeface="Ebrima"/>
+      </a:minorFont>
+    </a:fontScheme>
+    <a:fmtScheme name="Office">
+      <a:fillStyleLst>
+        <a:solidFill>
+          <a:schemeClr val="phClr"/>
+        </a:solidFill>
+        <a:gradFill rotWithShape="1">
+          <a:gsLst>
+            <a:gs pos="0">
+              <a:schemeClr val="phClr">
+                <a:lumMod val="110000"/>
+                <a:satMod val="105000"/>
+                <a:tint val="67000"/>
+              </a:schemeClr>
+            </a:gs>
+            <a:gs pos="50000">
+              <a:schemeClr val="phClr">
+                <a:lumMod val="105000"/>
+                <a:satMod val="103000"/>
+                <a:tint val="73000"/>
+              </a:schemeClr>
+            </a:gs>
+            <a:gs pos="100000">
+              <a:schemeClr val="phClr">
+                <a:lumMod val="105000"/>
+                <a:satMod val="109000"/>
+                <a:tint val="81000"/>
+              </a:schemeClr>
+            </a:gs>
+          </a:gsLst>
+          <a:lin ang="5400000" scaled="0"/>
+        </a:gradFill>
+        <a:gradFill rotWithShape="1">
+          <a:gsLst>
+            <a:gs pos="0">
+              <a:schemeClr val="phClr">
+                <a:satMod val="103000"/>
+                <a:lumMod val="102000"/>
+                <a:tint val="94000"/>
+              </a:schemeClr>
+            </a:gs>
+            <a:gs pos="50000">
+              <a:schemeClr val="phClr">
+                <a:satMod val="110000"/>
+                <a:lumMod val="100000"/>
+                <a:shade val="100000"/>
+              </a:schemeClr>
+            </a:gs>
+            <a:gs pos="100000">
+              <a:schemeClr val="phClr">
+                <a:lumMod val="99000"/>
+                <a:satMod val="120000"/>
+                <a:shade val="78000"/>
+              </a:schemeClr>
+            </a:gs>
+          </a:gsLst>
+          <a:lin ang="5400000" scaled="0"/>
+        </a:gradFill>
+      </a:fillStyleLst>
+      <a:lnStyleLst>
+        <a:ln w="6350" cap="flat" cmpd="sng" algn="ctr">
+          <a:solidFill>
+            <a:schemeClr val="phClr"/>
+          </a:solidFill>
+          <a:prstDash val="solid"/>
+          <a:miter lim="800000"/>
+        </a:ln>
+        <a:ln w="12700" cap="flat" cmpd="sng" algn="ctr">
+          <a:solidFill>
+            <a:schemeClr val="phClr"/>
+          </a:solidFill>
+          <a:prstDash val="solid"/>
+          <a:miter lim="800000"/>
+        </a:ln>
+        <a:ln w="19050" cap="flat" cmpd="sng" algn="ctr">
+          <a:solidFill>
+            <a:schemeClr val="phClr"/>
+          </a:solidFill>
+          <a:prstDash val="solid"/>
+          <a:miter lim="800000"/>
+        </a:ln>
+      </a:lnStyleLst>
+      <a:effectStyleLst>
+        <a:effectStyle>
+          <a:effectLst/>
+        </a:effectStyle>
+        <a:effectStyle>
+          <a:effectLst/>
+        </a:effectStyle>
+        <a:effectStyle>
+          <a:effectLst>
+            <a:outerShdw blurRad="57150" dist="19050" dir="5400000" algn="ctr" rotWithShape="0">
+              <a:srgbClr val="000000">
+                <a:alpha val="63000"/>
+              </a:srgbClr>
+            </a:outerShdw>
+          </a:effectLst>
+        </a:effectStyle>
+      </a:effectStyleLst>
+      <a:bgFillStyleLst>
+        <a:solidFill>
+          <a:schemeClr val="phClr"/>
+        </a:solidFill>
+        <a:solidFill>
+          <a:schemeClr val="phClr">
+            <a:tint val="95000"/>
+            <a:satMod val="170000"/>
+          </a:schemeClr>
+        </a:solidFill>
+        <a:gradFill rotWithShape="1">
+          <a:gsLst>
+            <a:gs pos="0">
+              <a:schemeClr val="phClr">
+                <a:tint val="93000"/>
+                <a:satMod val="150000"/>
+                <a:shade val="98000"/>
+                <a:lumMod val="102000"/>
+              </a:schemeClr>
+            </a:gs>
+            <a:gs pos="50000">
+              <a:schemeClr val="phClr">
+                <a:tint val="98000"/>
+                <a:satMod val="130000"/>
+                <a:shade val="90000"/>
+                <a:lumMod val="103000"/>
+              </a:schemeClr>
+            </a:gs>
+            <a:gs pos="100000">
+              <a:schemeClr val="phClr">
+                <a:shade val="63000"/>
+                <a:satMod val="120000"/>
+              </a:schemeClr>
+            </a:gs>
+          </a:gsLst>
+          <a:lin ang="5400000" scaled="0"/>
+        </a:gradFill>
+      </a:bgFillStyleLst>
+    </a:fmtScheme>
+  </a:themeElements>
+  <a:objectDefaults/>
+  <a:extraClrSchemeLst/>
+  <a:extLst>
+    <a:ext uri="{05A4C25C-085E-4340-85A3-A5531E510DB2}">
+      <thm15:themeFamily xmlns:thm15="http://schemas.microsoft.com/office/thememl/2012/main" name="Office Theme" id="{62F939B6-93AF-4DB8-9C6B-D6C7DFDC589F}" vid="{4A3C46E8-61CC-4603-A589-7422A47A8E4A}"/>
+    </a:ext>
+  </a:extLst>
+</a:theme>
 </file>